--- a/FINAL COOP PPT 2026.pptx
+++ b/FINAL COOP PPT 2026.pptx
@@ -1,46 +1,40 @@
 
 <file path=ppt/presentation.xml><?xml version="1.0" encoding="utf-8"?>
-<p:presentation xmlns:a="http://schemas.openxmlformats.org/drawingml/2006/main" xmlns:r="http://schemas.openxmlformats.org/officeDocument/2006/relationships" xmlns:p="http://schemas.openxmlformats.org/presentationml/2006/main" showSpecialPlsOnTitleSld="0">
+<p:presentation xmlns:a="http://schemas.openxmlformats.org/drawingml/2006/main" xmlns:r="http://schemas.openxmlformats.org/officeDocument/2006/relationships" xmlns:p="http://schemas.openxmlformats.org/presentationml/2006/main" xmlns:m="http://schemas.openxmlformats.org/officeDocument/2006/math" xmlns:w="http://schemas.openxmlformats.org/wordprocessingml/2006/main" showSpecialPlsOnTitleSld="0">
   <p:sldMasterIdLst>
-    <p:sldMasterId id="2147483648" r:id="rId4"/>
+    <p:sldMasterId id="2147483648" r:id="rId1"/>
   </p:sldMasterIdLst>
-  <p:notesMasterIdLst>
-    <p:notesMasterId r:id="rId26"/>
-  </p:notesMasterIdLst>
-  <p:handoutMasterIdLst>
-    <p:handoutMasterId r:id="rId27"/>
-  </p:handoutMasterIdLst>
   <p:sldIdLst>
-    <p:sldId id="256" r:id="rId5"/>
-    <p:sldId id="257" r:id="rId6"/>
-    <p:sldId id="269" r:id="rId7"/>
-    <p:sldId id="270" r:id="rId8"/>
-    <p:sldId id="271" r:id="rId9"/>
-    <p:sldId id="273" r:id="rId10"/>
-    <p:sldId id="274" r:id="rId11"/>
-    <p:sldId id="275" r:id="rId12"/>
-    <p:sldId id="276" r:id="rId13"/>
-    <p:sldId id="277" r:id="rId14"/>
-    <p:sldId id="278" r:id="rId15"/>
-    <p:sldId id="279" r:id="rId16"/>
-    <p:sldId id="280" r:id="rId17"/>
-    <p:sldId id="286" r:id="rId18"/>
-    <p:sldId id="287" r:id="rId19"/>
-    <p:sldId id="281" r:id="rId20"/>
-    <p:sldId id="282" r:id="rId21"/>
-    <p:sldId id="283" r:id="rId22"/>
-    <p:sldId id="284" r:id="rId23"/>
-    <p:sldId id="285" r:id="rId24"/>
-    <p:sldId id="268" r:id="rId25"/>
+    <p:sldId id="256" r:id="rId3"/>
+    <p:sldId id="257" r:id="rId4"/>
+    <p:sldId id="258" r:id="rId5"/>
+    <p:sldId id="259" r:id="rId6"/>
+    <p:sldId id="260" r:id="rId7"/>
+    <p:sldId id="261" r:id="rId8"/>
+    <p:sldId id="262" r:id="rId9"/>
+    <p:sldId id="263" r:id="rId10"/>
+    <p:sldId id="264" r:id="rId11"/>
+    <p:sldId id="265" r:id="rId12"/>
+    <p:sldId id="266" r:id="rId13"/>
+    <p:sldId id="267" r:id="rId14"/>
+    <p:sldId id="268" r:id="rId15"/>
+    <p:sldId id="269" r:id="rId16"/>
+    <p:sldId id="270" r:id="rId17"/>
+    <p:sldId id="271" r:id="rId18"/>
+    <p:sldId id="272" r:id="rId19"/>
+    <p:sldId id="273" r:id="rId20"/>
+    <p:sldId id="274" r:id="rId21"/>
+    <p:sldId id="275" r:id="rId22"/>
+    <p:sldId id="276" r:id="rId23"/>
   </p:sldIdLst>
   <p:sldSz cx="9144000" cy="6858000" type="screen4x3"/>
-  <p:notesSz cx="7559675" cy="10691813"/>
+  <p:notesSz cx="9144000" cy="6858000"/>
   <p:defaultTextStyle>
     <a:defPPr>
       <a:defRPr lang="en-US"/>
     </a:defPPr>
-    <a:lvl1pPr marL="0" algn="l" defTabSz="914400" rtl="0" eaLnBrk="1" latinLnBrk="0" hangingPunct="1">
-      <a:defRPr sz="1800" kern="1200">
+    <a:lvl1pPr marL="0" algn="l" defTabSz="914400">
+      <a:defRPr sz="1800">
         <a:solidFill>
           <a:schemeClr val="tx1"/>
         </a:solidFill>
@@ -49,8 +43,8 @@
         <a:cs typeface="+mn-cs"/>
       </a:defRPr>
     </a:lvl1pPr>
-    <a:lvl2pPr marL="457200" algn="l" defTabSz="914400" rtl="0" eaLnBrk="1" latinLnBrk="0" hangingPunct="1">
-      <a:defRPr sz="1800" kern="1200">
+    <a:lvl2pPr marL="457200" algn="l" defTabSz="914400">
+      <a:defRPr sz="1800">
         <a:solidFill>
           <a:schemeClr val="tx1"/>
         </a:solidFill>
@@ -59,8 +53,8 @@
         <a:cs typeface="+mn-cs"/>
       </a:defRPr>
     </a:lvl2pPr>
-    <a:lvl3pPr marL="914400" algn="l" defTabSz="914400" rtl="0" eaLnBrk="1" latinLnBrk="0" hangingPunct="1">
-      <a:defRPr sz="1800" kern="1200">
+    <a:lvl3pPr marL="914400" algn="l" defTabSz="914400">
+      <a:defRPr sz="1800">
         <a:solidFill>
           <a:schemeClr val="tx1"/>
         </a:solidFill>
@@ -69,8 +63,8 @@
         <a:cs typeface="+mn-cs"/>
       </a:defRPr>
     </a:lvl3pPr>
-    <a:lvl4pPr marL="1371600" algn="l" defTabSz="914400" rtl="0" eaLnBrk="1" latinLnBrk="0" hangingPunct="1">
-      <a:defRPr sz="1800" kern="1200">
+    <a:lvl4pPr marL="1371600" algn="l" defTabSz="914400">
+      <a:defRPr sz="1800">
         <a:solidFill>
           <a:schemeClr val="tx1"/>
         </a:solidFill>
@@ -79,8 +73,8 @@
         <a:cs typeface="+mn-cs"/>
       </a:defRPr>
     </a:lvl4pPr>
-    <a:lvl5pPr marL="1828800" algn="l" defTabSz="914400" rtl="0" eaLnBrk="1" latinLnBrk="0" hangingPunct="1">
-      <a:defRPr sz="1800" kern="1200">
+    <a:lvl5pPr marL="1828800" algn="l" defTabSz="914400">
+      <a:defRPr sz="1800">
         <a:solidFill>
           <a:schemeClr val="tx1"/>
         </a:solidFill>
@@ -89,8 +83,8 @@
         <a:cs typeface="+mn-cs"/>
       </a:defRPr>
     </a:lvl5pPr>
-    <a:lvl6pPr marL="2286000" algn="l" defTabSz="914400" rtl="0" eaLnBrk="1" latinLnBrk="0" hangingPunct="1">
-      <a:defRPr sz="1800" kern="1200">
+    <a:lvl6pPr marL="2286000" algn="l" defTabSz="914400">
+      <a:defRPr sz="1800">
         <a:solidFill>
           <a:schemeClr val="tx1"/>
         </a:solidFill>
@@ -99,8 +93,8 @@
         <a:cs typeface="+mn-cs"/>
       </a:defRPr>
     </a:lvl6pPr>
-    <a:lvl7pPr marL="2743200" algn="l" defTabSz="914400" rtl="0" eaLnBrk="1" latinLnBrk="0" hangingPunct="1">
-      <a:defRPr sz="1800" kern="1200">
+    <a:lvl7pPr marL="2743200" algn="l" defTabSz="914400">
+      <a:defRPr sz="1800">
         <a:solidFill>
           <a:schemeClr val="tx1"/>
         </a:solidFill>
@@ -109,8 +103,8 @@
         <a:cs typeface="+mn-cs"/>
       </a:defRPr>
     </a:lvl7pPr>
-    <a:lvl8pPr marL="3200400" algn="l" defTabSz="914400" rtl="0" eaLnBrk="1" latinLnBrk="0" hangingPunct="1">
-      <a:defRPr sz="1800" kern="1200">
+    <a:lvl8pPr marL="3200400" algn="l" defTabSz="914400">
+      <a:defRPr sz="1800">
         <a:solidFill>
           <a:schemeClr val="tx1"/>
         </a:solidFill>
@@ -119,8 +113,8 @@
         <a:cs typeface="+mn-cs"/>
       </a:defRPr>
     </a:lvl8pPr>
-    <a:lvl9pPr marL="3657600" algn="l" defTabSz="914400" rtl="0" eaLnBrk="1" latinLnBrk="0" hangingPunct="1">
-      <a:defRPr sz="1800" kern="1200">
+    <a:lvl9pPr marL="3657600" algn="l" defTabSz="914400">
+      <a:defRPr sz="1800">
         <a:solidFill>
           <a:schemeClr val="tx1"/>
         </a:solidFill>
@@ -130,690 +124,11 @@
       </a:defRPr>
     </a:lvl9pPr>
   </p:defaultTextStyle>
-  <p:extLst>
-    <p:ext uri="{EFAFB233-063F-42B5-8137-9DF3F51BA10A}">
-      <p15:sldGuideLst xmlns:p15="http://schemas.microsoft.com/office/powerpoint/2012/main">
-        <p15:guide id="1" orient="horz" pos="2160">
-          <p15:clr>
-            <a:srgbClr val="A4A3A4"/>
-          </p15:clr>
-        </p15:guide>
-        <p15:guide id="2" pos="2880">
-          <p15:clr>
-            <a:srgbClr val="A4A3A4"/>
-          </p15:clr>
-        </p15:guide>
-      </p15:sldGuideLst>
-    </p:ext>
-  </p:extLst>
 </p:presentation>
 </file>
 
-<file path=ppt/handoutMasters/handoutMaster1.xml><?xml version="1.0" encoding="utf-8"?>
-<p:handoutMaster xmlns:a="http://schemas.openxmlformats.org/drawingml/2006/main" xmlns:r="http://schemas.openxmlformats.org/officeDocument/2006/relationships" xmlns:p="http://schemas.openxmlformats.org/presentationml/2006/main">
-  <p:cSld>
-    <p:bg>
-      <p:bgRef idx="1001">
-        <a:schemeClr val="bg1"/>
-      </p:bgRef>
-    </p:bg>
-    <p:spTree>
-      <p:nvGrpSpPr>
-        <p:cNvPr id="1" name=""/>
-        <p:cNvGrpSpPr/>
-        <p:nvPr/>
-      </p:nvGrpSpPr>
-      <p:grpSpPr>
-        <a:xfrm>
-          <a:off x="0" y="0"/>
-          <a:ext cx="0" cy="0"/>
-          <a:chOff x="0" y="0"/>
-          <a:chExt cx="0" cy="0"/>
-        </a:xfrm>
-      </p:grpSpPr>
-      <p:sp>
-        <p:nvSpPr>
-          <p:cNvPr id="2" name="Header Placeholder 1">
-            <a:extLst>
-              <a:ext uri="{FF2B5EF4-FFF2-40B4-BE49-F238E27FC236}">
-                <a16:creationId xmlns:a16="http://schemas.microsoft.com/office/drawing/2014/main" id="{EF607C9A-EDB5-4C0A-BCFE-81AAF6133E68}"/>
-              </a:ext>
-            </a:extLst>
-          </p:cNvPr>
-          <p:cNvSpPr>
-            <a:spLocks noGrp="1"/>
-          </p:cNvSpPr>
-          <p:nvPr>
-            <p:ph type="hdr" sz="quarter"/>
-          </p:nvPr>
-        </p:nvSpPr>
-        <p:spPr>
-          <a:xfrm>
-            <a:off x="0" y="0"/>
-            <a:ext cx="3276600" cy="536575"/>
-          </a:xfrm>
-          <a:prstGeom prst="rect">
-            <a:avLst/>
-          </a:prstGeom>
-        </p:spPr>
-        <p:txBody>
-          <a:bodyPr vert="horz" lIns="91440" tIns="45720" rIns="91440" bIns="45720" rtlCol="0"/>
-          <a:lstStyle>
-            <a:lvl1pPr algn="l">
-              <a:defRPr sz="1200"/>
-            </a:lvl1pPr>
-          </a:lstStyle>
-          <a:p>
-            <a:endParaRPr lang="en-US"/>
-          </a:p>
-        </p:txBody>
-      </p:sp>
-      <p:sp>
-        <p:nvSpPr>
-          <p:cNvPr id="3" name="Date Placeholder 2">
-            <a:extLst>
-              <a:ext uri="{FF2B5EF4-FFF2-40B4-BE49-F238E27FC236}">
-                <a16:creationId xmlns:a16="http://schemas.microsoft.com/office/drawing/2014/main" id="{54F00B0C-2831-4624-A5D3-43F42D30BA74}"/>
-              </a:ext>
-            </a:extLst>
-          </p:cNvPr>
-          <p:cNvSpPr>
-            <a:spLocks noGrp="1"/>
-          </p:cNvSpPr>
-          <p:nvPr>
-            <p:ph type="dt" sz="quarter" idx="1"/>
-          </p:nvPr>
-        </p:nvSpPr>
-        <p:spPr>
-          <a:xfrm>
-            <a:off x="4281488" y="0"/>
-            <a:ext cx="3276600" cy="536575"/>
-          </a:xfrm>
-          <a:prstGeom prst="rect">
-            <a:avLst/>
-          </a:prstGeom>
-        </p:spPr>
-        <p:txBody>
-          <a:bodyPr vert="horz" lIns="91440" tIns="45720" rIns="91440" bIns="45720" rtlCol="0"/>
-          <a:lstStyle>
-            <a:lvl1pPr algn="r">
-              <a:defRPr sz="1200"/>
-            </a:lvl1pPr>
-          </a:lstStyle>
-          <a:p>
-            <a:fld id="{25D2B5EB-424D-4C39-A8AB-65F1D7895EF3}" type="datetimeFigureOut">
-              <a:rPr lang="en-US" smtClean="0"/>
-              <a:pPr/>
-              <a:t>5/20/2026</a:t>
-            </a:fld>
-            <a:endParaRPr lang="en-US"/>
-          </a:p>
-        </p:txBody>
-      </p:sp>
-      <p:sp>
-        <p:nvSpPr>
-          <p:cNvPr id="4" name="Footer Placeholder 3">
-            <a:extLst>
-              <a:ext uri="{FF2B5EF4-FFF2-40B4-BE49-F238E27FC236}">
-                <a16:creationId xmlns:a16="http://schemas.microsoft.com/office/drawing/2014/main" id="{B334ABA9-0C2F-480A-B554-A457296C39B5}"/>
-              </a:ext>
-            </a:extLst>
-          </p:cNvPr>
-          <p:cNvSpPr>
-            <a:spLocks noGrp="1"/>
-          </p:cNvSpPr>
-          <p:nvPr>
-            <p:ph type="ftr" sz="quarter" idx="2"/>
-          </p:nvPr>
-        </p:nvSpPr>
-        <p:spPr>
-          <a:xfrm>
-            <a:off x="0" y="10155238"/>
-            <a:ext cx="3276600" cy="536575"/>
-          </a:xfrm>
-          <a:prstGeom prst="rect">
-            <a:avLst/>
-          </a:prstGeom>
-        </p:spPr>
-        <p:txBody>
-          <a:bodyPr vert="horz" lIns="91440" tIns="45720" rIns="91440" bIns="45720" rtlCol="0" anchor="b"/>
-          <a:lstStyle>
-            <a:lvl1pPr algn="l">
-              <a:defRPr sz="1200"/>
-            </a:lvl1pPr>
-          </a:lstStyle>
-          <a:p>
-            <a:r>
-              <a:rPr lang="en-US"/>
-              <a:t>Name of the faculty [Group: G00] [Sem:2nd]</a:t>
-            </a:r>
-          </a:p>
-        </p:txBody>
-      </p:sp>
-      <p:sp>
-        <p:nvSpPr>
-          <p:cNvPr id="5" name="Slide Number Placeholder 4">
-            <a:extLst>
-              <a:ext uri="{FF2B5EF4-FFF2-40B4-BE49-F238E27FC236}">
-                <a16:creationId xmlns:a16="http://schemas.microsoft.com/office/drawing/2014/main" id="{46F3BA01-5457-4975-8BF5-D0EAD49D534B}"/>
-              </a:ext>
-            </a:extLst>
-          </p:cNvPr>
-          <p:cNvSpPr>
-            <a:spLocks noGrp="1"/>
-          </p:cNvSpPr>
-          <p:nvPr>
-            <p:ph type="sldNum" sz="quarter" idx="3"/>
-          </p:nvPr>
-        </p:nvSpPr>
-        <p:spPr>
-          <a:xfrm>
-            <a:off x="4281488" y="10155238"/>
-            <a:ext cx="3276600" cy="536575"/>
-          </a:xfrm>
-          <a:prstGeom prst="rect">
-            <a:avLst/>
-          </a:prstGeom>
-        </p:spPr>
-        <p:txBody>
-          <a:bodyPr vert="horz" lIns="91440" tIns="45720" rIns="91440" bIns="45720" rtlCol="0" anchor="b"/>
-          <a:lstStyle>
-            <a:lvl1pPr algn="r">
-              <a:defRPr sz="1200"/>
-            </a:lvl1pPr>
-          </a:lstStyle>
-          <a:p>
-            <a:fld id="{E4199376-55CE-4213-A97D-9D70929AC508}" type="slidenum">
-              <a:rPr lang="en-US" smtClean="0"/>
-              <a:pPr/>
-              <a:t>‹#›</a:t>
-            </a:fld>
-            <a:endParaRPr lang="en-US"/>
-          </a:p>
-        </p:txBody>
-      </p:sp>
-    </p:spTree>
-    <p:extLst>
-      <p:ext uri="{BB962C8B-B14F-4D97-AF65-F5344CB8AC3E}">
-        <p14:creationId xmlns:p14="http://schemas.microsoft.com/office/powerpoint/2010/main" val="4123002274"/>
-      </p:ext>
-    </p:extLst>
-  </p:cSld>
-  <p:clrMap bg1="lt1" tx1="dk1" bg2="lt2" tx2="dk2" accent1="accent1" accent2="accent2" accent3="accent3" accent4="accent4" accent5="accent5" accent6="accent6" hlink="hlink" folHlink="folHlink"/>
-  <p:hf hdr="0" dt="0"/>
-</p:handoutMaster>
-</file>
-
-<file path=ppt/notesMasters/notesMaster1.xml><?xml version="1.0" encoding="utf-8"?>
-<p:notesMaster xmlns:a="http://schemas.openxmlformats.org/drawingml/2006/main" xmlns:r="http://schemas.openxmlformats.org/officeDocument/2006/relationships" xmlns:p="http://schemas.openxmlformats.org/presentationml/2006/main">
-  <p:cSld>
-    <p:bg>
-      <p:bgRef idx="1001">
-        <a:schemeClr val="bg1"/>
-      </p:bgRef>
-    </p:bg>
-    <p:spTree>
-      <p:nvGrpSpPr>
-        <p:cNvPr id="1" name=""/>
-        <p:cNvGrpSpPr/>
-        <p:nvPr/>
-      </p:nvGrpSpPr>
-      <p:grpSpPr>
-        <a:xfrm>
-          <a:off x="0" y="0"/>
-          <a:ext cx="0" cy="0"/>
-          <a:chOff x="0" y="0"/>
-          <a:chExt cx="0" cy="0"/>
-        </a:xfrm>
-      </p:grpSpPr>
-      <p:sp>
-        <p:nvSpPr>
-          <p:cNvPr id="2" name="Header Placeholder 1"/>
-          <p:cNvSpPr>
-            <a:spLocks noGrp="1"/>
-          </p:cNvSpPr>
-          <p:nvPr>
-            <p:ph type="hdr" sz="quarter"/>
-          </p:nvPr>
-        </p:nvSpPr>
-        <p:spPr>
-          <a:xfrm>
-            <a:off x="0" y="0"/>
-            <a:ext cx="3276600" cy="536575"/>
-          </a:xfrm>
-          <a:prstGeom prst="rect">
-            <a:avLst/>
-          </a:prstGeom>
-        </p:spPr>
-        <p:txBody>
-          <a:bodyPr vert="horz" lIns="91440" tIns="45720" rIns="91440" bIns="45720" rtlCol="0"/>
-          <a:lstStyle>
-            <a:lvl1pPr algn="l">
-              <a:defRPr sz="1200"/>
-            </a:lvl1pPr>
-          </a:lstStyle>
-          <a:p>
-            <a:endParaRPr lang="en-US"/>
-          </a:p>
-        </p:txBody>
-      </p:sp>
-      <p:sp>
-        <p:nvSpPr>
-          <p:cNvPr id="3" name="Date Placeholder 2"/>
-          <p:cNvSpPr>
-            <a:spLocks noGrp="1"/>
-          </p:cNvSpPr>
-          <p:nvPr>
-            <p:ph type="dt" idx="1"/>
-          </p:nvPr>
-        </p:nvSpPr>
-        <p:spPr>
-          <a:xfrm>
-            <a:off x="4281488" y="0"/>
-            <a:ext cx="3276600" cy="536575"/>
-          </a:xfrm>
-          <a:prstGeom prst="rect">
-            <a:avLst/>
-          </a:prstGeom>
-        </p:spPr>
-        <p:txBody>
-          <a:bodyPr vert="horz" lIns="91440" tIns="45720" rIns="91440" bIns="45720" rtlCol="0"/>
-          <a:lstStyle>
-            <a:lvl1pPr algn="r">
-              <a:defRPr sz="1200"/>
-            </a:lvl1pPr>
-          </a:lstStyle>
-          <a:p>
-            <a:fld id="{888BC1CF-45D5-4DEE-AAB8-8C5341844FC9}" type="datetimeFigureOut">
-              <a:rPr lang="en-US" smtClean="0"/>
-              <a:pPr/>
-              <a:t>5/20/2026</a:t>
-            </a:fld>
-            <a:endParaRPr lang="en-US"/>
-          </a:p>
-        </p:txBody>
-      </p:sp>
-      <p:sp>
-        <p:nvSpPr>
-          <p:cNvPr id="4" name="Slide Image Placeholder 3"/>
-          <p:cNvSpPr>
-            <a:spLocks noGrp="1" noRot="1" noChangeAspect="1"/>
-          </p:cNvSpPr>
-          <p:nvPr>
-            <p:ph type="sldImg" idx="2"/>
-          </p:nvPr>
-        </p:nvSpPr>
-        <p:spPr>
-          <a:xfrm>
-            <a:off x="1374775" y="1336675"/>
-            <a:ext cx="4810125" cy="3608388"/>
-          </a:xfrm>
-          <a:prstGeom prst="rect">
-            <a:avLst/>
-          </a:prstGeom>
-          <a:noFill/>
-          <a:ln w="12700">
-            <a:solidFill>
-              <a:prstClr val="black"/>
-            </a:solidFill>
-          </a:ln>
-        </p:spPr>
-        <p:txBody>
-          <a:bodyPr vert="horz" lIns="91440" tIns="45720" rIns="91440" bIns="45720" rtlCol="0" anchor="ctr"/>
-          <a:lstStyle/>
-          <a:p>
-            <a:endParaRPr lang="en-US"/>
-          </a:p>
-        </p:txBody>
-      </p:sp>
-      <p:sp>
-        <p:nvSpPr>
-          <p:cNvPr id="5" name="Notes Placeholder 4"/>
-          <p:cNvSpPr>
-            <a:spLocks noGrp="1"/>
-          </p:cNvSpPr>
-          <p:nvPr>
-            <p:ph type="body" sz="quarter" idx="3"/>
-          </p:nvPr>
-        </p:nvSpPr>
-        <p:spPr>
-          <a:xfrm>
-            <a:off x="755650" y="5145088"/>
-            <a:ext cx="6048375" cy="4210050"/>
-          </a:xfrm>
-          <a:prstGeom prst="rect">
-            <a:avLst/>
-          </a:prstGeom>
-        </p:spPr>
-        <p:txBody>
-          <a:bodyPr vert="horz" lIns="91440" tIns="45720" rIns="91440" bIns="45720" rtlCol="0"/>
-          <a:lstStyle/>
-          <a:p>
-            <a:pPr lvl="0"/>
-            <a:r>
-              <a:rPr lang="en-US"/>
-              <a:t>Click to edit Master text styles</a:t>
-            </a:r>
-          </a:p>
-          <a:p>
-            <a:pPr lvl="1"/>
-            <a:r>
-              <a:rPr lang="en-US"/>
-              <a:t>Second level</a:t>
-            </a:r>
-          </a:p>
-          <a:p>
-            <a:pPr lvl="2"/>
-            <a:r>
-              <a:rPr lang="en-US"/>
-              <a:t>Third level</a:t>
-            </a:r>
-          </a:p>
-          <a:p>
-            <a:pPr lvl="3"/>
-            <a:r>
-              <a:rPr lang="en-US"/>
-              <a:t>Fourth level</a:t>
-            </a:r>
-          </a:p>
-          <a:p>
-            <a:pPr lvl="4"/>
-            <a:r>
-              <a:rPr lang="en-US"/>
-              <a:t>Fifth level</a:t>
-            </a:r>
-          </a:p>
-        </p:txBody>
-      </p:sp>
-      <p:sp>
-        <p:nvSpPr>
-          <p:cNvPr id="6" name="Footer Placeholder 5"/>
-          <p:cNvSpPr>
-            <a:spLocks noGrp="1"/>
-          </p:cNvSpPr>
-          <p:nvPr>
-            <p:ph type="ftr" sz="quarter" idx="4"/>
-          </p:nvPr>
-        </p:nvSpPr>
-        <p:spPr>
-          <a:xfrm>
-            <a:off x="0" y="10155238"/>
-            <a:ext cx="3276600" cy="536575"/>
-          </a:xfrm>
-          <a:prstGeom prst="rect">
-            <a:avLst/>
-          </a:prstGeom>
-        </p:spPr>
-        <p:txBody>
-          <a:bodyPr vert="horz" lIns="91440" tIns="45720" rIns="91440" bIns="45720" rtlCol="0" anchor="b"/>
-          <a:lstStyle>
-            <a:lvl1pPr algn="l">
-              <a:defRPr sz="1200"/>
-            </a:lvl1pPr>
-          </a:lstStyle>
-          <a:p>
-            <a:r>
-              <a:rPr lang="en-US"/>
-              <a:t>Name of the faculty [Group: G00] [Sem:2nd]</a:t>
-            </a:r>
-          </a:p>
-        </p:txBody>
-      </p:sp>
-      <p:sp>
-        <p:nvSpPr>
-          <p:cNvPr id="7" name="Slide Number Placeholder 6"/>
-          <p:cNvSpPr>
-            <a:spLocks noGrp="1"/>
-          </p:cNvSpPr>
-          <p:nvPr>
-            <p:ph type="sldNum" sz="quarter" idx="5"/>
-          </p:nvPr>
-        </p:nvSpPr>
-        <p:spPr>
-          <a:xfrm>
-            <a:off x="4281488" y="10155238"/>
-            <a:ext cx="3276600" cy="536575"/>
-          </a:xfrm>
-          <a:prstGeom prst="rect">
-            <a:avLst/>
-          </a:prstGeom>
-        </p:spPr>
-        <p:txBody>
-          <a:bodyPr vert="horz" lIns="91440" tIns="45720" rIns="91440" bIns="45720" rtlCol="0" anchor="b"/>
-          <a:lstStyle>
-            <a:lvl1pPr algn="r">
-              <a:defRPr sz="1200"/>
-            </a:lvl1pPr>
-          </a:lstStyle>
-          <a:p>
-            <a:fld id="{C5A7523A-12D4-4E0F-9409-B3F845B48333}" type="slidenum">
-              <a:rPr lang="en-US" smtClean="0"/>
-              <a:pPr/>
-              <a:t>‹#›</a:t>
-            </a:fld>
-            <a:endParaRPr lang="en-US"/>
-          </a:p>
-        </p:txBody>
-      </p:sp>
-    </p:spTree>
-    <p:extLst>
-      <p:ext uri="{BB962C8B-B14F-4D97-AF65-F5344CB8AC3E}">
-        <p14:creationId xmlns:p14="http://schemas.microsoft.com/office/powerpoint/2010/main" val="3458122221"/>
-      </p:ext>
-    </p:extLst>
-  </p:cSld>
-  <p:clrMap bg1="lt1" tx1="dk1" bg2="lt2" tx2="dk2" accent1="accent1" accent2="accent2" accent3="accent3" accent4="accent4" accent5="accent5" accent6="accent6" hlink="hlink" folHlink="folHlink"/>
-  <p:hf hdr="0" dt="0"/>
-  <p:notesStyle>
-    <a:lvl1pPr marL="0" algn="l" defTabSz="914400" rtl="0" eaLnBrk="1" latinLnBrk="0" hangingPunct="1">
-      <a:defRPr sz="1200" kern="1200">
-        <a:solidFill>
-          <a:schemeClr val="tx1"/>
-        </a:solidFill>
-        <a:latin typeface="+mn-lt"/>
-        <a:ea typeface="+mn-ea"/>
-        <a:cs typeface="+mn-cs"/>
-      </a:defRPr>
-    </a:lvl1pPr>
-    <a:lvl2pPr marL="457200" algn="l" defTabSz="914400" rtl="0" eaLnBrk="1" latinLnBrk="0" hangingPunct="1">
-      <a:defRPr sz="1200" kern="1200">
-        <a:solidFill>
-          <a:schemeClr val="tx1"/>
-        </a:solidFill>
-        <a:latin typeface="+mn-lt"/>
-        <a:ea typeface="+mn-ea"/>
-        <a:cs typeface="+mn-cs"/>
-      </a:defRPr>
-    </a:lvl2pPr>
-    <a:lvl3pPr marL="914400" algn="l" defTabSz="914400" rtl="0" eaLnBrk="1" latinLnBrk="0" hangingPunct="1">
-      <a:defRPr sz="1200" kern="1200">
-        <a:solidFill>
-          <a:schemeClr val="tx1"/>
-        </a:solidFill>
-        <a:latin typeface="+mn-lt"/>
-        <a:ea typeface="+mn-ea"/>
-        <a:cs typeface="+mn-cs"/>
-      </a:defRPr>
-    </a:lvl3pPr>
-    <a:lvl4pPr marL="1371600" algn="l" defTabSz="914400" rtl="0" eaLnBrk="1" latinLnBrk="0" hangingPunct="1">
-      <a:defRPr sz="1200" kern="1200">
-        <a:solidFill>
-          <a:schemeClr val="tx1"/>
-        </a:solidFill>
-        <a:latin typeface="+mn-lt"/>
-        <a:ea typeface="+mn-ea"/>
-        <a:cs typeface="+mn-cs"/>
-      </a:defRPr>
-    </a:lvl4pPr>
-    <a:lvl5pPr marL="1828800" algn="l" defTabSz="914400" rtl="0" eaLnBrk="1" latinLnBrk="0" hangingPunct="1">
-      <a:defRPr sz="1200" kern="1200">
-        <a:solidFill>
-          <a:schemeClr val="tx1"/>
-        </a:solidFill>
-        <a:latin typeface="+mn-lt"/>
-        <a:ea typeface="+mn-ea"/>
-        <a:cs typeface="+mn-cs"/>
-      </a:defRPr>
-    </a:lvl5pPr>
-    <a:lvl6pPr marL="2286000" algn="l" defTabSz="914400" rtl="0" eaLnBrk="1" latinLnBrk="0" hangingPunct="1">
-      <a:defRPr sz="1200" kern="1200">
-        <a:solidFill>
-          <a:schemeClr val="tx1"/>
-        </a:solidFill>
-        <a:latin typeface="+mn-lt"/>
-        <a:ea typeface="+mn-ea"/>
-        <a:cs typeface="+mn-cs"/>
-      </a:defRPr>
-    </a:lvl6pPr>
-    <a:lvl7pPr marL="2743200" algn="l" defTabSz="914400" rtl="0" eaLnBrk="1" latinLnBrk="0" hangingPunct="1">
-      <a:defRPr sz="1200" kern="1200">
-        <a:solidFill>
-          <a:schemeClr val="tx1"/>
-        </a:solidFill>
-        <a:latin typeface="+mn-lt"/>
-        <a:ea typeface="+mn-ea"/>
-        <a:cs typeface="+mn-cs"/>
-      </a:defRPr>
-    </a:lvl7pPr>
-    <a:lvl8pPr marL="3200400" algn="l" defTabSz="914400" rtl="0" eaLnBrk="1" latinLnBrk="0" hangingPunct="1">
-      <a:defRPr sz="1200" kern="1200">
-        <a:solidFill>
-          <a:schemeClr val="tx1"/>
-        </a:solidFill>
-        <a:latin typeface="+mn-lt"/>
-        <a:ea typeface="+mn-ea"/>
-        <a:cs typeface="+mn-cs"/>
-      </a:defRPr>
-    </a:lvl8pPr>
-    <a:lvl9pPr marL="3657600" algn="l" defTabSz="914400" rtl="0" eaLnBrk="1" latinLnBrk="0" hangingPunct="1">
-      <a:defRPr sz="1200" kern="1200">
-        <a:solidFill>
-          <a:schemeClr val="tx1"/>
-        </a:solidFill>
-        <a:latin typeface="+mn-lt"/>
-        <a:ea typeface="+mn-ea"/>
-        <a:cs typeface="+mn-cs"/>
-      </a:defRPr>
-    </a:lvl9pPr>
-  </p:notesStyle>
-</p:notesMaster>
-</file>
-
-<file path=ppt/notesSlides/notesSlide1.xml><?xml version="1.0" encoding="utf-8"?>
-<p:notes xmlns:a="http://schemas.openxmlformats.org/drawingml/2006/main" xmlns:r="http://schemas.openxmlformats.org/officeDocument/2006/relationships" xmlns:p="http://schemas.openxmlformats.org/presentationml/2006/main">
-  <p:cSld>
-    <p:spTree>
-      <p:nvGrpSpPr>
-        <p:cNvPr id="1" name=""/>
-        <p:cNvGrpSpPr/>
-        <p:nvPr/>
-      </p:nvGrpSpPr>
-      <p:grpSpPr>
-        <a:xfrm>
-          <a:off x="0" y="0"/>
-          <a:ext cx="0" cy="0"/>
-          <a:chOff x="0" y="0"/>
-          <a:chExt cx="0" cy="0"/>
-        </a:xfrm>
-      </p:grpSpPr>
-      <p:sp>
-        <p:nvSpPr>
-          <p:cNvPr id="2" name="Slide Image Placeholder 1"/>
-          <p:cNvSpPr>
-            <a:spLocks noGrp="1" noRot="1" noChangeAspect="1"/>
-          </p:cNvSpPr>
-          <p:nvPr>
-            <p:ph type="sldImg"/>
-          </p:nvPr>
-        </p:nvSpPr>
-        <p:spPr/>
-      </p:sp>
-      <p:sp>
-        <p:nvSpPr>
-          <p:cNvPr id="3" name="Notes Placeholder 2"/>
-          <p:cNvSpPr>
-            <a:spLocks noGrp="1"/>
-          </p:cNvSpPr>
-          <p:nvPr>
-            <p:ph type="body" idx="1"/>
-          </p:nvPr>
-        </p:nvSpPr>
-        <p:spPr/>
-        <p:txBody>
-          <a:bodyPr/>
-          <a:lstStyle/>
-          <a:p>
-            <a:endParaRPr lang="en-US"/>
-          </a:p>
-        </p:txBody>
-      </p:sp>
-      <p:sp>
-        <p:nvSpPr>
-          <p:cNvPr id="4" name="Slide Number Placeholder 3"/>
-          <p:cNvSpPr>
-            <a:spLocks noGrp="1"/>
-          </p:cNvSpPr>
-          <p:nvPr>
-            <p:ph type="sldNum" sz="quarter" idx="10"/>
-          </p:nvPr>
-        </p:nvSpPr>
-        <p:spPr/>
-        <p:txBody>
-          <a:bodyPr/>
-          <a:lstStyle/>
-          <a:p>
-            <a:fld id="{C5A7523A-12D4-4E0F-9409-B3F845B48333}" type="slidenum">
-              <a:rPr lang="en-US" smtClean="0"/>
-              <a:pPr/>
-              <a:t>1</a:t>
-            </a:fld>
-            <a:endParaRPr lang="en-US"/>
-          </a:p>
-        </p:txBody>
-      </p:sp>
-      <p:sp>
-        <p:nvSpPr>
-          <p:cNvPr id="5" name="Footer Placeholder 4">
-            <a:extLst>
-              <a:ext uri="{FF2B5EF4-FFF2-40B4-BE49-F238E27FC236}">
-                <a16:creationId xmlns:a16="http://schemas.microsoft.com/office/drawing/2014/main" id="{A599BB95-9755-4BC6-8051-C2B8CF54F2A1}"/>
-              </a:ext>
-            </a:extLst>
-          </p:cNvPr>
-          <p:cNvSpPr>
-            <a:spLocks noGrp="1"/>
-          </p:cNvSpPr>
-          <p:nvPr>
-            <p:ph type="ftr" sz="quarter" idx="4"/>
-          </p:nvPr>
-        </p:nvSpPr>
-        <p:spPr/>
-        <p:txBody>
-          <a:bodyPr/>
-          <a:lstStyle/>
-          <a:p>
-            <a:r>
-              <a:rPr lang="en-US"/>
-              <a:t>Name of the faculty [Group: G00] [Sem:2nd]</a:t>
-            </a:r>
-          </a:p>
-        </p:txBody>
-      </p:sp>
-    </p:spTree>
-    <p:extLst>
-      <p:ext uri="{BB962C8B-B14F-4D97-AF65-F5344CB8AC3E}">
-        <p14:creationId xmlns:p14="http://schemas.microsoft.com/office/powerpoint/2010/main" val="4254874723"/>
-      </p:ext>
-    </p:extLst>
-  </p:cSld>
-  <p:clrMapOvr>
-    <a:masterClrMapping/>
-  </p:clrMapOvr>
-</p:notes>
-</file>
-
 <file path=ppt/slideLayouts/slideLayout1.xml><?xml version="1.0" encoding="utf-8"?>
-<p:sldLayout xmlns:a="http://schemas.openxmlformats.org/drawingml/2006/main" xmlns:r="http://schemas.openxmlformats.org/officeDocument/2006/relationships" xmlns:p="http://schemas.openxmlformats.org/presentationml/2006/main" type="blank" preserve="1">
+<p:sldLayout xmlns:a="http://schemas.openxmlformats.org/drawingml/2006/main" xmlns:r="http://schemas.openxmlformats.org/officeDocument/2006/relationships" xmlns:p="http://schemas.openxmlformats.org/presentationml/2006/main" xmlns:m="http://schemas.openxmlformats.org/officeDocument/2006/math" xmlns:w="http://schemas.openxmlformats.org/wordprocessingml/2006/main" matchingName="" preserve="1" showMasterPhAnim="0" type="blank" userDrawn="1">
   <p:cSld name="Blank Slide">
     <p:spTree>
       <p:nvGrpSpPr>
@@ -821,7 +136,7 @@
         <p:cNvGrpSpPr/>
         <p:nvPr/>
       </p:nvGrpSpPr>
-      <p:grpSpPr>
+      <p:grpSpPr bwMode="auto">
         <a:xfrm>
           <a:off x="0" y="0"/>
           <a:ext cx="0" cy="0"/>
@@ -838,7 +153,7 @@
 </file>
 
 <file path=ppt/slideLayouts/slideLayout10.xml><?xml version="1.0" encoding="utf-8"?>
-<p:sldLayout xmlns:a="http://schemas.openxmlformats.org/drawingml/2006/main" xmlns:r="http://schemas.openxmlformats.org/officeDocument/2006/relationships" xmlns:p="http://schemas.openxmlformats.org/presentationml/2006/main" type="objOverTx" preserve="1">
+<p:sldLayout xmlns:a="http://schemas.openxmlformats.org/drawingml/2006/main" xmlns:r="http://schemas.openxmlformats.org/officeDocument/2006/relationships" xmlns:p="http://schemas.openxmlformats.org/presentationml/2006/main" xmlns:m="http://schemas.openxmlformats.org/officeDocument/2006/math" xmlns:w="http://schemas.openxmlformats.org/wordprocessingml/2006/main" matchingName="" preserve="1" showMasterPhAnim="0" type="objOverTx" userDrawn="1">
   <p:cSld name="Title, Content over Content">
     <p:spTree>
       <p:nvGrpSpPr>
@@ -846,7 +161,7 @@
         <p:cNvGrpSpPr/>
         <p:nvPr/>
       </p:nvGrpSpPr>
-      <p:grpSpPr>
+      <p:grpSpPr bwMode="auto">
         <a:xfrm>
           <a:off x="0" y="0"/>
           <a:ext cx="0" cy="0"/>
@@ -864,10 +179,10 @@
             <p:ph type="title"/>
           </p:nvPr>
         </p:nvSpPr>
-        <p:spPr>
+        <p:spPr bwMode="auto">
           <a:xfrm>
             <a:off x="0" y="0"/>
-            <a:ext cx="5486040" cy="914040"/>
+            <a:ext cx="5486039" cy="914040"/>
           </a:xfrm>
           <a:prstGeom prst="rect">
             <a:avLst/>
@@ -879,6 +194,9 @@
           </a:bodyPr>
           <a:lstStyle/>
           <a:p>
+            <a:pPr>
+              <a:defRPr/>
+            </a:pPr>
             <a:endParaRPr lang="en-US" sz="3000" b="0" strike="noStrike" spc="-1">
               <a:solidFill>
                 <a:srgbClr val="000000"/>
@@ -898,7 +216,7 @@
             <p:ph type="body"/>
           </p:nvPr>
         </p:nvSpPr>
-        <p:spPr>
+        <p:spPr bwMode="auto">
           <a:xfrm>
             <a:off x="457200" y="1604520"/>
             <a:ext cx="8229240" cy="1896840"/>
@@ -913,6 +231,9 @@
           </a:bodyPr>
           <a:lstStyle/>
           <a:p>
+            <a:pPr>
+              <a:defRPr/>
+            </a:pPr>
             <a:endParaRPr lang="en-US" sz="3200" b="0" strike="noStrike" spc="-1">
               <a:solidFill>
                 <a:srgbClr val="000000"/>
@@ -932,7 +253,7 @@
             <p:ph type="body"/>
           </p:nvPr>
         </p:nvSpPr>
-        <p:spPr>
+        <p:spPr bwMode="auto">
           <a:xfrm>
             <a:off x="457200" y="3682080"/>
             <a:ext cx="8229240" cy="1896840"/>
@@ -947,6 +268,9 @@
           </a:bodyPr>
           <a:lstStyle/>
           <a:p>
+            <a:pPr>
+              <a:defRPr/>
+            </a:pPr>
             <a:endParaRPr lang="en-US" sz="3200" b="0" strike="noStrike" spc="-1">
               <a:solidFill>
                 <a:srgbClr val="000000"/>
@@ -965,7 +289,7 @@
 </file>
 
 <file path=ppt/slideLayouts/slideLayout11.xml><?xml version="1.0" encoding="utf-8"?>
-<p:sldLayout xmlns:a="http://schemas.openxmlformats.org/drawingml/2006/main" xmlns:r="http://schemas.openxmlformats.org/officeDocument/2006/relationships" xmlns:p="http://schemas.openxmlformats.org/presentationml/2006/main" type="fourObj" preserve="1">
+<p:sldLayout xmlns:a="http://schemas.openxmlformats.org/drawingml/2006/main" xmlns:r="http://schemas.openxmlformats.org/officeDocument/2006/relationships" xmlns:p="http://schemas.openxmlformats.org/presentationml/2006/main" xmlns:m="http://schemas.openxmlformats.org/officeDocument/2006/math" xmlns:w="http://schemas.openxmlformats.org/wordprocessingml/2006/main" matchingName="" preserve="1" showMasterPhAnim="0" type="fourObj" userDrawn="1">
   <p:cSld name="Title, 4 Content">
     <p:spTree>
       <p:nvGrpSpPr>
@@ -973,7 +297,7 @@
         <p:cNvGrpSpPr/>
         <p:nvPr/>
       </p:nvGrpSpPr>
-      <p:grpSpPr>
+      <p:grpSpPr bwMode="auto">
         <a:xfrm>
           <a:off x="0" y="0"/>
           <a:ext cx="0" cy="0"/>
@@ -991,10 +315,10 @@
             <p:ph type="title"/>
           </p:nvPr>
         </p:nvSpPr>
-        <p:spPr>
+        <p:spPr bwMode="auto">
           <a:xfrm>
             <a:off x="0" y="0"/>
-            <a:ext cx="5486040" cy="914040"/>
+            <a:ext cx="5486039" cy="914040"/>
           </a:xfrm>
           <a:prstGeom prst="rect">
             <a:avLst/>
@@ -1006,6 +330,9 @@
           </a:bodyPr>
           <a:lstStyle/>
           <a:p>
+            <a:pPr>
+              <a:defRPr/>
+            </a:pPr>
             <a:endParaRPr lang="en-US" sz="3000" b="0" strike="noStrike" spc="-1">
               <a:solidFill>
                 <a:srgbClr val="000000"/>
@@ -1025,7 +352,7 @@
             <p:ph type="body"/>
           </p:nvPr>
         </p:nvSpPr>
-        <p:spPr>
+        <p:spPr bwMode="auto">
           <a:xfrm>
             <a:off x="457200" y="1604520"/>
             <a:ext cx="4015800" cy="1896840"/>
@@ -1040,6 +367,9 @@
           </a:bodyPr>
           <a:lstStyle/>
           <a:p>
+            <a:pPr>
+              <a:defRPr/>
+            </a:pPr>
             <a:endParaRPr lang="en-US" sz="3200" b="0" strike="noStrike" spc="-1">
               <a:solidFill>
                 <a:srgbClr val="000000"/>
@@ -1059,7 +389,7 @@
             <p:ph type="body"/>
           </p:nvPr>
         </p:nvSpPr>
-        <p:spPr>
+        <p:spPr bwMode="auto">
           <a:xfrm>
             <a:off x="4674240" y="1604520"/>
             <a:ext cx="4015800" cy="1896840"/>
@@ -1074,6 +404,9 @@
           </a:bodyPr>
           <a:lstStyle/>
           <a:p>
+            <a:pPr>
+              <a:defRPr/>
+            </a:pPr>
             <a:endParaRPr lang="en-US" sz="3200" b="0" strike="noStrike" spc="-1">
               <a:solidFill>
                 <a:srgbClr val="000000"/>
@@ -1093,7 +426,7 @@
             <p:ph type="body"/>
           </p:nvPr>
         </p:nvSpPr>
-        <p:spPr>
+        <p:spPr bwMode="auto">
           <a:xfrm>
             <a:off x="457200" y="3682080"/>
             <a:ext cx="4015800" cy="1896840"/>
@@ -1108,6 +441,9 @@
           </a:bodyPr>
           <a:lstStyle/>
           <a:p>
+            <a:pPr>
+              <a:defRPr/>
+            </a:pPr>
             <a:endParaRPr lang="en-US" sz="3200" b="0" strike="noStrike" spc="-1">
               <a:solidFill>
                 <a:srgbClr val="000000"/>
@@ -1127,7 +463,7 @@
             <p:ph type="body"/>
           </p:nvPr>
         </p:nvSpPr>
-        <p:spPr>
+        <p:spPr bwMode="auto">
           <a:xfrm>
             <a:off x="4674240" y="3682080"/>
             <a:ext cx="4015800" cy="1896840"/>
@@ -1142,6 +478,9 @@
           </a:bodyPr>
           <a:lstStyle/>
           <a:p>
+            <a:pPr>
+              <a:defRPr/>
+            </a:pPr>
             <a:endParaRPr lang="en-US" sz="3200" b="0" strike="noStrike" spc="-1">
               <a:solidFill>
                 <a:srgbClr val="000000"/>
@@ -1160,7 +499,7 @@
 </file>
 
 <file path=ppt/slideLayouts/slideLayout12.xml><?xml version="1.0" encoding="utf-8"?>
-<p:sldLayout xmlns:a="http://schemas.openxmlformats.org/drawingml/2006/main" xmlns:r="http://schemas.openxmlformats.org/officeDocument/2006/relationships" xmlns:p="http://schemas.openxmlformats.org/presentationml/2006/main" type="blank" preserve="1">
+<p:sldLayout xmlns:a="http://schemas.openxmlformats.org/drawingml/2006/main" xmlns:r="http://schemas.openxmlformats.org/officeDocument/2006/relationships" xmlns:p="http://schemas.openxmlformats.org/presentationml/2006/main" xmlns:m="http://schemas.openxmlformats.org/officeDocument/2006/math" xmlns:w="http://schemas.openxmlformats.org/wordprocessingml/2006/main" matchingName="" preserve="1" showMasterPhAnim="0" type="blank" userDrawn="1">
   <p:cSld name="Title, 6 Content">
     <p:spTree>
       <p:nvGrpSpPr>
@@ -1168,7 +507,7 @@
         <p:cNvGrpSpPr/>
         <p:nvPr/>
       </p:nvGrpSpPr>
-      <p:grpSpPr>
+      <p:grpSpPr bwMode="auto">
         <a:xfrm>
           <a:off x="0" y="0"/>
           <a:ext cx="0" cy="0"/>
@@ -1186,10 +525,10 @@
             <p:ph type="title"/>
           </p:nvPr>
         </p:nvSpPr>
-        <p:spPr>
+        <p:spPr bwMode="auto">
           <a:xfrm>
             <a:off x="0" y="0"/>
-            <a:ext cx="5486040" cy="914040"/>
+            <a:ext cx="5486039" cy="914040"/>
           </a:xfrm>
           <a:prstGeom prst="rect">
             <a:avLst/>
@@ -1201,6 +540,9 @@
           </a:bodyPr>
           <a:lstStyle/>
           <a:p>
+            <a:pPr>
+              <a:defRPr/>
+            </a:pPr>
             <a:endParaRPr lang="en-US" sz="3000" b="0" strike="noStrike" spc="-1">
               <a:solidFill>
                 <a:srgbClr val="000000"/>
@@ -1220,7 +562,7 @@
             <p:ph type="body"/>
           </p:nvPr>
         </p:nvSpPr>
-        <p:spPr>
+        <p:spPr bwMode="auto">
           <a:xfrm>
             <a:off x="457200" y="1604520"/>
             <a:ext cx="2649600" cy="1896840"/>
@@ -1235,6 +577,9 @@
           </a:bodyPr>
           <a:lstStyle/>
           <a:p>
+            <a:pPr>
+              <a:defRPr/>
+            </a:pPr>
             <a:endParaRPr lang="en-US" sz="3200" b="0" strike="noStrike" spc="-1">
               <a:solidFill>
                 <a:srgbClr val="000000"/>
@@ -1254,7 +599,7 @@
             <p:ph type="body"/>
           </p:nvPr>
         </p:nvSpPr>
-        <p:spPr>
+        <p:spPr bwMode="auto">
           <a:xfrm>
             <a:off x="3239640" y="1604520"/>
             <a:ext cx="2649600" cy="1896840"/>
@@ -1269,6 +614,9 @@
           </a:bodyPr>
           <a:lstStyle/>
           <a:p>
+            <a:pPr>
+              <a:defRPr/>
+            </a:pPr>
             <a:endParaRPr lang="en-US" sz="3200" b="0" strike="noStrike" spc="-1">
               <a:solidFill>
                 <a:srgbClr val="000000"/>
@@ -1288,7 +636,7 @@
             <p:ph type="body"/>
           </p:nvPr>
         </p:nvSpPr>
-        <p:spPr>
+        <p:spPr bwMode="auto">
           <a:xfrm>
             <a:off x="6022080" y="1604520"/>
             <a:ext cx="2649600" cy="1896840"/>
@@ -1303,6 +651,9 @@
           </a:bodyPr>
           <a:lstStyle/>
           <a:p>
+            <a:pPr>
+              <a:defRPr/>
+            </a:pPr>
             <a:endParaRPr lang="en-US" sz="3200" b="0" strike="noStrike" spc="-1">
               <a:solidFill>
                 <a:srgbClr val="000000"/>
@@ -1322,7 +673,7 @@
             <p:ph type="body"/>
           </p:nvPr>
         </p:nvSpPr>
-        <p:spPr>
+        <p:spPr bwMode="auto">
           <a:xfrm>
             <a:off x="457200" y="3682080"/>
             <a:ext cx="2649600" cy="1896840"/>
@@ -1337,6 +688,9 @@
           </a:bodyPr>
           <a:lstStyle/>
           <a:p>
+            <a:pPr>
+              <a:defRPr/>
+            </a:pPr>
             <a:endParaRPr lang="en-US" sz="3200" b="0" strike="noStrike" spc="-1">
               <a:solidFill>
                 <a:srgbClr val="000000"/>
@@ -1356,7 +710,7 @@
             <p:ph type="body"/>
           </p:nvPr>
         </p:nvSpPr>
-        <p:spPr>
+        <p:spPr bwMode="auto">
           <a:xfrm>
             <a:off x="3239640" y="3682080"/>
             <a:ext cx="2649600" cy="1896840"/>
@@ -1371,6 +725,9 @@
           </a:bodyPr>
           <a:lstStyle/>
           <a:p>
+            <a:pPr>
+              <a:defRPr/>
+            </a:pPr>
             <a:endParaRPr lang="en-US" sz="3200" b="0" strike="noStrike" spc="-1">
               <a:solidFill>
                 <a:srgbClr val="000000"/>
@@ -1390,7 +747,7 @@
             <p:ph type="body"/>
           </p:nvPr>
         </p:nvSpPr>
-        <p:spPr>
+        <p:spPr bwMode="auto">
           <a:xfrm>
             <a:off x="6022080" y="3682080"/>
             <a:ext cx="2649600" cy="1896840"/>
@@ -1405,6 +762,9 @@
           </a:bodyPr>
           <a:lstStyle/>
           <a:p>
+            <a:pPr>
+              <a:defRPr/>
+            </a:pPr>
             <a:endParaRPr lang="en-US" sz="3200" b="0" strike="noStrike" spc="-1">
               <a:solidFill>
                 <a:srgbClr val="000000"/>
@@ -1423,7 +783,7 @@
 </file>
 
 <file path=ppt/slideLayouts/slideLayout2.xml><?xml version="1.0" encoding="utf-8"?>
-<p:sldLayout xmlns:a="http://schemas.openxmlformats.org/drawingml/2006/main" xmlns:r="http://schemas.openxmlformats.org/officeDocument/2006/relationships" xmlns:p="http://schemas.openxmlformats.org/presentationml/2006/main" type="tx" preserve="1">
+<p:sldLayout xmlns:a="http://schemas.openxmlformats.org/drawingml/2006/main" xmlns:r="http://schemas.openxmlformats.org/officeDocument/2006/relationships" xmlns:p="http://schemas.openxmlformats.org/presentationml/2006/main" xmlns:m="http://schemas.openxmlformats.org/officeDocument/2006/math" xmlns:w="http://schemas.openxmlformats.org/wordprocessingml/2006/main" matchingName="" preserve="1" showMasterPhAnim="0" type="tx" userDrawn="1">
   <p:cSld name="Title Slide">
     <p:spTree>
       <p:nvGrpSpPr>
@@ -1431,7 +791,7 @@
         <p:cNvGrpSpPr/>
         <p:nvPr/>
       </p:nvGrpSpPr>
-      <p:grpSpPr>
+      <p:grpSpPr bwMode="auto">
         <a:xfrm>
           <a:off x="0" y="0"/>
           <a:ext cx="0" cy="0"/>
@@ -1449,10 +809,10 @@
             <p:ph type="title"/>
           </p:nvPr>
         </p:nvSpPr>
-        <p:spPr>
+        <p:spPr bwMode="auto">
           <a:xfrm>
             <a:off x="0" y="0"/>
-            <a:ext cx="5486040" cy="914040"/>
+            <a:ext cx="5486039" cy="914040"/>
           </a:xfrm>
           <a:prstGeom prst="rect">
             <a:avLst/>
@@ -1464,6 +824,9 @@
           </a:bodyPr>
           <a:lstStyle/>
           <a:p>
+            <a:pPr>
+              <a:defRPr/>
+            </a:pPr>
             <a:endParaRPr lang="en-US" sz="3000" b="0" strike="noStrike" spc="-1">
               <a:solidFill>
                 <a:srgbClr val="000000"/>
@@ -1483,7 +846,7 @@
             <p:ph type="subTitle"/>
           </p:nvPr>
         </p:nvSpPr>
-        <p:spPr>
+        <p:spPr bwMode="auto">
           <a:xfrm>
             <a:off x="457200" y="1604520"/>
             <a:ext cx="8229240" cy="3977280"/>
@@ -1498,8 +861,10 @@
           </a:bodyPr>
           <a:lstStyle/>
           <a:p>
-            <a:pPr algn="ctr"/>
-            <a:endParaRPr lang="en-GB" sz="3200" b="0" strike="noStrike" spc="-1" dirty="0">
+            <a:pPr algn="ctr">
+              <a:defRPr/>
+            </a:pPr>
+            <a:endParaRPr lang="en-GB" sz="3200" b="0" strike="noStrike" spc="-1">
               <a:latin typeface="Arial"/>
             </a:endParaRPr>
           </a:p>
@@ -1514,7 +879,7 @@
 </file>
 
 <file path=ppt/slideLayouts/slideLayout3.xml><?xml version="1.0" encoding="utf-8"?>
-<p:sldLayout xmlns:a="http://schemas.openxmlformats.org/drawingml/2006/main" xmlns:r="http://schemas.openxmlformats.org/officeDocument/2006/relationships" xmlns:p="http://schemas.openxmlformats.org/presentationml/2006/main" type="obj" preserve="1">
+<p:sldLayout xmlns:a="http://schemas.openxmlformats.org/drawingml/2006/main" xmlns:r="http://schemas.openxmlformats.org/officeDocument/2006/relationships" xmlns:p="http://schemas.openxmlformats.org/presentationml/2006/main" xmlns:m="http://schemas.openxmlformats.org/officeDocument/2006/math" xmlns:w="http://schemas.openxmlformats.org/wordprocessingml/2006/main" matchingName="" preserve="1" showMasterPhAnim="0" type="obj" userDrawn="1">
   <p:cSld name="Title, Content">
     <p:spTree>
       <p:nvGrpSpPr>
@@ -1522,7 +887,7 @@
         <p:cNvGrpSpPr/>
         <p:nvPr/>
       </p:nvGrpSpPr>
-      <p:grpSpPr>
+      <p:grpSpPr bwMode="auto">
         <a:xfrm>
           <a:off x="0" y="0"/>
           <a:ext cx="0" cy="0"/>
@@ -1540,10 +905,10 @@
             <p:ph type="title"/>
           </p:nvPr>
         </p:nvSpPr>
-        <p:spPr>
+        <p:spPr bwMode="auto">
           <a:xfrm>
             <a:off x="0" y="0"/>
-            <a:ext cx="5486040" cy="914040"/>
+            <a:ext cx="5486039" cy="914040"/>
           </a:xfrm>
           <a:prstGeom prst="rect">
             <a:avLst/>
@@ -1555,6 +920,9 @@
           </a:bodyPr>
           <a:lstStyle/>
           <a:p>
+            <a:pPr>
+              <a:defRPr/>
+            </a:pPr>
             <a:endParaRPr lang="en-US" sz="3000" b="0" strike="noStrike" spc="-1">
               <a:solidFill>
                 <a:srgbClr val="000000"/>
@@ -1574,7 +942,7 @@
             <p:ph type="body"/>
           </p:nvPr>
         </p:nvSpPr>
-        <p:spPr>
+        <p:spPr bwMode="auto">
           <a:xfrm>
             <a:off x="457200" y="1604520"/>
             <a:ext cx="8229240" cy="3977280"/>
@@ -1589,6 +957,9 @@
           </a:bodyPr>
           <a:lstStyle/>
           <a:p>
+            <a:pPr>
+              <a:defRPr/>
+            </a:pPr>
             <a:endParaRPr lang="en-US" sz="3200" b="0" strike="noStrike" spc="-1">
               <a:solidFill>
                 <a:srgbClr val="000000"/>
@@ -1607,7 +978,7 @@
 </file>
 
 <file path=ppt/slideLayouts/slideLayout4.xml><?xml version="1.0" encoding="utf-8"?>
-<p:sldLayout xmlns:a="http://schemas.openxmlformats.org/drawingml/2006/main" xmlns:r="http://schemas.openxmlformats.org/officeDocument/2006/relationships" xmlns:p="http://schemas.openxmlformats.org/presentationml/2006/main" type="twoObj" preserve="1">
+<p:sldLayout xmlns:a="http://schemas.openxmlformats.org/drawingml/2006/main" xmlns:r="http://schemas.openxmlformats.org/officeDocument/2006/relationships" xmlns:p="http://schemas.openxmlformats.org/presentationml/2006/main" xmlns:m="http://schemas.openxmlformats.org/officeDocument/2006/math" xmlns:w="http://schemas.openxmlformats.org/wordprocessingml/2006/main" matchingName="" preserve="1" showMasterPhAnim="0" type="twoObj" userDrawn="1">
   <p:cSld name="Title, 2 Content">
     <p:spTree>
       <p:nvGrpSpPr>
@@ -1615,7 +986,7 @@
         <p:cNvGrpSpPr/>
         <p:nvPr/>
       </p:nvGrpSpPr>
-      <p:grpSpPr>
+      <p:grpSpPr bwMode="auto">
         <a:xfrm>
           <a:off x="0" y="0"/>
           <a:ext cx="0" cy="0"/>
@@ -1633,10 +1004,10 @@
             <p:ph type="title"/>
           </p:nvPr>
         </p:nvSpPr>
-        <p:spPr>
+        <p:spPr bwMode="auto">
           <a:xfrm>
             <a:off x="0" y="0"/>
-            <a:ext cx="5486040" cy="914040"/>
+            <a:ext cx="5486039" cy="914040"/>
           </a:xfrm>
           <a:prstGeom prst="rect">
             <a:avLst/>
@@ -1648,6 +1019,9 @@
           </a:bodyPr>
           <a:lstStyle/>
           <a:p>
+            <a:pPr>
+              <a:defRPr/>
+            </a:pPr>
             <a:endParaRPr lang="en-US" sz="3000" b="0" strike="noStrike" spc="-1">
               <a:solidFill>
                 <a:srgbClr val="000000"/>
@@ -1667,7 +1041,7 @@
             <p:ph type="body"/>
           </p:nvPr>
         </p:nvSpPr>
-        <p:spPr>
+        <p:spPr bwMode="auto">
           <a:xfrm>
             <a:off x="457200" y="1604520"/>
             <a:ext cx="4015800" cy="3977280"/>
@@ -1682,6 +1056,9 @@
           </a:bodyPr>
           <a:lstStyle/>
           <a:p>
+            <a:pPr>
+              <a:defRPr/>
+            </a:pPr>
             <a:endParaRPr lang="en-US" sz="3200" b="0" strike="noStrike" spc="-1">
               <a:solidFill>
                 <a:srgbClr val="000000"/>
@@ -1701,7 +1078,7 @@
             <p:ph type="body"/>
           </p:nvPr>
         </p:nvSpPr>
-        <p:spPr>
+        <p:spPr bwMode="auto">
           <a:xfrm>
             <a:off x="4674240" y="1604520"/>
             <a:ext cx="4015800" cy="3977280"/>
@@ -1716,6 +1093,9 @@
           </a:bodyPr>
           <a:lstStyle/>
           <a:p>
+            <a:pPr>
+              <a:defRPr/>
+            </a:pPr>
             <a:endParaRPr lang="en-US" sz="3200" b="0" strike="noStrike" spc="-1">
               <a:solidFill>
                 <a:srgbClr val="000000"/>
@@ -1734,7 +1114,7 @@
 </file>
 
 <file path=ppt/slideLayouts/slideLayout5.xml><?xml version="1.0" encoding="utf-8"?>
-<p:sldLayout xmlns:a="http://schemas.openxmlformats.org/drawingml/2006/main" xmlns:r="http://schemas.openxmlformats.org/officeDocument/2006/relationships" xmlns:p="http://schemas.openxmlformats.org/presentationml/2006/main" type="titleOnly" preserve="1">
+<p:sldLayout xmlns:a="http://schemas.openxmlformats.org/drawingml/2006/main" xmlns:r="http://schemas.openxmlformats.org/officeDocument/2006/relationships" xmlns:p="http://schemas.openxmlformats.org/presentationml/2006/main" xmlns:m="http://schemas.openxmlformats.org/officeDocument/2006/math" xmlns:w="http://schemas.openxmlformats.org/wordprocessingml/2006/main" matchingName="" preserve="1" showMasterPhAnim="0" type="titleOnly" userDrawn="1">
   <p:cSld name="Title Only">
     <p:spTree>
       <p:nvGrpSpPr>
@@ -1742,7 +1122,7 @@
         <p:cNvGrpSpPr/>
         <p:nvPr/>
       </p:nvGrpSpPr>
-      <p:grpSpPr>
+      <p:grpSpPr bwMode="auto">
         <a:xfrm>
           <a:off x="0" y="0"/>
           <a:ext cx="0" cy="0"/>
@@ -1760,10 +1140,10 @@
             <p:ph type="title"/>
           </p:nvPr>
         </p:nvSpPr>
-        <p:spPr>
+        <p:spPr bwMode="auto">
           <a:xfrm>
             <a:off x="0" y="0"/>
-            <a:ext cx="5486040" cy="914040"/>
+            <a:ext cx="5486039" cy="914040"/>
           </a:xfrm>
           <a:prstGeom prst="rect">
             <a:avLst/>
@@ -1775,6 +1155,9 @@
           </a:bodyPr>
           <a:lstStyle/>
           <a:p>
+            <a:pPr>
+              <a:defRPr/>
+            </a:pPr>
             <a:endParaRPr lang="en-US" sz="3000" b="0" strike="noStrike" spc="-1">
               <a:solidFill>
                 <a:srgbClr val="000000"/>
@@ -1793,7 +1176,7 @@
 </file>
 
 <file path=ppt/slideLayouts/slideLayout6.xml><?xml version="1.0" encoding="utf-8"?>
-<p:sldLayout xmlns:a="http://schemas.openxmlformats.org/drawingml/2006/main" xmlns:r="http://schemas.openxmlformats.org/officeDocument/2006/relationships" xmlns:p="http://schemas.openxmlformats.org/presentationml/2006/main" type="objOnly" preserve="1">
+<p:sldLayout xmlns:a="http://schemas.openxmlformats.org/drawingml/2006/main" xmlns:r="http://schemas.openxmlformats.org/officeDocument/2006/relationships" xmlns:p="http://schemas.openxmlformats.org/presentationml/2006/main" xmlns:m="http://schemas.openxmlformats.org/officeDocument/2006/math" xmlns:w="http://schemas.openxmlformats.org/wordprocessingml/2006/main" matchingName="" preserve="1" showMasterPhAnim="0" type="objOnly" userDrawn="1">
   <p:cSld name="Centered Text">
     <p:spTree>
       <p:nvGrpSpPr>
@@ -1801,7 +1184,7 @@
         <p:cNvGrpSpPr/>
         <p:nvPr/>
       </p:nvGrpSpPr>
-      <p:grpSpPr>
+      <p:grpSpPr bwMode="auto">
         <a:xfrm>
           <a:off x="0" y="0"/>
           <a:ext cx="0" cy="0"/>
@@ -1819,10 +1202,10 @@
             <p:ph type="subTitle"/>
           </p:nvPr>
         </p:nvSpPr>
-        <p:spPr>
+        <p:spPr bwMode="auto">
           <a:xfrm>
             <a:off x="0" y="0"/>
-            <a:ext cx="5486040" cy="4238280"/>
+            <a:ext cx="5486039" cy="4238280"/>
           </a:xfrm>
           <a:prstGeom prst="rect">
             <a:avLst/>
@@ -1834,7 +1217,9 @@
           </a:bodyPr>
           <a:lstStyle/>
           <a:p>
-            <a:pPr algn="ctr"/>
+            <a:pPr algn="ctr">
+              <a:defRPr/>
+            </a:pPr>
             <a:endParaRPr lang="en-GB" sz="3200" b="0" strike="noStrike" spc="-1">
               <a:latin typeface="Arial"/>
             </a:endParaRPr>
@@ -1850,7 +1235,7 @@
 </file>
 
 <file path=ppt/slideLayouts/slideLayout7.xml><?xml version="1.0" encoding="utf-8"?>
-<p:sldLayout xmlns:a="http://schemas.openxmlformats.org/drawingml/2006/main" xmlns:r="http://schemas.openxmlformats.org/officeDocument/2006/relationships" xmlns:p="http://schemas.openxmlformats.org/presentationml/2006/main" type="twoObjAndObj" preserve="1">
+<p:sldLayout xmlns:a="http://schemas.openxmlformats.org/drawingml/2006/main" xmlns:r="http://schemas.openxmlformats.org/officeDocument/2006/relationships" xmlns:p="http://schemas.openxmlformats.org/presentationml/2006/main" xmlns:m="http://schemas.openxmlformats.org/officeDocument/2006/math" xmlns:w="http://schemas.openxmlformats.org/wordprocessingml/2006/main" matchingName="" preserve="1" showMasterPhAnim="0" type="twoObjAndObj" userDrawn="1">
   <p:cSld name="Title, 2 Content and Content">
     <p:spTree>
       <p:nvGrpSpPr>
@@ -1858,7 +1243,7 @@
         <p:cNvGrpSpPr/>
         <p:nvPr/>
       </p:nvGrpSpPr>
-      <p:grpSpPr>
+      <p:grpSpPr bwMode="auto">
         <a:xfrm>
           <a:off x="0" y="0"/>
           <a:ext cx="0" cy="0"/>
@@ -1876,10 +1261,10 @@
             <p:ph type="title"/>
           </p:nvPr>
         </p:nvSpPr>
-        <p:spPr>
+        <p:spPr bwMode="auto">
           <a:xfrm>
             <a:off x="0" y="0"/>
-            <a:ext cx="5486040" cy="914040"/>
+            <a:ext cx="5486039" cy="914040"/>
           </a:xfrm>
           <a:prstGeom prst="rect">
             <a:avLst/>
@@ -1891,6 +1276,9 @@
           </a:bodyPr>
           <a:lstStyle/>
           <a:p>
+            <a:pPr>
+              <a:defRPr/>
+            </a:pPr>
             <a:endParaRPr lang="en-US" sz="3000" b="0" strike="noStrike" spc="-1">
               <a:solidFill>
                 <a:srgbClr val="000000"/>
@@ -1910,7 +1298,7 @@
             <p:ph type="body"/>
           </p:nvPr>
         </p:nvSpPr>
-        <p:spPr>
+        <p:spPr bwMode="auto">
           <a:xfrm>
             <a:off x="457200" y="1604520"/>
             <a:ext cx="4015800" cy="1896840"/>
@@ -1925,6 +1313,9 @@
           </a:bodyPr>
           <a:lstStyle/>
           <a:p>
+            <a:pPr>
+              <a:defRPr/>
+            </a:pPr>
             <a:endParaRPr lang="en-US" sz="3200" b="0" strike="noStrike" spc="-1">
               <a:solidFill>
                 <a:srgbClr val="000000"/>
@@ -1944,7 +1335,7 @@
             <p:ph type="body"/>
           </p:nvPr>
         </p:nvSpPr>
-        <p:spPr>
+        <p:spPr bwMode="auto">
           <a:xfrm>
             <a:off x="4674240" y="1604520"/>
             <a:ext cx="4015800" cy="3977280"/>
@@ -1959,6 +1350,9 @@
           </a:bodyPr>
           <a:lstStyle/>
           <a:p>
+            <a:pPr>
+              <a:defRPr/>
+            </a:pPr>
             <a:endParaRPr lang="en-US" sz="3200" b="0" strike="noStrike" spc="-1">
               <a:solidFill>
                 <a:srgbClr val="000000"/>
@@ -1978,7 +1372,7 @@
             <p:ph type="body"/>
           </p:nvPr>
         </p:nvSpPr>
-        <p:spPr>
+        <p:spPr bwMode="auto">
           <a:xfrm>
             <a:off x="457200" y="3682080"/>
             <a:ext cx="4015800" cy="1896840"/>
@@ -1993,6 +1387,9 @@
           </a:bodyPr>
           <a:lstStyle/>
           <a:p>
+            <a:pPr>
+              <a:defRPr/>
+            </a:pPr>
             <a:endParaRPr lang="en-US" sz="3200" b="0" strike="noStrike" spc="-1">
               <a:solidFill>
                 <a:srgbClr val="000000"/>
@@ -2011,7 +1408,7 @@
 </file>
 
 <file path=ppt/slideLayouts/slideLayout8.xml><?xml version="1.0" encoding="utf-8"?>
-<p:sldLayout xmlns:a="http://schemas.openxmlformats.org/drawingml/2006/main" xmlns:r="http://schemas.openxmlformats.org/officeDocument/2006/relationships" xmlns:p="http://schemas.openxmlformats.org/presentationml/2006/main" type="objAndTwoObj" preserve="1">
+<p:sldLayout xmlns:a="http://schemas.openxmlformats.org/drawingml/2006/main" xmlns:r="http://schemas.openxmlformats.org/officeDocument/2006/relationships" xmlns:p="http://schemas.openxmlformats.org/presentationml/2006/main" xmlns:m="http://schemas.openxmlformats.org/officeDocument/2006/math" xmlns:w="http://schemas.openxmlformats.org/wordprocessingml/2006/main" matchingName="" preserve="1" showMasterPhAnim="0" type="objAndTwoObj" userDrawn="1">
   <p:cSld name="Title Content and 2 Content">
     <p:spTree>
       <p:nvGrpSpPr>
@@ -2019,7 +1416,7 @@
         <p:cNvGrpSpPr/>
         <p:nvPr/>
       </p:nvGrpSpPr>
-      <p:grpSpPr>
+      <p:grpSpPr bwMode="auto">
         <a:xfrm>
           <a:off x="0" y="0"/>
           <a:ext cx="0" cy="0"/>
@@ -2037,10 +1434,10 @@
             <p:ph type="title"/>
           </p:nvPr>
         </p:nvSpPr>
-        <p:spPr>
+        <p:spPr bwMode="auto">
           <a:xfrm>
             <a:off x="0" y="0"/>
-            <a:ext cx="5486040" cy="914040"/>
+            <a:ext cx="5486039" cy="914040"/>
           </a:xfrm>
           <a:prstGeom prst="rect">
             <a:avLst/>
@@ -2052,6 +1449,9 @@
           </a:bodyPr>
           <a:lstStyle/>
           <a:p>
+            <a:pPr>
+              <a:defRPr/>
+            </a:pPr>
             <a:endParaRPr lang="en-US" sz="3000" b="0" strike="noStrike" spc="-1">
               <a:solidFill>
                 <a:srgbClr val="000000"/>
@@ -2071,7 +1471,7 @@
             <p:ph type="body"/>
           </p:nvPr>
         </p:nvSpPr>
-        <p:spPr>
+        <p:spPr bwMode="auto">
           <a:xfrm>
             <a:off x="457200" y="1604520"/>
             <a:ext cx="4015800" cy="3977280"/>
@@ -2086,6 +1486,9 @@
           </a:bodyPr>
           <a:lstStyle/>
           <a:p>
+            <a:pPr>
+              <a:defRPr/>
+            </a:pPr>
             <a:endParaRPr lang="en-US" sz="3200" b="0" strike="noStrike" spc="-1">
               <a:solidFill>
                 <a:srgbClr val="000000"/>
@@ -2105,7 +1508,7 @@
             <p:ph type="body"/>
           </p:nvPr>
         </p:nvSpPr>
-        <p:spPr>
+        <p:spPr bwMode="auto">
           <a:xfrm>
             <a:off x="4674240" y="1604520"/>
             <a:ext cx="4015800" cy="1896840"/>
@@ -2120,6 +1523,9 @@
           </a:bodyPr>
           <a:lstStyle/>
           <a:p>
+            <a:pPr>
+              <a:defRPr/>
+            </a:pPr>
             <a:endParaRPr lang="en-US" sz="3200" b="0" strike="noStrike" spc="-1">
               <a:solidFill>
                 <a:srgbClr val="000000"/>
@@ -2139,7 +1545,7 @@
             <p:ph type="body"/>
           </p:nvPr>
         </p:nvSpPr>
-        <p:spPr>
+        <p:spPr bwMode="auto">
           <a:xfrm>
             <a:off x="4674240" y="3682080"/>
             <a:ext cx="4015800" cy="1896840"/>
@@ -2154,6 +1560,9 @@
           </a:bodyPr>
           <a:lstStyle/>
           <a:p>
+            <a:pPr>
+              <a:defRPr/>
+            </a:pPr>
             <a:endParaRPr lang="en-US" sz="3200" b="0" strike="noStrike" spc="-1">
               <a:solidFill>
                 <a:srgbClr val="000000"/>
@@ -2172,7 +1581,7 @@
 </file>
 
 <file path=ppt/slideLayouts/slideLayout9.xml><?xml version="1.0" encoding="utf-8"?>
-<p:sldLayout xmlns:a="http://schemas.openxmlformats.org/drawingml/2006/main" xmlns:r="http://schemas.openxmlformats.org/officeDocument/2006/relationships" xmlns:p="http://schemas.openxmlformats.org/presentationml/2006/main" type="twoObjOverTx" preserve="1">
+<p:sldLayout xmlns:a="http://schemas.openxmlformats.org/drawingml/2006/main" xmlns:r="http://schemas.openxmlformats.org/officeDocument/2006/relationships" xmlns:p="http://schemas.openxmlformats.org/presentationml/2006/main" xmlns:m="http://schemas.openxmlformats.org/officeDocument/2006/math" xmlns:w="http://schemas.openxmlformats.org/wordprocessingml/2006/main" matchingName="" preserve="1" showMasterPhAnim="0" type="twoObjOverTx" userDrawn="1">
   <p:cSld name="Title, 2 Content over Content">
     <p:spTree>
       <p:nvGrpSpPr>
@@ -2180,7 +1589,7 @@
         <p:cNvGrpSpPr/>
         <p:nvPr/>
       </p:nvGrpSpPr>
-      <p:grpSpPr>
+      <p:grpSpPr bwMode="auto">
         <a:xfrm>
           <a:off x="0" y="0"/>
           <a:ext cx="0" cy="0"/>
@@ -2198,10 +1607,10 @@
             <p:ph type="title"/>
           </p:nvPr>
         </p:nvSpPr>
-        <p:spPr>
+        <p:spPr bwMode="auto">
           <a:xfrm>
             <a:off x="0" y="0"/>
-            <a:ext cx="5486040" cy="914040"/>
+            <a:ext cx="5486039" cy="914040"/>
           </a:xfrm>
           <a:prstGeom prst="rect">
             <a:avLst/>
@@ -2213,6 +1622,9 @@
           </a:bodyPr>
           <a:lstStyle/>
           <a:p>
+            <a:pPr>
+              <a:defRPr/>
+            </a:pPr>
             <a:endParaRPr lang="en-US" sz="3000" b="0" strike="noStrike" spc="-1">
               <a:solidFill>
                 <a:srgbClr val="000000"/>
@@ -2232,7 +1644,7 @@
             <p:ph type="body"/>
           </p:nvPr>
         </p:nvSpPr>
-        <p:spPr>
+        <p:spPr bwMode="auto">
           <a:xfrm>
             <a:off x="457200" y="1604520"/>
             <a:ext cx="4015800" cy="1896840"/>
@@ -2247,6 +1659,9 @@
           </a:bodyPr>
           <a:lstStyle/>
           <a:p>
+            <a:pPr>
+              <a:defRPr/>
+            </a:pPr>
             <a:endParaRPr lang="en-US" sz="3200" b="0" strike="noStrike" spc="-1">
               <a:solidFill>
                 <a:srgbClr val="000000"/>
@@ -2266,7 +1681,7 @@
             <p:ph type="body"/>
           </p:nvPr>
         </p:nvSpPr>
-        <p:spPr>
+        <p:spPr bwMode="auto">
           <a:xfrm>
             <a:off x="4674240" y="1604520"/>
             <a:ext cx="4015800" cy="1896840"/>
@@ -2281,6 +1696,9 @@
           </a:bodyPr>
           <a:lstStyle/>
           <a:p>
+            <a:pPr>
+              <a:defRPr/>
+            </a:pPr>
             <a:endParaRPr lang="en-US" sz="3200" b="0" strike="noStrike" spc="-1">
               <a:solidFill>
                 <a:srgbClr val="000000"/>
@@ -2300,7 +1718,7 @@
             <p:ph type="body"/>
           </p:nvPr>
         </p:nvSpPr>
-        <p:spPr>
+        <p:spPr bwMode="auto">
           <a:xfrm>
             <a:off x="457200" y="3682080"/>
             <a:ext cx="8229240" cy="1896840"/>
@@ -2315,6 +1733,9 @@
           </a:bodyPr>
           <a:lstStyle/>
           <a:p>
+            <a:pPr>
+              <a:defRPr/>
+            </a:pPr>
             <a:endParaRPr lang="en-US" sz="3200" b="0" strike="noStrike" spc="-1">
               <a:solidFill>
                 <a:srgbClr val="000000"/>
@@ -2333,14 +1754,13 @@
 </file>
 
 <file path=ppt/slideMasters/slideMaster1.xml><?xml version="1.0" encoding="utf-8"?>
-<p:sldMaster xmlns:a="http://schemas.openxmlformats.org/drawingml/2006/main" xmlns:r="http://schemas.openxmlformats.org/officeDocument/2006/relationships" xmlns:p="http://schemas.openxmlformats.org/presentationml/2006/main">
-  <p:cSld>
+<p:sldMaster xmlns:a="http://schemas.openxmlformats.org/drawingml/2006/main" xmlns:r="http://schemas.openxmlformats.org/officeDocument/2006/relationships" xmlns:p="http://schemas.openxmlformats.org/presentationml/2006/main" xmlns:m="http://schemas.openxmlformats.org/officeDocument/2006/math" xmlns:w="http://schemas.openxmlformats.org/wordprocessingml/2006/main" preserve="0">
+  <p:cSld name="">
     <p:bg>
-      <p:bgPr>
+      <p:bgPr shadeToTitle="0">
         <a:solidFill>
           <a:srgbClr val="FFFFFF"/>
         </a:solidFill>
-        <a:effectLst/>
       </p:bgPr>
     </p:bg>
     <p:spTree>
@@ -2349,7 +1769,7 @@
         <p:cNvGrpSpPr/>
         <p:nvPr/>
       </p:nvGrpSpPr>
-      <p:grpSpPr>
+      <p:grpSpPr bwMode="auto">
         <a:xfrm>
           <a:off x="0" y="0"/>
           <a:ext cx="0" cy="0"/>
@@ -2363,7 +1783,7 @@
           <p:cNvSpPr/>
           <p:nvPr/>
         </p:nvSpPr>
-        <p:spPr>
+        <p:spPr bwMode="auto">
           <a:xfrm>
             <a:off x="0" y="0"/>
             <a:ext cx="9143640" cy="837720"/>
@@ -2380,13 +1800,13 @@
         </p:spPr>
         <p:style>
           <a:lnRef idx="0">
-            <a:scrgbClr r="0" g="0" b="0"/>
+            <a:srgbClr val="000000"/>
           </a:lnRef>
           <a:fillRef idx="0">
-            <a:scrgbClr r="0" g="0" b="0"/>
+            <a:srgbClr val="000000"/>
           </a:fillRef>
           <a:effectRef idx="0">
-            <a:scrgbClr r="0" g="0" b="0"/>
+            <a:srgbClr val="000000"/>
           </a:effectRef>
           <a:fontRef idx="minor"/>
         </p:style>
@@ -2397,7 +1817,7 @@
           <p:cNvSpPr/>
           <p:nvPr/>
         </p:nvSpPr>
-        <p:spPr>
+        <p:spPr bwMode="auto">
           <a:xfrm flipV="1">
             <a:off x="0" y="6704640"/>
             <a:ext cx="9143640" cy="197640"/>
@@ -2411,21 +1831,16 @@
           <a:ln w="9360">
             <a:noFill/>
           </a:ln>
-          <a:scene3d>
-            <a:camera prst="orthographicFront"/>
-            <a:lightRig rig="threePt" dir="t"/>
-          </a:scene3d>
-          <a:sp3d/>
         </p:spPr>
         <p:style>
           <a:lnRef idx="0">
-            <a:scrgbClr r="0" g="0" b="0"/>
+            <a:srgbClr val="000000"/>
           </a:lnRef>
           <a:fillRef idx="0">
-            <a:scrgbClr r="0" g="0" b="0"/>
+            <a:srgbClr val="000000"/>
           </a:fillRef>
           <a:effectRef idx="0">
-            <a:scrgbClr r="0" g="0" b="0"/>
+            <a:srgbClr val="000000"/>
           </a:effectRef>
           <a:fontRef idx="minor"/>
         </p:style>
@@ -2438,10 +1853,10 @@
         </p:nvPicPr>
         <p:blipFill>
           <a:blip r:embed="rId14"/>
-          <a:srcRect b="10718"/>
+          <a:srcRect l="0" t="0" r="0" b="10718"/>
           <a:stretch/>
         </p:blipFill>
-        <p:spPr>
+        <p:spPr bwMode="auto">
           <a:xfrm>
             <a:off x="6553080" y="228600"/>
             <a:ext cx="2057040" cy="634680"/>
@@ -2462,10 +1877,10 @@
         </p:nvPicPr>
         <p:blipFill>
           <a:blip r:embed="rId14"/>
-          <a:srcRect b="10718"/>
+          <a:srcRect l="0" t="0" r="0" b="10718"/>
           <a:stretch/>
         </p:blipFill>
-        <p:spPr>
+        <p:spPr bwMode="auto">
           <a:xfrm>
             <a:off x="6553080" y="228600"/>
             <a:ext cx="2057040" cy="634680"/>
@@ -2484,12 +1899,12 @@
           <p:cNvGrpSpPr/>
           <p:nvPr/>
         </p:nvGrpSpPr>
-        <p:grpSpPr>
+        <p:grpSpPr bwMode="auto">
           <a:xfrm>
             <a:off x="6146640" y="0"/>
-            <a:ext cx="2997000" cy="875880"/>
+            <a:ext cx="2997000" cy="875879"/>
             <a:chOff x="6146640" y="0"/>
-            <a:chExt cx="2997000" cy="875880"/>
+            <a:chExt cx="2997000" cy="875879"/>
           </a:xfrm>
         </p:grpSpPr>
         <p:sp>
@@ -2498,7 +1913,7 @@
             <p:cNvSpPr/>
             <p:nvPr/>
           </p:nvSpPr>
-          <p:spPr>
+          <p:spPr bwMode="auto">
             <a:xfrm>
               <a:off x="6146640" y="0"/>
               <a:ext cx="2997000" cy="837720"/>
@@ -2515,13 +1930,13 @@
           </p:spPr>
           <p:style>
             <a:lnRef idx="0">
-              <a:scrgbClr r="0" g="0" b="0"/>
+              <a:srgbClr val="000000"/>
             </a:lnRef>
             <a:fillRef idx="0">
-              <a:scrgbClr r="0" g="0" b="0"/>
+              <a:srgbClr val="000000"/>
             </a:fillRef>
             <a:effectRef idx="0">
-              <a:scrgbClr r="0" g="0" b="0"/>
+              <a:srgbClr val="000000"/>
             </a:effectRef>
             <a:fontRef idx="minor"/>
           </p:style>
@@ -2534,10 +1949,10 @@
           </p:nvPicPr>
           <p:blipFill>
             <a:blip r:embed="rId14"/>
-            <a:srcRect b="10718"/>
+            <a:srcRect l="0" t="0" r="0" b="10718"/>
             <a:stretch/>
           </p:blipFill>
-          <p:spPr>
+          <p:spPr bwMode="auto">
             <a:xfrm>
               <a:off x="6553080" y="228600"/>
               <a:ext cx="2057040" cy="634680"/>
@@ -2556,7 +1971,7 @@
             <p:cNvSpPr/>
             <p:nvPr/>
           </p:nvSpPr>
-          <p:spPr>
+          <p:spPr bwMode="auto">
             <a:xfrm>
               <a:off x="6527880" y="190440"/>
               <a:ext cx="2076120" cy="685440"/>
@@ -2597,7 +2012,7 @@
           <a:blip r:embed="rId15"/>
           <a:stretch/>
         </p:blipFill>
-        <p:spPr>
+        <p:spPr bwMode="auto">
           <a:xfrm>
             <a:off x="6553080" y="228600"/>
             <a:ext cx="1920600" cy="609120"/>
@@ -2618,10 +2033,10 @@
         </p:nvPicPr>
         <p:blipFill>
           <a:blip r:embed="rId14"/>
-          <a:srcRect b="10718"/>
+          <a:srcRect l="0" t="0" r="0" b="10718"/>
           <a:stretch/>
         </p:blipFill>
-        <p:spPr>
+        <p:spPr bwMode="auto">
           <a:xfrm>
             <a:off x="6553080" y="228600"/>
             <a:ext cx="2057040" cy="634680"/>
@@ -2640,12 +2055,12 @@
           <p:cNvGrpSpPr/>
           <p:nvPr/>
         </p:nvGrpSpPr>
-        <p:grpSpPr>
+        <p:grpSpPr bwMode="auto">
           <a:xfrm>
             <a:off x="6146640" y="0"/>
-            <a:ext cx="2997000" cy="875880"/>
+            <a:ext cx="2997000" cy="875879"/>
             <a:chOff x="6146640" y="0"/>
-            <a:chExt cx="2997000" cy="875880"/>
+            <a:chExt cx="2997000" cy="875879"/>
           </a:xfrm>
         </p:grpSpPr>
         <p:sp>
@@ -2654,7 +2069,7 @@
             <p:cNvSpPr/>
             <p:nvPr/>
           </p:nvSpPr>
-          <p:spPr>
+          <p:spPr bwMode="auto">
             <a:xfrm>
               <a:off x="6146640" y="0"/>
               <a:ext cx="2997000" cy="837720"/>
@@ -2671,13 +2086,13 @@
           </p:spPr>
           <p:style>
             <a:lnRef idx="0">
-              <a:scrgbClr r="0" g="0" b="0"/>
+              <a:srgbClr val="000000"/>
             </a:lnRef>
             <a:fillRef idx="0">
-              <a:scrgbClr r="0" g="0" b="0"/>
+              <a:srgbClr val="000000"/>
             </a:fillRef>
             <a:effectRef idx="0">
-              <a:scrgbClr r="0" g="0" b="0"/>
+              <a:srgbClr val="000000"/>
             </a:effectRef>
             <a:fontRef idx="minor"/>
           </p:style>
@@ -2690,10 +2105,10 @@
           </p:nvPicPr>
           <p:blipFill>
             <a:blip r:embed="rId14"/>
-            <a:srcRect b="10718"/>
+            <a:srcRect l="0" t="0" r="0" b="10718"/>
             <a:stretch/>
           </p:blipFill>
-          <p:spPr>
+          <p:spPr bwMode="auto">
             <a:xfrm>
               <a:off x="6553080" y="228600"/>
               <a:ext cx="2057040" cy="634680"/>
@@ -2712,7 +2127,7 @@
             <p:cNvSpPr/>
             <p:nvPr/>
           </p:nvSpPr>
-          <p:spPr>
+          <p:spPr bwMode="auto">
             <a:xfrm>
               <a:off x="6527880" y="190440"/>
               <a:ext cx="2076120" cy="685440"/>
@@ -2753,7 +2168,7 @@
           <a:blip r:embed="rId15"/>
           <a:stretch/>
         </p:blipFill>
-        <p:spPr>
+        <p:spPr bwMode="auto">
           <a:xfrm>
             <a:off x="6553080" y="228600"/>
             <a:ext cx="1920600" cy="609120"/>
@@ -2776,7 +2191,7 @@
             <p:ph type="title"/>
           </p:nvPr>
         </p:nvSpPr>
-        <p:spPr>
+        <p:spPr bwMode="auto">
           <a:xfrm>
             <a:off x="0" y="0"/>
             <a:ext cx="6476760" cy="837720"/>
@@ -2795,9 +2210,10 @@
               <a:lnSpc>
                 <a:spcPct val="100000"/>
               </a:lnSpc>
-            </a:pPr>
-            <a:r>
-              <a:rPr lang="en-US" sz="3000" b="0" strike="noStrike" spc="-1" dirty="0">
+              <a:defRPr/>
+            </a:pPr>
+            <a:r>
+              <a:rPr lang="en-US" sz="3000" b="0" strike="noStrike" spc="-1">
                 <a:solidFill>
                   <a:srgbClr val="000000"/>
                 </a:solidFill>
@@ -2806,7 +2222,7 @@
               </a:rPr>
               <a:t>Click to edit Master title style</a:t>
             </a:r>
-            <a:endParaRPr lang="en-US" sz="3000" b="0" strike="noStrike" spc="-1" dirty="0">
+            <a:endParaRPr lang="en-US" sz="3000" b="0" strike="noStrike" spc="-1">
               <a:solidFill>
                 <a:srgbClr val="000000"/>
               </a:solidFill>
@@ -2825,7 +2241,7 @@
             <p:ph type="body"/>
           </p:nvPr>
         </p:nvSpPr>
-        <p:spPr>
+        <p:spPr bwMode="auto">
           <a:xfrm>
             <a:off x="457200" y="1371600"/>
             <a:ext cx="8229240" cy="4525560"/>
@@ -2852,9 +2268,10 @@
               </a:buClr>
               <a:buFont typeface="Arial"/>
               <a:buChar char="•"/>
-            </a:pPr>
-            <a:r>
-              <a:rPr lang="en-US" sz="3200" b="0" strike="noStrike" spc="-1" dirty="0">
+              <a:defRPr/>
+            </a:pPr>
+            <a:r>
+              <a:rPr lang="en-US" sz="3200" b="0" strike="noStrike" spc="-1">
                 <a:solidFill>
                   <a:srgbClr val="000000"/>
                 </a:solidFill>
@@ -2863,7 +2280,7 @@
               </a:rPr>
               <a:t>Click to edit Master text styles</a:t>
             </a:r>
-            <a:endParaRPr lang="en-US" sz="3200" b="0" strike="noStrike" spc="-1" dirty="0">
+            <a:endParaRPr lang="en-US" sz="3200" b="0" strike="noStrike" spc="-1">
               <a:solidFill>
                 <a:srgbClr val="000000"/>
               </a:solidFill>
@@ -2883,9 +2300,10 @@
               </a:buClr>
               <a:buFont typeface="Arial"/>
               <a:buChar char="–"/>
-            </a:pPr>
-            <a:r>
-              <a:rPr lang="en-US" sz="2800" b="0" strike="noStrike" spc="-1" dirty="0">
+              <a:defRPr/>
+            </a:pPr>
+            <a:r>
+              <a:rPr lang="en-US" sz="2800" b="0" strike="noStrike" spc="-1">
                 <a:solidFill>
                   <a:srgbClr val="000000"/>
                 </a:solidFill>
@@ -2894,7 +2312,7 @@
               </a:rPr>
               <a:t>Second level</a:t>
             </a:r>
-            <a:endParaRPr lang="en-US" sz="2800" b="0" strike="noStrike" spc="-1" dirty="0">
+            <a:endParaRPr lang="en-US" sz="2800" b="0" strike="noStrike" spc="-1">
               <a:solidFill>
                 <a:srgbClr val="000000"/>
               </a:solidFill>
@@ -2914,9 +2332,10 @@
               </a:buClr>
               <a:buFont typeface="Arial"/>
               <a:buChar char="•"/>
-            </a:pPr>
-            <a:r>
-              <a:rPr lang="en-US" sz="2400" b="0" strike="noStrike" spc="-1" dirty="0">
+              <a:defRPr/>
+            </a:pPr>
+            <a:r>
+              <a:rPr lang="en-US" sz="2400" b="0" strike="noStrike" spc="-1">
                 <a:solidFill>
                   <a:srgbClr val="000000"/>
                 </a:solidFill>
@@ -2925,7 +2344,7 @@
               </a:rPr>
               <a:t>Third level</a:t>
             </a:r>
-            <a:endParaRPr lang="en-US" sz="2400" b="0" strike="noStrike" spc="-1" dirty="0">
+            <a:endParaRPr lang="en-US" sz="2400" b="0" strike="noStrike" spc="-1">
               <a:solidFill>
                 <a:srgbClr val="000000"/>
               </a:solidFill>
@@ -2945,9 +2364,10 @@
               </a:buClr>
               <a:buFont typeface="Arial"/>
               <a:buChar char="–"/>
-            </a:pPr>
-            <a:r>
-              <a:rPr lang="en-US" sz="2000" b="0" strike="noStrike" spc="-1" dirty="0">
+              <a:defRPr/>
+            </a:pPr>
+            <a:r>
+              <a:rPr lang="en-US" sz="2000" b="0" strike="noStrike" spc="-1">
                 <a:solidFill>
                   <a:srgbClr val="000000"/>
                 </a:solidFill>
@@ -2956,7 +2376,7 @@
               </a:rPr>
               <a:t>Fourth level</a:t>
             </a:r>
-            <a:endParaRPr lang="en-US" sz="2000" b="0" strike="noStrike" spc="-1" dirty="0">
+            <a:endParaRPr lang="en-US" sz="2000" b="0" strike="noStrike" spc="-1">
               <a:solidFill>
                 <a:srgbClr val="000000"/>
               </a:solidFill>
@@ -2976,9 +2396,10 @@
               </a:buClr>
               <a:buFont typeface="Arial"/>
               <a:buChar char="»"/>
-            </a:pPr>
-            <a:r>
-              <a:rPr lang="en-US" sz="2000" b="0" strike="noStrike" spc="-1" dirty="0">
+              <a:defRPr/>
+            </a:pPr>
+            <a:r>
+              <a:rPr lang="en-US" sz="2000" b="0" strike="noStrike" spc="-1">
                 <a:solidFill>
                   <a:srgbClr val="000000"/>
                 </a:solidFill>
@@ -2987,7 +2408,7 @@
               </a:rPr>
               <a:t>Fifth level</a:t>
             </a:r>
-            <a:endParaRPr lang="en-US" sz="2000" b="0" strike="noStrike" spc="-1" dirty="0">
+            <a:endParaRPr lang="en-US" sz="2000" b="0" strike="noStrike" spc="-1">
               <a:solidFill>
                 <a:srgbClr val="000000"/>
               </a:solidFill>
@@ -3006,7 +2427,7 @@
             <p:ph type="dt"/>
           </p:nvPr>
         </p:nvSpPr>
-        <p:spPr>
+        <p:spPr bwMode="auto">
           <a:xfrm>
             <a:off x="457200" y="6356520"/>
             <a:ext cx="2133360" cy="364680"/>
@@ -3025,6 +2446,7 @@
               <a:lnSpc>
                 <a:spcPct val="100000"/>
               </a:lnSpc>
+              <a:defRPr/>
             </a:pPr>
             <a:endParaRPr lang="en-GB" sz="1200" b="0" strike="noStrike" spc="-1">
               <a:latin typeface="Times New Roman"/>
@@ -3042,7 +2464,7 @@
             <p:ph type="ftr"/>
           </p:nvPr>
         </p:nvSpPr>
-        <p:spPr>
+        <p:spPr bwMode="auto">
           <a:xfrm>
             <a:off x="3124080" y="6356520"/>
             <a:ext cx="2895120" cy="364680"/>
@@ -3057,12 +2479,16 @@
           </a:bodyPr>
           <a:lstStyle/>
           <a:p>
+            <a:pPr>
+              <a:defRPr/>
+            </a:pPr>
             <a:r>
               <a:rPr lang="en-GB" sz="2400" b="0" strike="noStrike" spc="-1">
                 <a:latin typeface="Times New Roman"/>
               </a:rPr>
               <a:t>Name</a:t>
             </a:r>
+            <a:endParaRPr/>
           </a:p>
         </p:txBody>
       </p:sp>
@@ -3076,7 +2502,7 @@
             <p:ph type="sldNum"/>
           </p:nvPr>
         </p:nvSpPr>
-        <p:spPr>
+        <p:spPr bwMode="auto">
           <a:xfrm>
             <a:off x="6553080" y="6356520"/>
             <a:ext cx="2133360" cy="364680"/>
@@ -3095,6 +2521,7 @@
               <a:lnSpc>
                 <a:spcPct val="100000"/>
               </a:lnSpc>
+              <a:defRPr/>
             </a:pPr>
             <a:fld id="{1CFDC92E-FF5D-4613-8499-B15BC16E50D9}" type="slidenum">
               <a:rPr lang="en-US" sz="1200" b="0" strike="noStrike" spc="-1">
@@ -3104,12 +2531,7 @@
                 <a:latin typeface="Calibri"/>
                 <a:ea typeface="MS PGothic"/>
               </a:rPr>
-              <a:pPr algn="r">
-                <a:lnSpc>
-                  <a:spcPct val="100000"/>
-                </a:lnSpc>
-              </a:pPr>
-              <a:t>‹#›</a:t>
+              <a:t/>
             </a:fld>
             <a:endParaRPr lang="en-GB" sz="1200" b="0" strike="noStrike" spc="-1">
               <a:latin typeface="Times New Roman"/>
@@ -3134,18 +2556,18 @@
     <p:sldLayoutId id="2147483659" r:id="rId11"/>
     <p:sldLayoutId id="2147483660" r:id="rId12"/>
   </p:sldLayoutIdLst>
-  <p:hf sldNum="0" hdr="0" dt="0"/>
+  <p:hf dt="0" ftr="1" hdr="0" sldNum="0"/>
   <p:txStyles>
     <p:titleStyle>
-      <a:lvl1pPr algn="l" defTabSz="914400" rtl="0" eaLnBrk="1" latinLnBrk="0" hangingPunct="1">
+      <a:lvl1pPr algn="l" defTabSz="914400">
         <a:lnSpc>
           <a:spcPct val="90000"/>
         </a:lnSpc>
         <a:spcBef>
-          <a:spcPct val="0"/>
+          <a:spcPts val="0"/>
         </a:spcBef>
         <a:buNone/>
-        <a:defRPr sz="4400" kern="1200">
+        <a:defRPr sz="4400">
           <a:solidFill>
             <a:schemeClr val="tx1"/>
           </a:solidFill>
@@ -3156,16 +2578,16 @@
       </a:lvl1pPr>
     </p:titleStyle>
     <p:bodyStyle>
-      <a:lvl1pPr marL="228600" indent="-228600" algn="l" defTabSz="914400" rtl="0" eaLnBrk="1" latinLnBrk="0" hangingPunct="1">
+      <a:lvl1pPr marL="228600" indent="-228600" algn="l" defTabSz="914400">
         <a:lnSpc>
           <a:spcPct val="90000"/>
         </a:lnSpc>
         <a:spcBef>
           <a:spcPts val="1000"/>
         </a:spcBef>
-        <a:buFont typeface="Arial" panose="020B0604020202020204" pitchFamily="34" charset="0"/>
+        <a:buFont typeface="Arial"/>
         <a:buChar char="•"/>
-        <a:defRPr sz="2800" kern="1200">
+        <a:defRPr sz="2800">
           <a:solidFill>
             <a:schemeClr val="tx1"/>
           </a:solidFill>
@@ -3174,16 +2596,16 @@
           <a:cs typeface="+mn-cs"/>
         </a:defRPr>
       </a:lvl1pPr>
-      <a:lvl2pPr marL="685800" indent="-228600" algn="l" defTabSz="914400" rtl="0" eaLnBrk="1" latinLnBrk="0" hangingPunct="1">
+      <a:lvl2pPr marL="685800" indent="-228600" algn="l" defTabSz="914400">
         <a:lnSpc>
           <a:spcPct val="90000"/>
         </a:lnSpc>
         <a:spcBef>
           <a:spcPts val="500"/>
         </a:spcBef>
-        <a:buFont typeface="Arial" panose="020B0604020202020204" pitchFamily="34" charset="0"/>
+        <a:buFont typeface="Arial"/>
         <a:buChar char="•"/>
-        <a:defRPr sz="2400" kern="1200">
+        <a:defRPr sz="2400">
           <a:solidFill>
             <a:schemeClr val="tx1"/>
           </a:solidFill>
@@ -3192,16 +2614,16 @@
           <a:cs typeface="+mn-cs"/>
         </a:defRPr>
       </a:lvl2pPr>
-      <a:lvl3pPr marL="1143000" indent="-228600" algn="l" defTabSz="914400" rtl="0" eaLnBrk="1" latinLnBrk="0" hangingPunct="1">
+      <a:lvl3pPr marL="1143000" indent="-228600" algn="l" defTabSz="914400">
         <a:lnSpc>
           <a:spcPct val="90000"/>
         </a:lnSpc>
         <a:spcBef>
           <a:spcPts val="500"/>
         </a:spcBef>
-        <a:buFont typeface="Arial" panose="020B0604020202020204" pitchFamily="34" charset="0"/>
+        <a:buFont typeface="Arial"/>
         <a:buChar char="•"/>
-        <a:defRPr sz="2000" kern="1200">
+        <a:defRPr sz="2000">
           <a:solidFill>
             <a:schemeClr val="tx1"/>
           </a:solidFill>
@@ -3210,16 +2632,16 @@
           <a:cs typeface="+mn-cs"/>
         </a:defRPr>
       </a:lvl3pPr>
-      <a:lvl4pPr marL="1600200" indent="-228600" algn="l" defTabSz="914400" rtl="0" eaLnBrk="1" latinLnBrk="0" hangingPunct="1">
+      <a:lvl4pPr marL="1600200" indent="-228600" algn="l" defTabSz="914400">
         <a:lnSpc>
           <a:spcPct val="90000"/>
         </a:lnSpc>
         <a:spcBef>
           <a:spcPts val="500"/>
         </a:spcBef>
-        <a:buFont typeface="Arial" panose="020B0604020202020204" pitchFamily="34" charset="0"/>
+        <a:buFont typeface="Arial"/>
         <a:buChar char="•"/>
-        <a:defRPr sz="1800" kern="1200">
+        <a:defRPr sz="1800">
           <a:solidFill>
             <a:schemeClr val="tx1"/>
           </a:solidFill>
@@ -3228,16 +2650,16 @@
           <a:cs typeface="+mn-cs"/>
         </a:defRPr>
       </a:lvl4pPr>
-      <a:lvl5pPr marL="2057400" indent="-228600" algn="l" defTabSz="914400" rtl="0" eaLnBrk="1" latinLnBrk="0" hangingPunct="1">
+      <a:lvl5pPr marL="2057400" indent="-228600" algn="l" defTabSz="914400">
         <a:lnSpc>
           <a:spcPct val="90000"/>
         </a:lnSpc>
         <a:spcBef>
           <a:spcPts val="500"/>
         </a:spcBef>
-        <a:buFont typeface="Arial" panose="020B0604020202020204" pitchFamily="34" charset="0"/>
+        <a:buFont typeface="Arial"/>
         <a:buChar char="•"/>
-        <a:defRPr sz="1800" kern="1200">
+        <a:defRPr sz="1800">
           <a:solidFill>
             <a:schemeClr val="tx1"/>
           </a:solidFill>
@@ -3246,16 +2668,16 @@
           <a:cs typeface="+mn-cs"/>
         </a:defRPr>
       </a:lvl5pPr>
-      <a:lvl6pPr marL="2514600" indent="-228600" algn="l" defTabSz="914400" rtl="0" eaLnBrk="1" latinLnBrk="0" hangingPunct="1">
+      <a:lvl6pPr marL="2514600" indent="-228600" algn="l" defTabSz="914400">
         <a:lnSpc>
           <a:spcPct val="90000"/>
         </a:lnSpc>
         <a:spcBef>
           <a:spcPts val="500"/>
         </a:spcBef>
-        <a:buFont typeface="Arial" panose="020B0604020202020204" pitchFamily="34" charset="0"/>
+        <a:buFont typeface="Arial"/>
         <a:buChar char="•"/>
-        <a:defRPr sz="1800" kern="1200">
+        <a:defRPr sz="1800">
           <a:solidFill>
             <a:schemeClr val="tx1"/>
           </a:solidFill>
@@ -3264,16 +2686,16 @@
           <a:cs typeface="+mn-cs"/>
         </a:defRPr>
       </a:lvl6pPr>
-      <a:lvl7pPr marL="2971800" indent="-228600" algn="l" defTabSz="914400" rtl="0" eaLnBrk="1" latinLnBrk="0" hangingPunct="1">
+      <a:lvl7pPr marL="2971800" indent="-228600" algn="l" defTabSz="914400">
         <a:lnSpc>
           <a:spcPct val="90000"/>
         </a:lnSpc>
         <a:spcBef>
           <a:spcPts val="500"/>
         </a:spcBef>
-        <a:buFont typeface="Arial" panose="020B0604020202020204" pitchFamily="34" charset="0"/>
+        <a:buFont typeface="Arial"/>
         <a:buChar char="•"/>
-        <a:defRPr sz="1800" kern="1200">
+        <a:defRPr sz="1800">
           <a:solidFill>
             <a:schemeClr val="tx1"/>
           </a:solidFill>
@@ -3282,16 +2704,16 @@
           <a:cs typeface="+mn-cs"/>
         </a:defRPr>
       </a:lvl7pPr>
-      <a:lvl8pPr marL="3429000" indent="-228600" algn="l" defTabSz="914400" rtl="0" eaLnBrk="1" latinLnBrk="0" hangingPunct="1">
+      <a:lvl8pPr marL="3429000" indent="-228600" algn="l" defTabSz="914400">
         <a:lnSpc>
           <a:spcPct val="90000"/>
         </a:lnSpc>
         <a:spcBef>
           <a:spcPts val="500"/>
         </a:spcBef>
-        <a:buFont typeface="Arial" panose="020B0604020202020204" pitchFamily="34" charset="0"/>
+        <a:buFont typeface="Arial"/>
         <a:buChar char="•"/>
-        <a:defRPr sz="1800" kern="1200">
+        <a:defRPr sz="1800">
           <a:solidFill>
             <a:schemeClr val="tx1"/>
           </a:solidFill>
@@ -3300,16 +2722,16 @@
           <a:cs typeface="+mn-cs"/>
         </a:defRPr>
       </a:lvl8pPr>
-      <a:lvl9pPr marL="3886200" indent="-228600" algn="l" defTabSz="914400" rtl="0" eaLnBrk="1" latinLnBrk="0" hangingPunct="1">
+      <a:lvl9pPr marL="3886200" indent="-228600" algn="l" defTabSz="914400">
         <a:lnSpc>
           <a:spcPct val="90000"/>
         </a:lnSpc>
         <a:spcBef>
           <a:spcPts val="500"/>
         </a:spcBef>
-        <a:buFont typeface="Arial" panose="020B0604020202020204" pitchFamily="34" charset="0"/>
+        <a:buFont typeface="Arial"/>
         <a:buChar char="•"/>
-        <a:defRPr sz="1800" kern="1200">
+        <a:defRPr sz="1800">
           <a:solidFill>
             <a:schemeClr val="tx1"/>
           </a:solidFill>
@@ -3323,8 +2745,8 @@
       <a:defPPr>
         <a:defRPr lang="en-US"/>
       </a:defPPr>
-      <a:lvl1pPr marL="0" algn="l" defTabSz="914400" rtl="0" eaLnBrk="1" latinLnBrk="0" hangingPunct="1">
-        <a:defRPr sz="1800" kern="1200">
+      <a:lvl1pPr marL="0" algn="l" defTabSz="914400">
+        <a:defRPr sz="1800">
           <a:solidFill>
             <a:schemeClr val="tx1"/>
           </a:solidFill>
@@ -3333,8 +2755,8 @@
           <a:cs typeface="+mn-cs"/>
         </a:defRPr>
       </a:lvl1pPr>
-      <a:lvl2pPr marL="457200" algn="l" defTabSz="914400" rtl="0" eaLnBrk="1" latinLnBrk="0" hangingPunct="1">
-        <a:defRPr sz="1800" kern="1200">
+      <a:lvl2pPr marL="457200" algn="l" defTabSz="914400">
+        <a:defRPr sz="1800">
           <a:solidFill>
             <a:schemeClr val="tx1"/>
           </a:solidFill>
@@ -3343,8 +2765,8 @@
           <a:cs typeface="+mn-cs"/>
         </a:defRPr>
       </a:lvl2pPr>
-      <a:lvl3pPr marL="914400" algn="l" defTabSz="914400" rtl="0" eaLnBrk="1" latinLnBrk="0" hangingPunct="1">
-        <a:defRPr sz="1800" kern="1200">
+      <a:lvl3pPr marL="914400" algn="l" defTabSz="914400">
+        <a:defRPr sz="1800">
           <a:solidFill>
             <a:schemeClr val="tx1"/>
           </a:solidFill>
@@ -3353,8 +2775,8 @@
           <a:cs typeface="+mn-cs"/>
         </a:defRPr>
       </a:lvl3pPr>
-      <a:lvl4pPr marL="1371600" algn="l" defTabSz="914400" rtl="0" eaLnBrk="1" latinLnBrk="0" hangingPunct="1">
-        <a:defRPr sz="1800" kern="1200">
+      <a:lvl4pPr marL="1371600" algn="l" defTabSz="914400">
+        <a:defRPr sz="1800">
           <a:solidFill>
             <a:schemeClr val="tx1"/>
           </a:solidFill>
@@ -3363,8 +2785,8 @@
           <a:cs typeface="+mn-cs"/>
         </a:defRPr>
       </a:lvl4pPr>
-      <a:lvl5pPr marL="1828800" algn="l" defTabSz="914400" rtl="0" eaLnBrk="1" latinLnBrk="0" hangingPunct="1">
-        <a:defRPr sz="1800" kern="1200">
+      <a:lvl5pPr marL="1828800" algn="l" defTabSz="914400">
+        <a:defRPr sz="1800">
           <a:solidFill>
             <a:schemeClr val="tx1"/>
           </a:solidFill>
@@ -3373,8 +2795,8 @@
           <a:cs typeface="+mn-cs"/>
         </a:defRPr>
       </a:lvl5pPr>
-      <a:lvl6pPr marL="2286000" algn="l" defTabSz="914400" rtl="0" eaLnBrk="1" latinLnBrk="0" hangingPunct="1">
-        <a:defRPr sz="1800" kern="1200">
+      <a:lvl6pPr marL="2286000" algn="l" defTabSz="914400">
+        <a:defRPr sz="1800">
           <a:solidFill>
             <a:schemeClr val="tx1"/>
           </a:solidFill>
@@ -3383,8 +2805,8 @@
           <a:cs typeface="+mn-cs"/>
         </a:defRPr>
       </a:lvl6pPr>
-      <a:lvl7pPr marL="2743200" algn="l" defTabSz="914400" rtl="0" eaLnBrk="1" latinLnBrk="0" hangingPunct="1">
-        <a:defRPr sz="1800" kern="1200">
+      <a:lvl7pPr marL="2743200" algn="l" defTabSz="914400">
+        <a:defRPr sz="1800">
           <a:solidFill>
             <a:schemeClr val="tx1"/>
           </a:solidFill>
@@ -3393,8 +2815,8 @@
           <a:cs typeface="+mn-cs"/>
         </a:defRPr>
       </a:lvl7pPr>
-      <a:lvl8pPr marL="3200400" algn="l" defTabSz="914400" rtl="0" eaLnBrk="1" latinLnBrk="0" hangingPunct="1">
-        <a:defRPr sz="1800" kern="1200">
+      <a:lvl8pPr marL="3200400" algn="l" defTabSz="914400">
+        <a:defRPr sz="1800">
           <a:solidFill>
             <a:schemeClr val="tx1"/>
           </a:solidFill>
@@ -3403,8 +2825,8 @@
           <a:cs typeface="+mn-cs"/>
         </a:defRPr>
       </a:lvl8pPr>
-      <a:lvl9pPr marL="3657600" algn="l" defTabSz="914400" rtl="0" eaLnBrk="1" latinLnBrk="0" hangingPunct="1">
-        <a:defRPr sz="1800" kern="1200">
+      <a:lvl9pPr marL="3657600" algn="l" defTabSz="914400">
+        <a:defRPr sz="1800">
           <a:solidFill>
             <a:schemeClr val="tx1"/>
           </a:solidFill>
@@ -3419,15 +2841,15 @@
 </file>
 
 <file path=ppt/slides/slide1.xml><?xml version="1.0" encoding="utf-8"?>
-<p:sld xmlns:a="http://schemas.openxmlformats.org/drawingml/2006/main" xmlns:r="http://schemas.openxmlformats.org/officeDocument/2006/relationships" xmlns:p="http://schemas.openxmlformats.org/presentationml/2006/main">
-  <p:cSld>
+<p:sld xmlns:a="http://schemas.openxmlformats.org/drawingml/2006/main" xmlns:r="http://schemas.openxmlformats.org/officeDocument/2006/relationships" xmlns:p="http://schemas.openxmlformats.org/presentationml/2006/main" xmlns:m="http://schemas.openxmlformats.org/officeDocument/2006/math" xmlns:w="http://schemas.openxmlformats.org/wordprocessingml/2006/main" showMasterPhAnim="0" show="1">
+  <p:cSld name="">
     <p:spTree>
       <p:nvGrpSpPr>
         <p:cNvPr id="1" name=""/>
         <p:cNvGrpSpPr/>
         <p:nvPr/>
       </p:nvGrpSpPr>
-      <p:grpSpPr>
+      <p:grpSpPr bwMode="auto">
         <a:xfrm>
           <a:off x="0" y="0"/>
           <a:ext cx="0" cy="0"/>
@@ -3441,7 +2863,7 @@
           <p:cNvSpPr txBox="1"/>
           <p:nvPr/>
         </p:nvSpPr>
-        <p:spPr>
+        <p:spPr bwMode="auto">
           <a:xfrm>
             <a:off x="0" y="840631"/>
             <a:ext cx="9144000" cy="5377289"/>
@@ -3467,31 +2889,33 @@
               <a:spcBef>
                 <a:spcPts val="400"/>
               </a:spcBef>
-            </a:pPr>
-            <a:r>
-              <a:rPr lang="en-IN" b="1" dirty="0">
-                <a:latin typeface="Times New Roman" panose="02020603050405020304" pitchFamily="18" charset="0"/>
-                <a:ea typeface="Calibri" panose="020F0502020204030204" pitchFamily="34" charset="0"/>
-                <a:cs typeface="Times New Roman" panose="02020603050405020304" pitchFamily="18" charset="0"/>
+              <a:defRPr/>
+            </a:pPr>
+            <a:r>
+              <a:rPr lang="en-IN" b="1">
+                <a:latin typeface="Times New Roman"/>
+                <a:ea typeface="Calibri"/>
+                <a:cs typeface="Times New Roman"/>
               </a:rPr>
               <a:t>Project Presentation of </a:t>
             </a:r>
             <a:r>
-              <a:rPr lang="en-US" b="1" dirty="0">
-                <a:latin typeface="Times New Roman" panose="02020603050405020304" pitchFamily="18" charset="0"/>
-                <a:ea typeface="Calibri" panose="020F0502020204030204" pitchFamily="34" charset="0"/>
-                <a:cs typeface="Times New Roman" panose="02020603050405020304" pitchFamily="18" charset="0"/>
+              <a:rPr lang="en-US" b="1">
+                <a:latin typeface="Times New Roman"/>
+                <a:ea typeface="Calibri"/>
+                <a:cs typeface="Times New Roman"/>
               </a:rPr>
               <a:t>CO-OP Project at Industry (Module-2) </a:t>
             </a:r>
             <a:r>
-              <a:rPr lang="en-IN" b="1" dirty="0">
-                <a:latin typeface="Times New Roman" panose="02020603050405020304" pitchFamily="18" charset="0"/>
-                <a:ea typeface="Calibri" panose="020F0502020204030204" pitchFamily="34" charset="0"/>
-                <a:cs typeface="Times New Roman" panose="02020603050405020304" pitchFamily="18" charset="0"/>
+              <a:rPr lang="en-IN" b="1">
+                <a:latin typeface="Times New Roman"/>
+                <a:ea typeface="Calibri"/>
+                <a:cs typeface="Times New Roman"/>
               </a:rPr>
               <a:t>(22CS421)</a:t>
             </a:r>
+            <a:endParaRPr/>
           </a:p>
           <a:p>
             <a:pPr algn="ctr">
@@ -3501,39 +2925,46 @@
               <a:spcBef>
                 <a:spcPts val="400"/>
               </a:spcBef>
-            </a:pPr>
-            <a:r>
-              <a:rPr lang="en-US" sz="2000" spc="-1" dirty="0">
-                <a:latin typeface="Times New Roman" panose="02020603050405020304" pitchFamily="18" charset="0"/>
-                <a:ea typeface="Calibri" panose="020F0502020204030204" pitchFamily="34" charset="0"/>
-                <a:cs typeface="Times New Roman" panose="02020603050405020304" pitchFamily="18" charset="0"/>
+              <a:defRPr/>
+            </a:pPr>
+            <a:r>
+              <a:rPr lang="en-US" sz="2000" spc="-1">
+                <a:latin typeface="Times New Roman"/>
+                <a:ea typeface="Calibri"/>
+                <a:cs typeface="Times New Roman"/>
               </a:rPr>
               <a:t>On</a:t>
             </a:r>
-          </a:p>
-          <a:p>
-            <a:pPr algn="ctr"/>
-            <a:r>
-              <a:rPr lang="en-IN" sz="3200" dirty="0">
-                <a:latin typeface="Times New Roman" panose="02020603050405020304" pitchFamily="18" charset="0"/>
-                <a:cs typeface="Times New Roman" panose="02020603050405020304" pitchFamily="18" charset="0"/>
+            <a:endParaRPr/>
+          </a:p>
+          <a:p>
+            <a:pPr algn="ctr">
+              <a:defRPr/>
+            </a:pPr>
+            <a:r>
+              <a:rPr lang="en-IN" sz="3200">
+                <a:latin typeface="Times New Roman"/>
+                <a:cs typeface="Times New Roman"/>
               </a:rPr>
               <a:t>Phishing URL Detection Using Random Forests</a:t>
             </a:r>
-          </a:p>
-          <a:p>
-            <a:pPr algn="ctr"/>
-            <a:r>
-              <a:rPr lang="en-IN" sz="3200" dirty="0">
-                <a:latin typeface="Times New Roman" panose="02020603050405020304" pitchFamily="18" charset="0"/>
-                <a:cs typeface="Times New Roman" panose="02020603050405020304" pitchFamily="18" charset="0"/>
+            <a:endParaRPr/>
+          </a:p>
+          <a:p>
+            <a:pPr algn="ctr">
+              <a:defRPr/>
+            </a:pPr>
+            <a:r>
+              <a:rPr lang="en-IN" sz="3200">
+                <a:latin typeface="Times New Roman"/>
+                <a:cs typeface="Times New Roman"/>
               </a:rPr>
               <a:t>Algorithm</a:t>
             </a:r>
-            <a:endParaRPr lang="en-US" sz="3200" i="1" spc="-1" dirty="0">
-              <a:latin typeface="Times New Roman" panose="02020603050405020304" pitchFamily="18" charset="0"/>
-              <a:ea typeface="Calibri" panose="020F0502020204030204" pitchFamily="34" charset="0"/>
-              <a:cs typeface="Times New Roman" panose="02020603050405020304" pitchFamily="18" charset="0"/>
+            <a:endParaRPr lang="en-US" sz="3200" i="1" spc="-1">
+              <a:latin typeface="Times New Roman"/>
+              <a:ea typeface="Calibri"/>
+              <a:cs typeface="Times New Roman"/>
             </a:endParaRPr>
           </a:p>
           <a:p>
@@ -3544,28 +2975,30 @@
               <a:spcBef>
                 <a:spcPts val="400"/>
               </a:spcBef>
+              <a:defRPr/>
             </a:pPr>
             <a:br>
-              <a:rPr lang="en-US" sz="2000" b="0" strike="noStrike" spc="-1" dirty="0">
+              <a:rPr lang="en-US" sz="2000" b="0" strike="noStrike" spc="-1">
                 <a:solidFill>
                   <a:srgbClr val="000000"/>
                 </a:solidFill>
-                <a:latin typeface="Times New Roman" panose="02020603050405020304" pitchFamily="18" charset="0"/>
+                <a:latin typeface="Times New Roman"/>
                 <a:ea typeface="MS PGothic"/>
-                <a:cs typeface="Times New Roman" panose="02020603050405020304" pitchFamily="18" charset="0"/>
+                <a:cs typeface="Times New Roman"/>
               </a:rPr>
             </a:br>
             <a:r>
-              <a:rPr lang="en-US" sz="2000" spc="-1" dirty="0">
+              <a:rPr lang="en-US" sz="2000" spc="-1">
                 <a:solidFill>
                   <a:srgbClr val="000000"/>
                 </a:solidFill>
-                <a:latin typeface="Times New Roman" panose="02020603050405020304" pitchFamily="18" charset="0"/>
+                <a:latin typeface="Times New Roman"/>
                 <a:ea typeface="MS PGothic"/>
-                <a:cs typeface="Times New Roman" panose="02020603050405020304" pitchFamily="18" charset="0"/>
+                <a:cs typeface="Times New Roman"/>
               </a:rPr>
               <a:t>Jasmeet Singh (2210990449)</a:t>
             </a:r>
+            <a:endParaRPr/>
           </a:p>
           <a:p>
             <a:pPr algn="ctr">
@@ -3575,18 +3008,20 @@
               <a:spcBef>
                 <a:spcPts val="400"/>
               </a:spcBef>
-            </a:pPr>
-            <a:r>
-              <a:rPr lang="en-US" sz="2000" spc="-1" dirty="0">
+              <a:defRPr/>
+            </a:pPr>
+            <a:r>
+              <a:rPr lang="en-US" sz="2000" spc="-1">
                 <a:solidFill>
                   <a:srgbClr val="000000"/>
                 </a:solidFill>
-                <a:latin typeface="Times New Roman" panose="02020603050405020304" pitchFamily="18" charset="0"/>
+                <a:latin typeface="Times New Roman"/>
                 <a:ea typeface="MS PGothic"/>
-                <a:cs typeface="Times New Roman" panose="02020603050405020304" pitchFamily="18" charset="0"/>
+                <a:cs typeface="Times New Roman"/>
               </a:rPr>
               <a:t>Tamanna (2210990885)</a:t>
             </a:r>
+            <a:endParaRPr/>
           </a:p>
           <a:p>
             <a:pPr algn="ctr">
@@ -3596,18 +3031,20 @@
               <a:spcBef>
                 <a:spcPts val="400"/>
               </a:spcBef>
-            </a:pPr>
-            <a:r>
-              <a:rPr lang="en-US" sz="2000" spc="-1" dirty="0">
+              <a:defRPr/>
+            </a:pPr>
+            <a:r>
+              <a:rPr lang="en-US" sz="2000" spc="-1">
                 <a:solidFill>
                   <a:srgbClr val="000000"/>
                 </a:solidFill>
-                <a:latin typeface="Times New Roman" panose="02020603050405020304" pitchFamily="18" charset="0"/>
+                <a:latin typeface="Times New Roman"/>
                 <a:ea typeface="MS PGothic"/>
-                <a:cs typeface="Times New Roman" panose="02020603050405020304" pitchFamily="18" charset="0"/>
+                <a:cs typeface="Times New Roman"/>
               </a:rPr>
               <a:t>Tanishpreet Kaur (2210990895)</a:t>
             </a:r>
+            <a:endParaRPr/>
           </a:p>
           <a:p>
             <a:pPr algn="ctr">
@@ -3617,18 +3054,20 @@
               <a:spcBef>
                 <a:spcPts val="400"/>
               </a:spcBef>
-            </a:pPr>
-            <a:r>
-              <a:rPr lang="en-US" sz="2000" spc="-1" dirty="0">
+              <a:defRPr/>
+            </a:pPr>
+            <a:r>
+              <a:rPr lang="en-US" sz="2000" spc="-1">
                 <a:solidFill>
                   <a:srgbClr val="000000"/>
                 </a:solidFill>
-                <a:latin typeface="Times New Roman" panose="02020603050405020304" pitchFamily="18" charset="0"/>
+                <a:latin typeface="Times New Roman"/>
                 <a:ea typeface="MS PGothic"/>
-                <a:cs typeface="Times New Roman" panose="02020603050405020304" pitchFamily="18" charset="0"/>
+                <a:cs typeface="Times New Roman"/>
               </a:rPr>
               <a:t>Ronit Sachdeva (2210992184)</a:t>
             </a:r>
+            <a:endParaRPr/>
           </a:p>
           <a:p>
             <a:pPr algn="ctr">
@@ -3638,14 +3077,15 @@
               <a:spcBef>
                 <a:spcPts val="400"/>
               </a:spcBef>
-            </a:pPr>
-            <a:endParaRPr lang="en-US" sz="2000" b="0" strike="noStrike" spc="-1" dirty="0">
+              <a:defRPr/>
+            </a:pPr>
+            <a:endParaRPr lang="en-US" sz="2000" b="0" strike="noStrike" spc="-1">
               <a:solidFill>
                 <a:srgbClr val="000000"/>
               </a:solidFill>
-              <a:latin typeface="Times New Roman" panose="02020603050405020304" pitchFamily="18" charset="0"/>
+              <a:latin typeface="Times New Roman"/>
               <a:ea typeface="MS PGothic"/>
-              <a:cs typeface="Times New Roman" panose="02020603050405020304" pitchFamily="18" charset="0"/>
+              <a:cs typeface="Times New Roman"/>
             </a:endParaRPr>
           </a:p>
           <a:p>
@@ -3656,18 +3096,20 @@
               <a:spcBef>
                 <a:spcPts val="400"/>
               </a:spcBef>
-            </a:pPr>
-            <a:r>
-              <a:rPr lang="en-US" sz="2000" spc="-1" dirty="0">
+              <a:defRPr/>
+            </a:pPr>
+            <a:r>
+              <a:rPr lang="en-US" sz="2000" spc="-1">
                 <a:solidFill>
                   <a:srgbClr val="000000"/>
                 </a:solidFill>
-                <a:latin typeface="Times New Roman" panose="02020603050405020304" pitchFamily="18" charset="0"/>
+                <a:latin typeface="Times New Roman"/>
                 <a:ea typeface="MS PGothic"/>
-                <a:cs typeface="Times New Roman" panose="02020603050405020304" pitchFamily="18" charset="0"/>
+                <a:cs typeface="Times New Roman"/>
               </a:rPr>
               <a:t>Supervised By</a:t>
             </a:r>
+            <a:endParaRPr/>
           </a:p>
           <a:p>
             <a:pPr algn="ctr">
@@ -3677,22 +3119,23 @@
               <a:spcBef>
                 <a:spcPts val="400"/>
               </a:spcBef>
-            </a:pPr>
-            <a:r>
-              <a:rPr lang="en-US" sz="2000" b="0" strike="noStrike" spc="-1" dirty="0">
+              <a:defRPr/>
+            </a:pPr>
+            <a:r>
+              <a:rPr lang="en-GB" sz="2000" b="0" strike="noStrike" spc="0">
                 <a:solidFill>
                   <a:srgbClr val="000000"/>
                 </a:solidFill>
-                <a:latin typeface="Times New Roman" panose="02020603050405020304" pitchFamily="18" charset="0"/>
+                <a:latin typeface="Times New Roman"/>
                 <a:ea typeface="MS PGothic"/>
-                <a:cs typeface="Times New Roman" panose="02020603050405020304" pitchFamily="18" charset="0"/>
+                <a:cs typeface="Times New Roman"/>
               </a:rPr>
-              <a:t>&lt;Name of the Mentor/Team Lead/Manager&gt;</a:t>
-            </a:r>
-            <a:endParaRPr lang="en-US" sz="2000" spc="-1" dirty="0">
-              <a:latin typeface="Times New Roman" panose="02020603050405020304" pitchFamily="18" charset="0"/>
+              <a:t>Isha Kansal </a:t>
+            </a:r>
+            <a:endParaRPr lang="en-US" sz="2000" spc="-1">
+              <a:latin typeface="Times New Roman"/>
               <a:ea typeface="MS PGothic"/>
-              <a:cs typeface="Times New Roman" panose="02020603050405020304" pitchFamily="18" charset="0"/>
+              <a:cs typeface="Times New Roman"/>
             </a:endParaRPr>
           </a:p>
           <a:p>
@@ -3703,11 +3146,12 @@
               <a:spcBef>
                 <a:spcPts val="400"/>
               </a:spcBef>
-            </a:pPr>
-            <a:endParaRPr lang="en-US" sz="2000" spc="-1" dirty="0">
-              <a:latin typeface="Times New Roman" panose="02020603050405020304" pitchFamily="18" charset="0"/>
+              <a:defRPr/>
+            </a:pPr>
+            <a:endParaRPr lang="en-US" sz="2000" spc="-1">
+              <a:latin typeface="Times New Roman"/>
               <a:ea typeface="MS PGothic"/>
-              <a:cs typeface="Times New Roman" panose="02020603050405020304" pitchFamily="18" charset="0"/>
+              <a:cs typeface="Times New Roman"/>
             </a:endParaRPr>
           </a:p>
           <a:p>
@@ -3718,23 +3162,25 @@
               <a:spcBef>
                 <a:spcPts val="400"/>
               </a:spcBef>
-            </a:pPr>
-            <a:r>
-              <a:rPr lang="en-US" sz="2400" spc="-1" dirty="0">
-                <a:latin typeface="Times New Roman" panose="02020603050405020304" pitchFamily="18" charset="0"/>
+              <a:defRPr/>
+            </a:pPr>
+            <a:r>
+              <a:rPr lang="en-US" sz="2400" spc="-1">
+                <a:latin typeface="Times New Roman"/>
                 <a:ea typeface="MS PGothic"/>
-                <a:cs typeface="Times New Roman" panose="02020603050405020304" pitchFamily="18" charset="0"/>
+                <a:cs typeface="Times New Roman"/>
               </a:rPr>
               <a:t>Department of </a:t>
             </a:r>
             <a:r>
-              <a:rPr lang="en-US" sz="2400" b="0" strike="noStrike" spc="-1" dirty="0">
-                <a:latin typeface="Times New Roman" panose="02020603050405020304" pitchFamily="18" charset="0"/>
+              <a:rPr lang="en-US" sz="2400" b="0" strike="noStrike" spc="-1">
+                <a:latin typeface="Times New Roman"/>
                 <a:ea typeface="MS PGothic"/>
-                <a:cs typeface="Times New Roman" panose="02020603050405020304" pitchFamily="18" charset="0"/>
+                <a:cs typeface="Times New Roman"/>
               </a:rPr>
               <a:t>Computer Science and Engineering, </a:t>
             </a:r>
+            <a:endParaRPr/>
           </a:p>
           <a:p>
             <a:pPr algn="ctr">
@@ -3744,15 +3190,17 @@
               <a:spcBef>
                 <a:spcPts val="400"/>
               </a:spcBef>
-            </a:pPr>
-            <a:r>
-              <a:rPr lang="en-US" sz="2400" b="0" strike="noStrike" spc="-1" dirty="0">
-                <a:latin typeface="Times New Roman" panose="02020603050405020304" pitchFamily="18" charset="0"/>
+              <a:defRPr/>
+            </a:pPr>
+            <a:r>
+              <a:rPr lang="en-US" sz="2400" b="0" strike="noStrike" spc="-1">
+                <a:latin typeface="Times New Roman"/>
                 <a:ea typeface="MS PGothic"/>
-                <a:cs typeface="Times New Roman" panose="02020603050405020304" pitchFamily="18" charset="0"/>
+                <a:cs typeface="Times New Roman"/>
               </a:rPr>
               <a:t>Chitkara University, Punjab</a:t>
             </a:r>
+            <a:endParaRPr/>
           </a:p>
           <a:p>
             <a:pPr algn="ctr">
@@ -3762,8 +3210,9 @@
               <a:spcBef>
                 <a:spcPts val="400"/>
               </a:spcBef>
-            </a:pPr>
-            <a:endParaRPr lang="en-US" sz="2000" b="0" strike="noStrike" spc="-1" dirty="0">
+              <a:defRPr/>
+            </a:pPr>
+            <a:endParaRPr lang="en-US" sz="2000" b="0" strike="noStrike" spc="-1">
               <a:solidFill>
                 <a:srgbClr val="000000"/>
               </a:solidFill>
@@ -3778,8 +3227,9 @@
               <a:spcBef>
                 <a:spcPts val="641"/>
               </a:spcBef>
-            </a:pPr>
-            <a:endParaRPr lang="en-US" sz="2000" b="0" strike="noStrike" spc="-1" dirty="0">
+              <a:defRPr/>
+            </a:pPr>
+            <a:endParaRPr lang="en-US" sz="2000" b="0" strike="noStrike" spc="-1">
               <a:solidFill>
                 <a:srgbClr val="000000"/>
               </a:solidFill>
@@ -3793,25 +3243,27 @@
   <p:clrMapOvr>
     <a:masterClrMapping/>
   </p:clrMapOvr>
+  <mc:AlternateContent xmlns:mc="http://schemas.openxmlformats.org/markup-compatibility/2006">
+    <mc:Choice xmlns:p14="http://schemas.microsoft.com/office/powerpoint/2010/main" Requires="p14">
+      <p:transition p14:dur="2000" advClick="1"/>
+    </mc:Choice>
+    <mc:Fallback>
+      <p:transition advClick="1"/>
+    </mc:Fallback>
+  </mc:AlternateContent>
 </p:sld>
 </file>
 
 <file path=ppt/slides/slide10.xml><?xml version="1.0" encoding="utf-8"?>
-<p:sld xmlns:a="http://schemas.openxmlformats.org/drawingml/2006/main" xmlns:r="http://schemas.openxmlformats.org/officeDocument/2006/relationships" xmlns:p="http://schemas.openxmlformats.org/presentationml/2006/main">
-  <p:cSld>
+<p:sld xmlns:a="http://schemas.openxmlformats.org/drawingml/2006/main" xmlns:r="http://schemas.openxmlformats.org/officeDocument/2006/relationships" xmlns:p="http://schemas.openxmlformats.org/presentationml/2006/main" xmlns:m="http://schemas.openxmlformats.org/officeDocument/2006/math" xmlns:w="http://schemas.openxmlformats.org/wordprocessingml/2006/main" showMasterPhAnim="0" show="1">
+  <p:cSld name="">
     <p:spTree>
       <p:nvGrpSpPr>
-        <p:cNvPr id="1" name="">
-          <a:extLst>
-            <a:ext uri="{FF2B5EF4-FFF2-40B4-BE49-F238E27FC236}">
-              <a16:creationId xmlns:a16="http://schemas.microsoft.com/office/drawing/2014/main" id="{CF15406A-9A4D-B46F-557D-DD558AB4047E}"/>
-            </a:ext>
-          </a:extLst>
-        </p:cNvPr>
+        <p:cNvPr id="1" name=""/>
         <p:cNvGrpSpPr/>
         <p:nvPr/>
       </p:nvGrpSpPr>
-      <p:grpSpPr>
+      <p:grpSpPr bwMode="auto">
         <a:xfrm>
           <a:off x="0" y="0"/>
           <a:ext cx="0" cy="0"/>
@@ -3821,17 +3273,11 @@
       </p:grpSpPr>
       <p:sp>
         <p:nvSpPr>
-          <p:cNvPr id="108" name="TextShape 1">
-            <a:extLst>
-              <a:ext uri="{FF2B5EF4-FFF2-40B4-BE49-F238E27FC236}">
-                <a16:creationId xmlns:a16="http://schemas.microsoft.com/office/drawing/2014/main" id="{054C7E7B-08B2-5F73-4F21-D6575378008E}"/>
-              </a:ext>
-            </a:extLst>
-          </p:cNvPr>
+          <p:cNvPr id="108" name="TextShape 1"/>
           <p:cNvSpPr txBox="1"/>
           <p:nvPr/>
         </p:nvSpPr>
-        <p:spPr>
+        <p:spPr bwMode="auto">
           <a:xfrm>
             <a:off x="457200" y="0"/>
             <a:ext cx="6019560" cy="837720"/>
@@ -3854,37 +3300,32 @@
               <a:lnSpc>
                 <a:spcPct val="100000"/>
               </a:lnSpc>
-            </a:pPr>
-            <a:r>
-              <a:rPr lang="en-IN" sz="3200" dirty="0">
-                <a:latin typeface="Times New Roman" panose="02020603050405020304" pitchFamily="18" charset="0"/>
-                <a:cs typeface="Times New Roman" panose="02020603050405020304" pitchFamily="18" charset="0"/>
+              <a:defRPr/>
+            </a:pPr>
+            <a:r>
+              <a:rPr lang="en-IN" sz="3200">
+                <a:latin typeface="Times New Roman"/>
+                <a:cs typeface="Times New Roman"/>
               </a:rPr>
               <a:t>Methodology</a:t>
             </a:r>
-            <a:endParaRPr lang="en-US" sz="3200" strike="noStrike" spc="-1" dirty="0">
+            <a:endParaRPr lang="en-US" sz="3200" strike="noStrike" spc="-1">
               <a:solidFill>
                 <a:srgbClr val="000000"/>
               </a:solidFill>
-              <a:latin typeface="Times New Roman" panose="02020603050405020304" pitchFamily="18" charset="0"/>
-              <a:cs typeface="Times New Roman" panose="02020603050405020304" pitchFamily="18" charset="0"/>
-            </a:endParaRPr>
-          </a:p>
-        </p:txBody>
-      </p:sp>
-      <p:sp>
-        <p:nvSpPr>
-          <p:cNvPr id="110" name="TextShape 3">
-            <a:extLst>
-              <a:ext uri="{FF2B5EF4-FFF2-40B4-BE49-F238E27FC236}">
-                <a16:creationId xmlns:a16="http://schemas.microsoft.com/office/drawing/2014/main" id="{CC63E051-3D3A-B46E-042B-08F5C91EF530}"/>
-              </a:ext>
-            </a:extLst>
-          </p:cNvPr>
+              <a:latin typeface="Times New Roman"/>
+              <a:cs typeface="Times New Roman"/>
+            </a:endParaRPr>
+          </a:p>
+        </p:txBody>
+      </p:sp>
+      <p:sp>
+        <p:nvSpPr>
+          <p:cNvPr id="110" name="TextShape 3"/>
           <p:cNvSpPr txBox="1"/>
           <p:nvPr/>
         </p:nvSpPr>
-        <p:spPr>
+        <p:spPr bwMode="auto">
           <a:xfrm>
             <a:off x="6553080" y="6356520"/>
             <a:ext cx="2133360" cy="364680"/>
@@ -3907,6 +3348,7 @@
               <a:lnSpc>
                 <a:spcPct val="100000"/>
               </a:lnSpc>
+              <a:defRPr/>
             </a:pPr>
             <a:fld id="{4D4FEEEE-7AC5-48A9-86F4-13448BE87B58}" type="slidenum">
               <a:rPr lang="en-US" sz="1200" b="1" strike="noStrike" spc="-1">
@@ -3916,12 +3358,7 @@
                 <a:latin typeface="Calibri"/>
                 <a:ea typeface="MS PGothic"/>
               </a:rPr>
-              <a:pPr algn="r">
-                <a:lnSpc>
-                  <a:spcPct val="100000"/>
-                </a:lnSpc>
-              </a:pPr>
-              <a:t>10</a:t>
+              <a:t/>
             </a:fld>
             <a:endParaRPr lang="en-GB" sz="1200" b="0" strike="noStrike" spc="-1">
               <a:latin typeface="Times New Roman"/>
@@ -3931,17 +3368,11 @@
       </p:sp>
       <p:sp>
         <p:nvSpPr>
-          <p:cNvPr id="5" name="TextShape 2">
-            <a:extLst>
-              <a:ext uri="{FF2B5EF4-FFF2-40B4-BE49-F238E27FC236}">
-                <a16:creationId xmlns:a16="http://schemas.microsoft.com/office/drawing/2014/main" id="{33F4BF29-31DD-743A-057B-D3E4AEAAA8A2}"/>
-              </a:ext>
-            </a:extLst>
-          </p:cNvPr>
+          <p:cNvPr id="5" name="TextShape 2"/>
           <p:cNvSpPr txBox="1"/>
           <p:nvPr/>
         </p:nvSpPr>
-        <p:spPr>
+        <p:spPr bwMode="auto">
           <a:xfrm>
             <a:off x="164008" y="1109742"/>
             <a:ext cx="8903792" cy="4838571"/>
@@ -3960,113 +3391,145 @@
           </a:bodyPr>
           <a:lstStyle/>
           <a:p>
-            <a:pPr lvl="0"/>
-            <a:r>
-              <a:rPr lang="en-IN" dirty="0"/>
+            <a:pPr lvl="0">
+              <a:defRPr/>
+            </a:pPr>
+            <a:r>
+              <a:rPr lang="en-IN"/>
               <a:t>Domain Analysis:</a:t>
             </a:r>
-          </a:p>
-          <a:p>
-            <a:r>
-              <a:rPr lang="en-IN" dirty="0"/>
+            <a:endParaRPr/>
+          </a:p>
+          <a:p>
+            <a:pPr>
+              <a:defRPr/>
+            </a:pPr>
+            <a:r>
+              <a:rPr lang="en-IN"/>
               <a:t>  The system examines domain-related properties including prefix and suffix usage, the number of subdomains, SSL certificate validity, and domain registration duration. Fraudulent websites often have recently registered domains and invalid SSL certificates.</a:t>
             </a:r>
-          </a:p>
-          <a:p>
-            <a:r>
-              <a:rPr lang="en-IN" dirty="0"/>
+            <a:endParaRPr/>
+          </a:p>
+          <a:p>
+            <a:pPr>
+              <a:defRPr/>
+            </a:pPr>
+            <a:r>
+              <a:rPr lang="en-IN"/>
               <a:t> </a:t>
             </a:r>
-          </a:p>
-          <a:p>
-            <a:pPr lvl="0"/>
-            <a:r>
-              <a:rPr lang="en-IN" dirty="0"/>
+            <a:endParaRPr/>
+          </a:p>
+          <a:p>
+            <a:pPr lvl="0">
+              <a:defRPr/>
+            </a:pPr>
+            <a:r>
+              <a:rPr lang="en-IN"/>
               <a:t>Web Page Attributes:</a:t>
             </a:r>
-          </a:p>
-          <a:p>
-            <a:r>
-              <a:rPr lang="en-IN" dirty="0"/>
+            <a:endParaRPr/>
+          </a:p>
+          <a:p>
+            <a:pPr>
+              <a:defRPr/>
+            </a:pPr>
+            <a:r>
+              <a:rPr lang="en-IN"/>
               <a:t>  Features such as favicon consistency, unusual port numbers, and the presence of “https” tokens within suspicious sections of the URL are </a:t>
             </a:r>
             <a:r>
-              <a:rPr lang="en-IN" dirty="0" err="1"/>
+              <a:rPr lang="en-IN"/>
               <a:t>analyzed</a:t>
             </a:r>
             <a:r>
-              <a:rPr lang="en-IN" dirty="0"/>
+              <a:rPr lang="en-IN"/>
               <a:t> to identify deceptive </a:t>
             </a:r>
             <a:r>
-              <a:rPr lang="en-IN" dirty="0" err="1"/>
+              <a:rPr lang="en-IN"/>
               <a:t>behavior</a:t>
             </a:r>
             <a:r>
-              <a:rPr lang="en-IN" dirty="0"/>
+              <a:rPr lang="en-IN"/>
               <a:t>.</a:t>
             </a:r>
-          </a:p>
-          <a:p>
-            <a:r>
-              <a:rPr lang="en-IN" dirty="0"/>
+            <a:endParaRPr/>
+          </a:p>
+          <a:p>
+            <a:pPr>
+              <a:defRPr/>
+            </a:pPr>
+            <a:r>
+              <a:rPr lang="en-IN"/>
               <a:t> </a:t>
             </a:r>
-          </a:p>
-          <a:p>
-            <a:pPr lvl="0"/>
-            <a:r>
-              <a:rPr lang="en-IN" dirty="0"/>
+            <a:endParaRPr/>
+          </a:p>
+          <a:p>
+            <a:pPr lvl="0">
+              <a:defRPr/>
+            </a:pPr>
+            <a:r>
+              <a:rPr lang="en-IN"/>
               <a:t>Web Page Elements:</a:t>
             </a:r>
-          </a:p>
-          <a:p>
-            <a:r>
-              <a:rPr lang="en-IN" dirty="0"/>
+            <a:endParaRPr/>
+          </a:p>
+          <a:p>
+            <a:pPr>
+              <a:defRPr/>
+            </a:pPr>
+            <a:r>
+              <a:rPr lang="en-IN"/>
               <a:t>  The system evaluates webpage components including external object requests, anchor elements, and the number of links within HTML tags to detect abnormal webpage structures commonly found in phishing websites.</a:t>
             </a:r>
-          </a:p>
-          <a:p>
-            <a:r>
-              <a:rPr lang="en-IN" dirty="0"/>
+            <a:endParaRPr/>
+          </a:p>
+          <a:p>
+            <a:pPr>
+              <a:defRPr/>
+            </a:pPr>
+            <a:r>
+              <a:rPr lang="en-IN"/>
               <a:t> </a:t>
             </a:r>
-          </a:p>
-          <a:p>
-            <a:pPr lvl="0"/>
-            <a:endParaRPr lang="en-IN" dirty="0"/>
+            <a:endParaRPr/>
+          </a:p>
+          <a:p>
+            <a:pPr lvl="0">
+              <a:defRPr/>
+            </a:pPr>
+            <a:endParaRPr lang="en-IN"/>
           </a:p>
         </p:txBody>
       </p:sp>
     </p:spTree>
-    <p:extLst>
-      <p:ext uri="{BB962C8B-B14F-4D97-AF65-F5344CB8AC3E}">
-        <p14:creationId xmlns:p14="http://schemas.microsoft.com/office/powerpoint/2010/main" val="1569893795"/>
-      </p:ext>
-    </p:extLst>
   </p:cSld>
   <p:clrMapOvr>
     <a:masterClrMapping/>
   </p:clrMapOvr>
+  <mc:AlternateContent xmlns:mc="http://schemas.openxmlformats.org/markup-compatibility/2006">
+    <mc:Choice xmlns:p14="http://schemas.microsoft.com/office/powerpoint/2010/main" Requires="p14">
+      <p:transition p14:dur="2000" advClick="1"/>
+    </mc:Choice>
+    <mc:Fallback>
+      <p:transition advClick="1"/>
+    </mc:Fallback>
+  </mc:AlternateContent>
 </p:sld>
 </file>
 
 <file path=ppt/slides/slide11.xml><?xml version="1.0" encoding="utf-8"?>
-<p:sld xmlns:a="http://schemas.openxmlformats.org/drawingml/2006/main" xmlns:r="http://schemas.openxmlformats.org/officeDocument/2006/relationships" xmlns:p="http://schemas.openxmlformats.org/presentationml/2006/main">
-  <p:cSld>
+<p:sld xmlns:a="http://schemas.openxmlformats.org/drawingml/2006/main" xmlns:r="http://schemas.openxmlformats.org/officeDocument/2006/relationships" xmlns:p="http://schemas.openxmlformats.org/presentationml/2006/main" xmlns:m="http://schemas.openxmlformats.org/officeDocument/2006/math" xmlns:w="http://schemas.openxmlformats.org/wordprocessingml/2006/main" showMasterPhAnim="0" show="1">
+  <p:cSld name="">
     <p:spTree>
       <p:nvGrpSpPr>
-        <p:cNvPr id="1" name="">
-          <a:extLst>
-            <a:ext uri="{FF2B5EF4-FFF2-40B4-BE49-F238E27FC236}">
-              <a16:creationId xmlns:a16="http://schemas.microsoft.com/office/drawing/2014/main" id="{5F4FD7D6-7B4C-26CA-B71D-F74E2C8AAA2E}"/>
-            </a:ext>
-          </a:extLst>
-        </p:cNvPr>
+        <p:cNvPr id="1" name=""/>
         <p:cNvGrpSpPr/>
         <p:nvPr/>
       </p:nvGrpSpPr>
-      <p:grpSpPr>
+      <p:grpSpPr bwMode="auto">
         <a:xfrm>
           <a:off x="0" y="0"/>
           <a:ext cx="0" cy="0"/>
@@ -4076,17 +3539,11 @@
       </p:grpSpPr>
       <p:sp>
         <p:nvSpPr>
-          <p:cNvPr id="108" name="TextShape 1">
-            <a:extLst>
-              <a:ext uri="{FF2B5EF4-FFF2-40B4-BE49-F238E27FC236}">
-                <a16:creationId xmlns:a16="http://schemas.microsoft.com/office/drawing/2014/main" id="{10905861-26AA-4C9E-A883-08F7AF4305DE}"/>
-              </a:ext>
-            </a:extLst>
-          </p:cNvPr>
+          <p:cNvPr id="108" name="TextShape 1"/>
           <p:cNvSpPr txBox="1"/>
           <p:nvPr/>
         </p:nvSpPr>
-        <p:spPr>
+        <p:spPr bwMode="auto">
           <a:xfrm>
             <a:off x="457200" y="0"/>
             <a:ext cx="6019560" cy="837720"/>
@@ -4109,37 +3566,32 @@
               <a:lnSpc>
                 <a:spcPct val="100000"/>
               </a:lnSpc>
-            </a:pPr>
-            <a:r>
-              <a:rPr lang="en-IN" sz="3200" dirty="0">
-                <a:latin typeface="Times New Roman" panose="02020603050405020304" pitchFamily="18" charset="0"/>
-                <a:cs typeface="Times New Roman" panose="02020603050405020304" pitchFamily="18" charset="0"/>
+              <a:defRPr/>
+            </a:pPr>
+            <a:r>
+              <a:rPr lang="en-IN" sz="3200">
+                <a:latin typeface="Times New Roman"/>
+                <a:cs typeface="Times New Roman"/>
               </a:rPr>
               <a:t>Methodology</a:t>
             </a:r>
-            <a:endParaRPr lang="en-US" sz="3200" strike="noStrike" spc="-1" dirty="0">
+            <a:endParaRPr lang="en-US" sz="3200" strike="noStrike" spc="-1">
               <a:solidFill>
                 <a:srgbClr val="000000"/>
               </a:solidFill>
-              <a:latin typeface="Times New Roman" panose="02020603050405020304" pitchFamily="18" charset="0"/>
-              <a:cs typeface="Times New Roman" panose="02020603050405020304" pitchFamily="18" charset="0"/>
-            </a:endParaRPr>
-          </a:p>
-        </p:txBody>
-      </p:sp>
-      <p:sp>
-        <p:nvSpPr>
-          <p:cNvPr id="110" name="TextShape 3">
-            <a:extLst>
-              <a:ext uri="{FF2B5EF4-FFF2-40B4-BE49-F238E27FC236}">
-                <a16:creationId xmlns:a16="http://schemas.microsoft.com/office/drawing/2014/main" id="{61AAC42D-3842-03B7-5230-ADE64BFA35BF}"/>
-              </a:ext>
-            </a:extLst>
-          </p:cNvPr>
+              <a:latin typeface="Times New Roman"/>
+              <a:cs typeface="Times New Roman"/>
+            </a:endParaRPr>
+          </a:p>
+        </p:txBody>
+      </p:sp>
+      <p:sp>
+        <p:nvSpPr>
+          <p:cNvPr id="110" name="TextShape 3"/>
           <p:cNvSpPr txBox="1"/>
           <p:nvPr/>
         </p:nvSpPr>
-        <p:spPr>
+        <p:spPr bwMode="auto">
           <a:xfrm>
             <a:off x="6553080" y="6356520"/>
             <a:ext cx="2133360" cy="364680"/>
@@ -4162,6 +3614,7 @@
               <a:lnSpc>
                 <a:spcPct val="100000"/>
               </a:lnSpc>
+              <a:defRPr/>
             </a:pPr>
             <a:fld id="{4D4FEEEE-7AC5-48A9-86F4-13448BE87B58}" type="slidenum">
               <a:rPr lang="en-US" sz="1200" b="1" strike="noStrike" spc="-1">
@@ -4171,12 +3624,7 @@
                 <a:latin typeface="Calibri"/>
                 <a:ea typeface="MS PGothic"/>
               </a:rPr>
-              <a:pPr algn="r">
-                <a:lnSpc>
-                  <a:spcPct val="100000"/>
-                </a:lnSpc>
-              </a:pPr>
-              <a:t>11</a:t>
+              <a:t/>
             </a:fld>
             <a:endParaRPr lang="en-GB" sz="1200" b="0" strike="noStrike" spc="-1">
               <a:latin typeface="Times New Roman"/>
@@ -4186,17 +3634,11 @@
       </p:sp>
       <p:sp>
         <p:nvSpPr>
-          <p:cNvPr id="5" name="TextShape 2">
-            <a:extLst>
-              <a:ext uri="{FF2B5EF4-FFF2-40B4-BE49-F238E27FC236}">
-                <a16:creationId xmlns:a16="http://schemas.microsoft.com/office/drawing/2014/main" id="{CBE3B71F-19E6-FCBC-E8C8-5F964E2F350C}"/>
-              </a:ext>
-            </a:extLst>
-          </p:cNvPr>
+          <p:cNvPr id="5" name="TextShape 2"/>
           <p:cNvSpPr txBox="1"/>
           <p:nvPr/>
         </p:nvSpPr>
-        <p:spPr>
+        <p:spPr bwMode="auto">
           <a:xfrm>
             <a:off x="4479154" y="1243306"/>
             <a:ext cx="4407992" cy="5113214"/>
@@ -4215,80 +3657,92 @@
           </a:bodyPr>
           <a:lstStyle/>
           <a:p>
-            <a:pPr lvl="0"/>
-            <a:r>
-              <a:rPr lang="en-IN" dirty="0"/>
+            <a:pPr lvl="0">
+              <a:defRPr/>
+            </a:pPr>
+            <a:r>
+              <a:rPr lang="en-IN"/>
               <a:t>Security Indicators:</a:t>
             </a:r>
-          </a:p>
-          <a:p>
-            <a:r>
-              <a:rPr lang="en-IN" dirty="0"/>
+            <a:endParaRPr/>
+          </a:p>
+          <a:p>
+            <a:pPr>
+              <a:defRPr/>
+            </a:pPr>
+            <a:r>
+              <a:rPr lang="en-IN"/>
               <a:t>  Various security-related </a:t>
             </a:r>
             <a:r>
-              <a:rPr lang="en-IN" dirty="0" err="1"/>
+              <a:rPr lang="en-IN"/>
               <a:t>behaviors</a:t>
             </a:r>
             <a:r>
-              <a:rPr lang="en-IN" dirty="0"/>
+              <a:rPr lang="en-IN"/>
               <a:t> are </a:t>
             </a:r>
             <a:r>
-              <a:rPr lang="en-IN" dirty="0" err="1"/>
+              <a:rPr lang="en-IN"/>
               <a:t>analyzed</a:t>
             </a:r>
             <a:r>
-              <a:rPr lang="en-IN" dirty="0"/>
+              <a:rPr lang="en-IN"/>
               <a:t>, including suspicious form submission methods, email submission requirements, abnormal redirections, mouse-over effects, right-click disabling mechanisms, popup windows, and </a:t>
             </a:r>
             <a:r>
-              <a:rPr lang="en-IN" dirty="0" err="1"/>
+              <a:rPr lang="en-IN"/>
               <a:t>iframe</a:t>
             </a:r>
             <a:r>
-              <a:rPr lang="en-IN" dirty="0"/>
+              <a:rPr lang="en-IN"/>
               <a:t> usage. These indicators are frequently used by attackers to manipulate users.</a:t>
             </a:r>
-          </a:p>
-          <a:p>
-            <a:r>
-              <a:rPr lang="en-IN" dirty="0"/>
+            <a:endParaRPr/>
+          </a:p>
+          <a:p>
+            <a:pPr>
+              <a:defRPr/>
+            </a:pPr>
+            <a:r>
+              <a:rPr lang="en-IN"/>
               <a:t> </a:t>
             </a:r>
-          </a:p>
-          <a:p>
-            <a:pPr lvl="0"/>
-            <a:r>
-              <a:rPr lang="en-IN" dirty="0"/>
+            <a:endParaRPr/>
+          </a:p>
+          <a:p>
+            <a:pPr lvl="0">
+              <a:defRPr/>
+            </a:pPr>
+            <a:r>
+              <a:rPr lang="en-IN"/>
               <a:t>Domain Metrics:</a:t>
             </a:r>
-          </a:p>
-          <a:p>
-            <a:r>
-              <a:rPr lang="en-IN" dirty="0"/>
+            <a:endParaRPr/>
+          </a:p>
+          <a:p>
+            <a:pPr>
+              <a:defRPr/>
+            </a:pPr>
+            <a:r>
+              <a:rPr lang="en-IN"/>
               <a:t>  Additional domain-based metrics such as domain age, DNS record availability, estimated web traffic, Google PageRank, indexing status, external linking </a:t>
             </a:r>
             <a:r>
-              <a:rPr lang="en-IN" dirty="0" err="1"/>
+              <a:rPr lang="en-IN"/>
               <a:t>behavior</a:t>
             </a:r>
             <a:r>
-              <a:rPr lang="en-IN" dirty="0"/>
+              <a:rPr lang="en-IN"/>
               <a:t>, and statistical properties are included in the feature set to improve detection performance.</a:t>
             </a:r>
+            <a:endParaRPr/>
           </a:p>
         </p:txBody>
       </p:sp>
       <p:pic>
         <p:nvPicPr>
-          <p:cNvPr id="3" name="Picture 2">
-            <a:extLst>
-              <a:ext uri="{FF2B5EF4-FFF2-40B4-BE49-F238E27FC236}">
-                <a16:creationId xmlns:a16="http://schemas.microsoft.com/office/drawing/2014/main" id="{6B659F3A-C8A3-F081-2FAF-4503F9FC6319}"/>
-              </a:ext>
-            </a:extLst>
-          </p:cNvPr>
+          <p:cNvPr id="3" name="Picture 2"/>
           <p:cNvPicPr>
             <a:picLocks noChangeAspect="1"/>
           </p:cNvPicPr>
@@ -4296,11 +3750,9 @@
         </p:nvPicPr>
         <p:blipFill>
           <a:blip r:embed="rId2"/>
-          <a:stretch>
-            <a:fillRect/>
-          </a:stretch>
+          <a:stretch/>
         </p:blipFill>
-        <p:spPr>
+        <p:spPr bwMode="auto">
           <a:xfrm>
             <a:off x="133884" y="1542372"/>
             <a:ext cx="4191215" cy="4515082"/>
@@ -4311,34 +3763,31 @@
         </p:spPr>
       </p:pic>
     </p:spTree>
-    <p:extLst>
-      <p:ext uri="{BB962C8B-B14F-4D97-AF65-F5344CB8AC3E}">
-        <p14:creationId xmlns:p14="http://schemas.microsoft.com/office/powerpoint/2010/main" val="2805242963"/>
-      </p:ext>
-    </p:extLst>
   </p:cSld>
   <p:clrMapOvr>
     <a:masterClrMapping/>
   </p:clrMapOvr>
+  <mc:AlternateContent xmlns:mc="http://schemas.openxmlformats.org/markup-compatibility/2006">
+    <mc:Choice xmlns:p14="http://schemas.microsoft.com/office/powerpoint/2010/main" Requires="p14">
+      <p:transition p14:dur="2000" advClick="1"/>
+    </mc:Choice>
+    <mc:Fallback>
+      <p:transition advClick="1"/>
+    </mc:Fallback>
+  </mc:AlternateContent>
 </p:sld>
 </file>
 
 <file path=ppt/slides/slide12.xml><?xml version="1.0" encoding="utf-8"?>
-<p:sld xmlns:a="http://schemas.openxmlformats.org/drawingml/2006/main" xmlns:r="http://schemas.openxmlformats.org/officeDocument/2006/relationships" xmlns:p="http://schemas.openxmlformats.org/presentationml/2006/main">
-  <p:cSld>
+<p:sld xmlns:a="http://schemas.openxmlformats.org/drawingml/2006/main" xmlns:r="http://schemas.openxmlformats.org/officeDocument/2006/relationships" xmlns:p="http://schemas.openxmlformats.org/presentationml/2006/main" xmlns:m="http://schemas.openxmlformats.org/officeDocument/2006/math" xmlns:w="http://schemas.openxmlformats.org/wordprocessingml/2006/main" showMasterPhAnim="0" show="1">
+  <p:cSld name="">
     <p:spTree>
       <p:nvGrpSpPr>
-        <p:cNvPr id="1" name="">
-          <a:extLst>
-            <a:ext uri="{FF2B5EF4-FFF2-40B4-BE49-F238E27FC236}">
-              <a16:creationId xmlns:a16="http://schemas.microsoft.com/office/drawing/2014/main" id="{D733D156-D000-6BC9-3F1F-65916F6CC585}"/>
-            </a:ext>
-          </a:extLst>
-        </p:cNvPr>
+        <p:cNvPr id="1" name=""/>
         <p:cNvGrpSpPr/>
         <p:nvPr/>
       </p:nvGrpSpPr>
-      <p:grpSpPr>
+      <p:grpSpPr bwMode="auto">
         <a:xfrm>
           <a:off x="0" y="0"/>
           <a:ext cx="0" cy="0"/>
@@ -4348,17 +3797,11 @@
       </p:grpSpPr>
       <p:sp>
         <p:nvSpPr>
-          <p:cNvPr id="108" name="TextShape 1">
-            <a:extLst>
-              <a:ext uri="{FF2B5EF4-FFF2-40B4-BE49-F238E27FC236}">
-                <a16:creationId xmlns:a16="http://schemas.microsoft.com/office/drawing/2014/main" id="{52746295-D6C1-245F-8539-A4EB0864E5D5}"/>
-              </a:ext>
-            </a:extLst>
-          </p:cNvPr>
+          <p:cNvPr id="108" name="TextShape 1"/>
           <p:cNvSpPr txBox="1"/>
           <p:nvPr/>
         </p:nvSpPr>
-        <p:spPr>
+        <p:spPr bwMode="auto">
           <a:xfrm>
             <a:off x="457200" y="0"/>
             <a:ext cx="6019560" cy="837720"/>
@@ -4381,37 +3824,32 @@
               <a:lnSpc>
                 <a:spcPct val="100000"/>
               </a:lnSpc>
-            </a:pPr>
-            <a:r>
-              <a:rPr lang="en-IN" sz="3200" dirty="0">
-                <a:latin typeface="Times New Roman" panose="02020603050405020304" pitchFamily="18" charset="0"/>
-                <a:cs typeface="Times New Roman" panose="02020603050405020304" pitchFamily="18" charset="0"/>
+              <a:defRPr/>
+            </a:pPr>
+            <a:r>
+              <a:rPr lang="en-IN" sz="3200">
+                <a:latin typeface="Times New Roman"/>
+                <a:cs typeface="Times New Roman"/>
               </a:rPr>
               <a:t>Methodology</a:t>
             </a:r>
-            <a:endParaRPr lang="en-US" sz="3200" strike="noStrike" spc="-1" dirty="0">
+            <a:endParaRPr lang="en-US" sz="3200" strike="noStrike" spc="-1">
               <a:solidFill>
                 <a:srgbClr val="000000"/>
               </a:solidFill>
-              <a:latin typeface="Times New Roman" panose="02020603050405020304" pitchFamily="18" charset="0"/>
-              <a:cs typeface="Times New Roman" panose="02020603050405020304" pitchFamily="18" charset="0"/>
-            </a:endParaRPr>
-          </a:p>
-        </p:txBody>
-      </p:sp>
-      <p:sp>
-        <p:nvSpPr>
-          <p:cNvPr id="110" name="TextShape 3">
-            <a:extLst>
-              <a:ext uri="{FF2B5EF4-FFF2-40B4-BE49-F238E27FC236}">
-                <a16:creationId xmlns:a16="http://schemas.microsoft.com/office/drawing/2014/main" id="{8B431FE5-914C-2A42-3F12-4AB867929666}"/>
-              </a:ext>
-            </a:extLst>
-          </p:cNvPr>
+              <a:latin typeface="Times New Roman"/>
+              <a:cs typeface="Times New Roman"/>
+            </a:endParaRPr>
+          </a:p>
+        </p:txBody>
+      </p:sp>
+      <p:sp>
+        <p:nvSpPr>
+          <p:cNvPr id="110" name="TextShape 3"/>
           <p:cNvSpPr txBox="1"/>
           <p:nvPr/>
         </p:nvSpPr>
-        <p:spPr>
+        <p:spPr bwMode="auto">
           <a:xfrm>
             <a:off x="6553080" y="6356520"/>
             <a:ext cx="2133360" cy="364680"/>
@@ -4434,6 +3872,7 @@
               <a:lnSpc>
                 <a:spcPct val="100000"/>
               </a:lnSpc>
+              <a:defRPr/>
             </a:pPr>
             <a:fld id="{4D4FEEEE-7AC5-48A9-86F4-13448BE87B58}" type="slidenum">
               <a:rPr lang="en-US" sz="1200" b="1" strike="noStrike" spc="-1">
@@ -4443,12 +3882,7 @@
                 <a:latin typeface="Calibri"/>
                 <a:ea typeface="MS PGothic"/>
               </a:rPr>
-              <a:pPr algn="r">
-                <a:lnSpc>
-                  <a:spcPct val="100000"/>
-                </a:lnSpc>
-              </a:pPr>
-              <a:t>12</a:t>
+              <a:t/>
             </a:fld>
             <a:endParaRPr lang="en-GB" sz="1200" b="0" strike="noStrike" spc="-1">
               <a:latin typeface="Times New Roman"/>
@@ -4458,17 +3892,11 @@
       </p:sp>
       <p:sp>
         <p:nvSpPr>
-          <p:cNvPr id="5" name="TextShape 2">
-            <a:extLst>
-              <a:ext uri="{FF2B5EF4-FFF2-40B4-BE49-F238E27FC236}">
-                <a16:creationId xmlns:a16="http://schemas.microsoft.com/office/drawing/2014/main" id="{1886DE38-364E-C57D-3B7C-0BAF3501DEEF}"/>
-              </a:ext>
-            </a:extLst>
-          </p:cNvPr>
+          <p:cNvPr id="5" name="TextShape 2"/>
           <p:cNvSpPr txBox="1"/>
           <p:nvPr/>
         </p:nvSpPr>
-        <p:spPr>
+        <p:spPr bwMode="auto">
           <a:xfrm>
             <a:off x="120104" y="837720"/>
             <a:ext cx="8903792" cy="4838571"/>
@@ -4487,119 +3915,143 @@
           </a:bodyPr>
           <a:lstStyle/>
           <a:p>
-            <a:r>
-              <a:rPr lang="en-IN" b="1" dirty="0"/>
+            <a:pPr>
+              <a:defRPr/>
+            </a:pPr>
+            <a:r>
+              <a:rPr lang="en-IN" b="1"/>
               <a:t>Prediction Using </a:t>
             </a:r>
             <a:r>
-              <a:rPr lang="en-IN" b="1" dirty="0" err="1"/>
+              <a:rPr lang="en-IN" b="1"/>
               <a:t>RandomForest</a:t>
             </a:r>
             <a:r>
-              <a:rPr lang="en-IN" b="1" dirty="0"/>
+              <a:rPr lang="en-IN" b="1"/>
               <a:t>:</a:t>
             </a:r>
-            <a:endParaRPr lang="en-IN" dirty="0"/>
-          </a:p>
-          <a:p>
-            <a:r>
-              <a:rPr lang="en-IN" dirty="0"/>
+            <a:endParaRPr lang="en-IN"/>
+          </a:p>
+          <a:p>
+            <a:pPr>
+              <a:defRPr/>
+            </a:pPr>
+            <a:r>
+              <a:rPr lang="en-IN"/>
               <a:t> </a:t>
             </a:r>
-          </a:p>
-          <a:p>
-            <a:r>
-              <a:rPr lang="en-IN" dirty="0"/>
+            <a:endParaRPr/>
+          </a:p>
+          <a:p>
+            <a:pPr>
+              <a:defRPr/>
+            </a:pPr>
+            <a:r>
+              <a:rPr lang="en-IN"/>
               <a:t>The </a:t>
             </a:r>
             <a:r>
-              <a:rPr lang="en-IN" dirty="0" err="1"/>
+              <a:rPr lang="en-IN"/>
               <a:t>RandomForest</a:t>
             </a:r>
             <a:r>
-              <a:rPr lang="en-IN" dirty="0"/>
+              <a:rPr lang="en-IN"/>
               <a:t> classifier implemented in this project is trained using a feature vector containing 32 extracted URL features. </a:t>
             </a:r>
             <a:r>
-              <a:rPr lang="en-IN" dirty="0" err="1"/>
+              <a:rPr lang="en-IN"/>
               <a:t>RandomForest</a:t>
             </a:r>
             <a:r>
-              <a:rPr lang="en-IN" dirty="0"/>
+              <a:rPr lang="en-IN"/>
               <a:t> is an ensemble machine learning algorithm that constructs multiple decision trees during the training process. Each decision tree is trained using a randomly selected subset of training samples and feature subsets, enabling the model to capture diverse decision patterns.</a:t>
             </a:r>
-          </a:p>
-          <a:p>
-            <a:r>
-              <a:rPr lang="en-IN" dirty="0"/>
+            <a:endParaRPr/>
+          </a:p>
+          <a:p>
+            <a:pPr>
+              <a:defRPr/>
+            </a:pPr>
+            <a:r>
+              <a:rPr lang="en-IN"/>
               <a:t> </a:t>
             </a:r>
-          </a:p>
-          <a:p>
-            <a:r>
-              <a:rPr lang="en-IN" dirty="0"/>
+            <a:endParaRPr/>
+          </a:p>
+          <a:p>
+            <a:pPr>
+              <a:defRPr/>
+            </a:pPr>
+            <a:r>
+              <a:rPr lang="en-IN"/>
               <a:t>During the prediction phase, every decision tree independently classifies the input URL as either phishing or legitimate. The final classification result is determined through a majority voting mechanism among all decision trees. This ensemble approach significantly improves prediction accuracy, reduces the risk of overfitting, and enhances the model’s ability to generalize across unseen phishing patterns.</a:t>
             </a:r>
-          </a:p>
-          <a:p>
-            <a:r>
-              <a:rPr lang="en-IN" dirty="0"/>
+            <a:endParaRPr/>
+          </a:p>
+          <a:p>
+            <a:pPr>
+              <a:defRPr/>
+            </a:pPr>
+            <a:r>
+              <a:rPr lang="en-IN"/>
               <a:t> </a:t>
             </a:r>
-          </a:p>
-          <a:p>
-            <a:r>
-              <a:rPr lang="en-IN" dirty="0"/>
+            <a:endParaRPr/>
+          </a:p>
+          <a:p>
+            <a:pPr>
+              <a:defRPr/>
+            </a:pPr>
+            <a:r>
+              <a:rPr lang="en-IN"/>
               <a:t>One of the major advantages of </a:t>
             </a:r>
             <a:r>
-              <a:rPr lang="en-IN" dirty="0" err="1"/>
+              <a:rPr lang="en-IN"/>
               <a:t>RandomForest</a:t>
             </a:r>
             <a:r>
-              <a:rPr lang="en-IN" dirty="0"/>
+              <a:rPr lang="en-IN"/>
               <a:t> is its capability to identify the importance of different features contributing to phishing detection. This helps in understanding which URL characteristics are most influential in distinguishing malicious websites from legitimate ones. By combining comprehensive feature extraction with the ensemble learning strength of </a:t>
             </a:r>
             <a:r>
-              <a:rPr lang="en-IN" dirty="0" err="1"/>
+              <a:rPr lang="en-IN"/>
               <a:t>RandomForest</a:t>
             </a:r>
             <a:r>
-              <a:rPr lang="en-IN" dirty="0"/>
+              <a:rPr lang="en-IN"/>
               <a:t>, this project delivers a reliable and efficient phishing URL detection system capable of enhancing cybersecurity and protecting users from online threats.</a:t>
             </a:r>
+            <a:endParaRPr/>
           </a:p>
         </p:txBody>
       </p:sp>
     </p:spTree>
-    <p:extLst>
-      <p:ext uri="{BB962C8B-B14F-4D97-AF65-F5344CB8AC3E}">
-        <p14:creationId xmlns:p14="http://schemas.microsoft.com/office/powerpoint/2010/main" val="2412212923"/>
-      </p:ext>
-    </p:extLst>
   </p:cSld>
   <p:clrMapOvr>
     <a:masterClrMapping/>
   </p:clrMapOvr>
+  <mc:AlternateContent xmlns:mc="http://schemas.openxmlformats.org/markup-compatibility/2006">
+    <mc:Choice xmlns:p14="http://schemas.microsoft.com/office/powerpoint/2010/main" Requires="p14">
+      <p:transition p14:dur="2000" advClick="1"/>
+    </mc:Choice>
+    <mc:Fallback>
+      <p:transition advClick="1"/>
+    </mc:Fallback>
+  </mc:AlternateContent>
 </p:sld>
 </file>
 
 <file path=ppt/slides/slide13.xml><?xml version="1.0" encoding="utf-8"?>
-<p:sld xmlns:a="http://schemas.openxmlformats.org/drawingml/2006/main" xmlns:r="http://schemas.openxmlformats.org/officeDocument/2006/relationships" xmlns:p="http://schemas.openxmlformats.org/presentationml/2006/main">
-  <p:cSld>
+<p:sld xmlns:a="http://schemas.openxmlformats.org/drawingml/2006/main" xmlns:r="http://schemas.openxmlformats.org/officeDocument/2006/relationships" xmlns:p="http://schemas.openxmlformats.org/presentationml/2006/main" xmlns:m="http://schemas.openxmlformats.org/officeDocument/2006/math" xmlns:w="http://schemas.openxmlformats.org/wordprocessingml/2006/main" showMasterPhAnim="0" show="1">
+  <p:cSld name="">
     <p:spTree>
       <p:nvGrpSpPr>
-        <p:cNvPr id="1" name="">
-          <a:extLst>
-            <a:ext uri="{FF2B5EF4-FFF2-40B4-BE49-F238E27FC236}">
-              <a16:creationId xmlns:a16="http://schemas.microsoft.com/office/drawing/2014/main" id="{C4C5C001-0A4C-DC07-4182-B388E3A65074}"/>
-            </a:ext>
-          </a:extLst>
-        </p:cNvPr>
+        <p:cNvPr id="1" name=""/>
         <p:cNvGrpSpPr/>
         <p:nvPr/>
       </p:nvGrpSpPr>
-      <p:grpSpPr>
+      <p:grpSpPr bwMode="auto">
         <a:xfrm>
           <a:off x="0" y="0"/>
           <a:ext cx="0" cy="0"/>
@@ -4609,17 +4061,11 @@
       </p:grpSpPr>
       <p:sp>
         <p:nvSpPr>
-          <p:cNvPr id="108" name="TextShape 1">
-            <a:extLst>
-              <a:ext uri="{FF2B5EF4-FFF2-40B4-BE49-F238E27FC236}">
-                <a16:creationId xmlns:a16="http://schemas.microsoft.com/office/drawing/2014/main" id="{B0148BD4-0B81-B0FB-5B96-DC6618B65437}"/>
-              </a:ext>
-            </a:extLst>
-          </p:cNvPr>
+          <p:cNvPr id="108" name="TextShape 1"/>
           <p:cNvSpPr txBox="1"/>
           <p:nvPr/>
         </p:nvSpPr>
-        <p:spPr>
+        <p:spPr bwMode="auto">
           <a:xfrm>
             <a:off x="457200" y="0"/>
             <a:ext cx="6019560" cy="837720"/>
@@ -4638,30 +4084,27 @@
           </a:bodyPr>
           <a:lstStyle/>
           <a:p>
-            <a:pPr algn="ctr"/>
-            <a:r>
-              <a:rPr lang="en-IN" sz="3200" dirty="0">
-                <a:latin typeface="Times New Roman" panose="02020603050405020304" pitchFamily="18" charset="0"/>
-                <a:cs typeface="Times New Roman" panose="02020603050405020304" pitchFamily="18" charset="0"/>
+            <a:pPr algn="ctr">
+              <a:defRPr/>
+            </a:pPr>
+            <a:r>
+              <a:rPr lang="en-IN" sz="3200">
+                <a:latin typeface="Times New Roman"/>
+                <a:cs typeface="Times New Roman"/>
               </a:rPr>
               <a:t>Methodology</a:t>
             </a:r>
-          </a:p>
-        </p:txBody>
-      </p:sp>
-      <p:sp>
-        <p:nvSpPr>
-          <p:cNvPr id="110" name="TextShape 3">
-            <a:extLst>
-              <a:ext uri="{FF2B5EF4-FFF2-40B4-BE49-F238E27FC236}">
-                <a16:creationId xmlns:a16="http://schemas.microsoft.com/office/drawing/2014/main" id="{964AB1AF-5109-D6DE-EA94-F26C58F6AE3B}"/>
-              </a:ext>
-            </a:extLst>
-          </p:cNvPr>
+            <a:endParaRPr/>
+          </a:p>
+        </p:txBody>
+      </p:sp>
+      <p:sp>
+        <p:nvSpPr>
+          <p:cNvPr id="110" name="TextShape 3"/>
           <p:cNvSpPr txBox="1"/>
           <p:nvPr/>
         </p:nvSpPr>
-        <p:spPr>
+        <p:spPr bwMode="auto">
           <a:xfrm>
             <a:off x="6553080" y="6356520"/>
             <a:ext cx="2133360" cy="364680"/>
@@ -4684,6 +4127,7 @@
               <a:lnSpc>
                 <a:spcPct val="100000"/>
               </a:lnSpc>
+              <a:defRPr/>
             </a:pPr>
             <a:fld id="{4D4FEEEE-7AC5-48A9-86F4-13448BE87B58}" type="slidenum">
               <a:rPr lang="en-US" sz="1200" b="1" strike="noStrike" spc="-1">
@@ -4693,12 +4137,7 @@
                 <a:latin typeface="Calibri"/>
                 <a:ea typeface="MS PGothic"/>
               </a:rPr>
-              <a:pPr algn="r">
-                <a:lnSpc>
-                  <a:spcPct val="100000"/>
-                </a:lnSpc>
-              </a:pPr>
-              <a:t>13</a:t>
+              <a:t/>
             </a:fld>
             <a:endParaRPr lang="en-GB" sz="1200" b="0" strike="noStrike" spc="-1">
               <a:latin typeface="Times New Roman"/>
@@ -4708,17 +4147,11 @@
       </p:sp>
       <p:sp>
         <p:nvSpPr>
-          <p:cNvPr id="5" name="TextShape 2">
-            <a:extLst>
-              <a:ext uri="{FF2B5EF4-FFF2-40B4-BE49-F238E27FC236}">
-                <a16:creationId xmlns:a16="http://schemas.microsoft.com/office/drawing/2014/main" id="{CE5736DC-34E4-C961-6DAD-6B02EE12BEBF}"/>
-              </a:ext>
-            </a:extLst>
-          </p:cNvPr>
+          <p:cNvPr id="5" name="TextShape 2"/>
           <p:cNvSpPr txBox="1"/>
           <p:nvPr/>
         </p:nvSpPr>
-        <p:spPr>
+        <p:spPr bwMode="auto">
           <a:xfrm>
             <a:off x="164008" y="1109742"/>
             <a:ext cx="8903792" cy="4838571"/>
@@ -4737,69 +4170,91 @@
           </a:bodyPr>
           <a:lstStyle/>
           <a:p>
-            <a:r>
-              <a:rPr lang="en-IN" b="1" dirty="0"/>
+            <a:pPr>
+              <a:defRPr/>
+            </a:pPr>
+            <a:r>
+              <a:rPr lang="en-IN" b="1"/>
               <a:t>Graphical User Interface (GUI) for URL Classification:</a:t>
             </a:r>
-            <a:endParaRPr lang="en-IN" dirty="0"/>
-          </a:p>
-          <a:p>
-            <a:r>
-              <a:rPr lang="en-IN" dirty="0"/>
+            <a:endParaRPr lang="en-IN"/>
+          </a:p>
+          <a:p>
+            <a:pPr>
+              <a:defRPr/>
+            </a:pPr>
+            <a:r>
+              <a:rPr lang="en-IN"/>
               <a:t> </a:t>
             </a:r>
-          </a:p>
-          <a:p>
-            <a:r>
-              <a:rPr lang="en-IN" dirty="0"/>
+            <a:endParaRPr/>
+          </a:p>
+          <a:p>
+            <a:pPr>
+              <a:defRPr/>
+            </a:pPr>
+            <a:r>
+              <a:rPr lang="en-IN"/>
               <a:t>To improve usability and accessibility, a user-friendly Graphical User Interface (GUI) has been developed as part of this project. The GUI provides an intuitive platform where users can easily enter any URL they wish to verify. Once the URL is submitted, the system automatically processes it through the feature extraction pipeline and applies the trained </a:t>
             </a:r>
             <a:r>
-              <a:rPr lang="en-IN" dirty="0" err="1"/>
+              <a:rPr lang="en-IN"/>
               <a:t>RandomForest</a:t>
             </a:r>
             <a:r>
-              <a:rPr lang="en-IN" dirty="0"/>
+              <a:rPr lang="en-IN"/>
               <a:t> classifier to determine whether the URL is legitimate or phishing.</a:t>
             </a:r>
-          </a:p>
-          <a:p>
-            <a:r>
-              <a:rPr lang="en-IN" dirty="0"/>
+            <a:endParaRPr/>
+          </a:p>
+          <a:p>
+            <a:pPr>
+              <a:defRPr/>
+            </a:pPr>
+            <a:r>
+              <a:rPr lang="en-IN"/>
               <a:t> </a:t>
             </a:r>
-          </a:p>
-          <a:p>
-            <a:r>
-              <a:rPr lang="en-IN" dirty="0"/>
+            <a:endParaRPr/>
+          </a:p>
+          <a:p>
+            <a:pPr>
+              <a:defRPr/>
+            </a:pPr>
+            <a:r>
+              <a:rPr lang="en-IN"/>
               <a:t>The interface provides immediate feedback to users, allowing them to quickly understand the security status of the entered URL. This interactive system simplifies the URL verification process and enables users to make informed decisions regarding online safety. The GUI enhances the practical usability of the phishing detection system by offering a seamless and accessible user experience.</a:t>
             </a:r>
+            <a:endParaRPr/>
           </a:p>
         </p:txBody>
       </p:sp>
     </p:spTree>
-    <p:extLst>
-      <p:ext uri="{BB962C8B-B14F-4D97-AF65-F5344CB8AC3E}">
-        <p14:creationId xmlns:p14="http://schemas.microsoft.com/office/powerpoint/2010/main" val="3557228847"/>
-      </p:ext>
-    </p:extLst>
   </p:cSld>
   <p:clrMapOvr>
     <a:masterClrMapping/>
   </p:clrMapOvr>
+  <mc:AlternateContent xmlns:mc="http://schemas.openxmlformats.org/markup-compatibility/2006">
+    <mc:Choice xmlns:p14="http://schemas.microsoft.com/office/powerpoint/2010/main" Requires="p14">
+      <p:transition p14:dur="2000" advClick="1"/>
+    </mc:Choice>
+    <mc:Fallback>
+      <p:transition advClick="1"/>
+    </mc:Fallback>
+  </mc:AlternateContent>
 </p:sld>
 </file>
 
 <file path=ppt/slides/slide14.xml><?xml version="1.0" encoding="utf-8"?>
-<p:sld xmlns:a="http://schemas.openxmlformats.org/drawingml/2006/main" xmlns:r="http://schemas.openxmlformats.org/officeDocument/2006/relationships" xmlns:p="http://schemas.openxmlformats.org/presentationml/2006/main">
-  <p:cSld>
+<p:sld xmlns:a="http://schemas.openxmlformats.org/drawingml/2006/main" xmlns:r="http://schemas.openxmlformats.org/officeDocument/2006/relationships" xmlns:p="http://schemas.openxmlformats.org/presentationml/2006/main" xmlns:m="http://schemas.openxmlformats.org/officeDocument/2006/math" xmlns:w="http://schemas.openxmlformats.org/wordprocessingml/2006/main" showMasterPhAnim="0" show="1">
+  <p:cSld name="">
     <p:spTree>
       <p:nvGrpSpPr>
         <p:cNvPr id="1" name=""/>
         <p:cNvGrpSpPr/>
         <p:nvPr/>
       </p:nvGrpSpPr>
-      <p:grpSpPr>
+      <p:grpSpPr bwMode="auto">
         <a:xfrm>
           <a:off x="0" y="0"/>
           <a:ext cx="0" cy="0"/>
@@ -4809,23 +4264,15 @@
       </p:grpSpPr>
       <p:pic>
         <p:nvPicPr>
-          <p:cNvPr id="2" name="Picture 1">
-            <a:extLst>
-              <a:ext uri="{FF2B5EF4-FFF2-40B4-BE49-F238E27FC236}">
-                <a16:creationId xmlns:a16="http://schemas.microsoft.com/office/drawing/2014/main" id="{AFD913F9-FC45-2A48-F1C3-97C198D41708}"/>
-              </a:ext>
-            </a:extLst>
-          </p:cNvPr>
+          <p:cNvPr id="2" name="Picture 1"/>
           <p:cNvPicPr/>
           <p:nvPr/>
         </p:nvPicPr>
         <p:blipFill>
           <a:blip r:embed="rId2"/>
-          <a:stretch>
-            <a:fillRect/>
-          </a:stretch>
+          <a:stretch/>
         </p:blipFill>
-        <p:spPr>
+        <p:spPr bwMode="auto">
           <a:xfrm>
             <a:off x="1571625" y="938159"/>
             <a:ext cx="6000750" cy="1714500"/>
@@ -4837,26 +4284,18 @@
       </p:pic>
       <p:pic>
         <p:nvPicPr>
-          <p:cNvPr id="3" name="Picture 2">
-            <a:extLst>
-              <a:ext uri="{FF2B5EF4-FFF2-40B4-BE49-F238E27FC236}">
-                <a16:creationId xmlns:a16="http://schemas.microsoft.com/office/drawing/2014/main" id="{244AD044-9A28-4DF2-4D0B-26BCE0581CFB}"/>
-              </a:ext>
-            </a:extLst>
-          </p:cNvPr>
+          <p:cNvPr id="3" name="Picture 2"/>
           <p:cNvPicPr/>
           <p:nvPr/>
         </p:nvPicPr>
         <p:blipFill>
           <a:blip r:embed="rId3"/>
-          <a:stretch>
-            <a:fillRect/>
-          </a:stretch>
+          <a:stretch/>
         </p:blipFill>
-        <p:spPr>
+        <p:spPr bwMode="auto">
           <a:xfrm>
             <a:off x="1571625" y="2755400"/>
-            <a:ext cx="6000750" cy="1752600"/>
+            <a:ext cx="6000750" cy="1752599"/>
           </a:xfrm>
           <a:prstGeom prst="rect">
             <a:avLst/>
@@ -4865,23 +4304,15 @@
       </p:pic>
       <p:pic>
         <p:nvPicPr>
-          <p:cNvPr id="4" name="Picture 3">
-            <a:extLst>
-              <a:ext uri="{FF2B5EF4-FFF2-40B4-BE49-F238E27FC236}">
-                <a16:creationId xmlns:a16="http://schemas.microsoft.com/office/drawing/2014/main" id="{059D50E4-5603-570E-D4FD-C3D0AD69B077}"/>
-              </a:ext>
-            </a:extLst>
-          </p:cNvPr>
+          <p:cNvPr id="4" name="Picture 3"/>
           <p:cNvPicPr/>
           <p:nvPr/>
         </p:nvPicPr>
         <p:blipFill>
           <a:blip r:embed="rId4"/>
-          <a:stretch>
-            <a:fillRect/>
-          </a:stretch>
+          <a:stretch/>
         </p:blipFill>
-        <p:spPr>
+        <p:spPr bwMode="auto">
           <a:xfrm>
             <a:off x="1571625" y="4610741"/>
             <a:ext cx="6019165" cy="1805940"/>
@@ -4892,28 +4323,31 @@
         </p:spPr>
       </p:pic>
     </p:spTree>
-    <p:extLst>
-      <p:ext uri="{BB962C8B-B14F-4D97-AF65-F5344CB8AC3E}">
-        <p14:creationId xmlns:p14="http://schemas.microsoft.com/office/powerpoint/2010/main" val="665400926"/>
-      </p:ext>
-    </p:extLst>
   </p:cSld>
   <p:clrMapOvr>
     <a:masterClrMapping/>
   </p:clrMapOvr>
+  <mc:AlternateContent xmlns:mc="http://schemas.openxmlformats.org/markup-compatibility/2006">
+    <mc:Choice xmlns:p14="http://schemas.microsoft.com/office/powerpoint/2010/main" Requires="p14">
+      <p:transition p14:dur="2000" advClick="1"/>
+    </mc:Choice>
+    <mc:Fallback>
+      <p:transition advClick="1"/>
+    </mc:Fallback>
+  </mc:AlternateContent>
 </p:sld>
 </file>
 
 <file path=ppt/slides/slide15.xml><?xml version="1.0" encoding="utf-8"?>
-<p:sld xmlns:a="http://schemas.openxmlformats.org/drawingml/2006/main" xmlns:r="http://schemas.openxmlformats.org/officeDocument/2006/relationships" xmlns:p="http://schemas.openxmlformats.org/presentationml/2006/main">
-  <p:cSld>
+<p:sld xmlns:a="http://schemas.openxmlformats.org/drawingml/2006/main" xmlns:r="http://schemas.openxmlformats.org/officeDocument/2006/relationships" xmlns:p="http://schemas.openxmlformats.org/presentationml/2006/main" xmlns:m="http://schemas.openxmlformats.org/officeDocument/2006/math" xmlns:w="http://schemas.openxmlformats.org/wordprocessingml/2006/main" showMasterPhAnim="0" show="1">
+  <p:cSld name="">
     <p:spTree>
       <p:nvGrpSpPr>
         <p:cNvPr id="1" name=""/>
         <p:cNvGrpSpPr/>
         <p:nvPr/>
       </p:nvGrpSpPr>
-      <p:grpSpPr>
+      <p:grpSpPr bwMode="auto">
         <a:xfrm>
           <a:off x="0" y="0"/>
           <a:ext cx="0" cy="0"/>
@@ -4923,13 +4357,7 @@
       </p:grpSpPr>
       <p:pic>
         <p:nvPicPr>
-          <p:cNvPr id="3" name="Picture 2">
-            <a:extLst>
-              <a:ext uri="{FF2B5EF4-FFF2-40B4-BE49-F238E27FC236}">
-                <a16:creationId xmlns:a16="http://schemas.microsoft.com/office/drawing/2014/main" id="{9AD96713-82FD-DEAC-B70F-8ED760BF7FBC}"/>
-              </a:ext>
-            </a:extLst>
-          </p:cNvPr>
+          <p:cNvPr id="3" name="Picture 2"/>
           <p:cNvPicPr>
             <a:picLocks noChangeAspect="1"/>
           </p:cNvPicPr>
@@ -4937,14 +4365,12 @@
         </p:nvPicPr>
         <p:blipFill>
           <a:blip r:embed="rId2"/>
-          <a:stretch>
-            <a:fillRect/>
-          </a:stretch>
+          <a:stretch/>
         </p:blipFill>
-        <p:spPr>
+        <p:spPr bwMode="auto">
           <a:xfrm>
             <a:off x="219741" y="1087480"/>
-            <a:ext cx="4053484" cy="3083828"/>
+            <a:ext cx="4053484" cy="3083827"/>
           </a:xfrm>
           <a:prstGeom prst="rect">
             <a:avLst/>
@@ -4953,13 +4379,7 @@
       </p:pic>
       <p:pic>
         <p:nvPicPr>
-          <p:cNvPr id="5" name="Picture 4">
-            <a:extLst>
-              <a:ext uri="{FF2B5EF4-FFF2-40B4-BE49-F238E27FC236}">
-                <a16:creationId xmlns:a16="http://schemas.microsoft.com/office/drawing/2014/main" id="{BD34CA22-6907-906A-4BCE-8EF24FEC98CC}"/>
-              </a:ext>
-            </a:extLst>
-          </p:cNvPr>
+          <p:cNvPr id="5" name="Picture 4"/>
           <p:cNvPicPr>
             <a:picLocks noChangeAspect="1"/>
           </p:cNvPicPr>
@@ -4967,11 +4387,9 @@
         </p:nvPicPr>
         <p:blipFill>
           <a:blip r:embed="rId3"/>
-          <a:stretch>
-            <a:fillRect/>
-          </a:stretch>
+          <a:stretch/>
         </p:blipFill>
-        <p:spPr>
+        <p:spPr bwMode="auto">
           <a:xfrm>
             <a:off x="4456707" y="3532677"/>
             <a:ext cx="4467552" cy="2590593"/>
@@ -4982,34 +4400,31 @@
         </p:spPr>
       </p:pic>
     </p:spTree>
-    <p:extLst>
-      <p:ext uri="{BB962C8B-B14F-4D97-AF65-F5344CB8AC3E}">
-        <p14:creationId xmlns:p14="http://schemas.microsoft.com/office/powerpoint/2010/main" val="3126227329"/>
-      </p:ext>
-    </p:extLst>
   </p:cSld>
   <p:clrMapOvr>
     <a:masterClrMapping/>
   </p:clrMapOvr>
+  <mc:AlternateContent xmlns:mc="http://schemas.openxmlformats.org/markup-compatibility/2006">
+    <mc:Choice xmlns:p14="http://schemas.microsoft.com/office/powerpoint/2010/main" Requires="p14">
+      <p:transition p14:dur="2000" advClick="1"/>
+    </mc:Choice>
+    <mc:Fallback>
+      <p:transition advClick="1"/>
+    </mc:Fallback>
+  </mc:AlternateContent>
 </p:sld>
 </file>
 
 <file path=ppt/slides/slide16.xml><?xml version="1.0" encoding="utf-8"?>
-<p:sld xmlns:a="http://schemas.openxmlformats.org/drawingml/2006/main" xmlns:r="http://schemas.openxmlformats.org/officeDocument/2006/relationships" xmlns:p="http://schemas.openxmlformats.org/presentationml/2006/main">
-  <p:cSld>
+<p:sld xmlns:a="http://schemas.openxmlformats.org/drawingml/2006/main" xmlns:r="http://schemas.openxmlformats.org/officeDocument/2006/relationships" xmlns:p="http://schemas.openxmlformats.org/presentationml/2006/main" xmlns:m="http://schemas.openxmlformats.org/officeDocument/2006/math" xmlns:w="http://schemas.openxmlformats.org/wordprocessingml/2006/main" showMasterPhAnim="0" show="1">
+  <p:cSld name="">
     <p:spTree>
       <p:nvGrpSpPr>
-        <p:cNvPr id="1" name="">
-          <a:extLst>
-            <a:ext uri="{FF2B5EF4-FFF2-40B4-BE49-F238E27FC236}">
-              <a16:creationId xmlns:a16="http://schemas.microsoft.com/office/drawing/2014/main" id="{307634F2-E4BF-B881-EC3D-903E038AADD6}"/>
-            </a:ext>
-          </a:extLst>
-        </p:cNvPr>
+        <p:cNvPr id="1" name=""/>
         <p:cNvGrpSpPr/>
         <p:nvPr/>
       </p:nvGrpSpPr>
-      <p:grpSpPr>
+      <p:grpSpPr bwMode="auto">
         <a:xfrm>
           <a:off x="0" y="0"/>
           <a:ext cx="0" cy="0"/>
@@ -5019,17 +4434,11 @@
       </p:grpSpPr>
       <p:sp>
         <p:nvSpPr>
-          <p:cNvPr id="108" name="TextShape 1">
-            <a:extLst>
-              <a:ext uri="{FF2B5EF4-FFF2-40B4-BE49-F238E27FC236}">
-                <a16:creationId xmlns:a16="http://schemas.microsoft.com/office/drawing/2014/main" id="{424F1F96-FA53-9FE2-B3D7-876B78B4AF43}"/>
-              </a:ext>
-            </a:extLst>
-          </p:cNvPr>
+          <p:cNvPr id="108" name="TextShape 1"/>
           <p:cNvSpPr txBox="1"/>
           <p:nvPr/>
         </p:nvSpPr>
-        <p:spPr>
+        <p:spPr bwMode="auto">
           <a:xfrm>
             <a:off x="457200" y="0"/>
             <a:ext cx="6019560" cy="837720"/>
@@ -5048,30 +4457,27 @@
           </a:bodyPr>
           <a:lstStyle/>
           <a:p>
-            <a:pPr algn="ctr"/>
-            <a:r>
-              <a:rPr lang="en-IN" sz="3200" dirty="0">
-                <a:latin typeface="Times New Roman" panose="02020603050405020304" pitchFamily="18" charset="0"/>
-                <a:cs typeface="Times New Roman" panose="02020603050405020304" pitchFamily="18" charset="0"/>
+            <a:pPr algn="ctr">
+              <a:defRPr/>
+            </a:pPr>
+            <a:r>
+              <a:rPr lang="en-IN" sz="3200">
+                <a:latin typeface="Times New Roman"/>
+                <a:cs typeface="Times New Roman"/>
               </a:rPr>
               <a:t>Results and Discussion</a:t>
             </a:r>
-          </a:p>
-        </p:txBody>
-      </p:sp>
-      <p:sp>
-        <p:nvSpPr>
-          <p:cNvPr id="110" name="TextShape 3">
-            <a:extLst>
-              <a:ext uri="{FF2B5EF4-FFF2-40B4-BE49-F238E27FC236}">
-                <a16:creationId xmlns:a16="http://schemas.microsoft.com/office/drawing/2014/main" id="{EA67512F-D473-54F7-C622-FF3A30440035}"/>
-              </a:ext>
-            </a:extLst>
-          </p:cNvPr>
+            <a:endParaRPr/>
+          </a:p>
+        </p:txBody>
+      </p:sp>
+      <p:sp>
+        <p:nvSpPr>
+          <p:cNvPr id="110" name="TextShape 3"/>
           <p:cNvSpPr txBox="1"/>
           <p:nvPr/>
         </p:nvSpPr>
-        <p:spPr>
+        <p:spPr bwMode="auto">
           <a:xfrm>
             <a:off x="6553080" y="6356520"/>
             <a:ext cx="2133360" cy="364680"/>
@@ -5094,6 +4500,7 @@
               <a:lnSpc>
                 <a:spcPct val="100000"/>
               </a:lnSpc>
+              <a:defRPr/>
             </a:pPr>
             <a:fld id="{4D4FEEEE-7AC5-48A9-86F4-13448BE87B58}" type="slidenum">
               <a:rPr lang="en-US" sz="1200" b="1" strike="noStrike" spc="-1">
@@ -5103,12 +4510,7 @@
                 <a:latin typeface="Calibri"/>
                 <a:ea typeface="MS PGothic"/>
               </a:rPr>
-              <a:pPr algn="r">
-                <a:lnSpc>
-                  <a:spcPct val="100000"/>
-                </a:lnSpc>
-              </a:pPr>
-              <a:t>16</a:t>
+              <a:t/>
             </a:fld>
             <a:endParaRPr lang="en-GB" sz="1200" b="0" strike="noStrike" spc="-1">
               <a:latin typeface="Times New Roman"/>
@@ -5118,17 +4520,11 @@
       </p:sp>
       <p:sp>
         <p:nvSpPr>
-          <p:cNvPr id="5" name="TextShape 2">
-            <a:extLst>
-              <a:ext uri="{FF2B5EF4-FFF2-40B4-BE49-F238E27FC236}">
-                <a16:creationId xmlns:a16="http://schemas.microsoft.com/office/drawing/2014/main" id="{519FAE85-B1BA-3D01-3B7D-D0E0504DD7D5}"/>
-              </a:ext>
-            </a:extLst>
-          </p:cNvPr>
+          <p:cNvPr id="5" name="TextShape 2"/>
           <p:cNvSpPr txBox="1"/>
           <p:nvPr/>
         </p:nvSpPr>
-        <p:spPr>
+        <p:spPr bwMode="auto">
           <a:xfrm>
             <a:off x="164008" y="1109742"/>
             <a:ext cx="8903792" cy="4838571"/>
@@ -5147,81 +4543,93 @@
           </a:bodyPr>
           <a:lstStyle/>
           <a:p>
-            <a:r>
-              <a:rPr lang="en-IN" dirty="0"/>
+            <a:pPr>
+              <a:defRPr/>
+            </a:pPr>
+            <a:r>
+              <a:rPr lang="en-IN"/>
               <a:t>The primary objective of this study was to develop and evaluate a highly accurate </a:t>
             </a:r>
             <a:r>
-              <a:rPr lang="en-IN" dirty="0" err="1"/>
+              <a:rPr lang="en-IN"/>
               <a:t>RandomForest</a:t>
             </a:r>
             <a:r>
-              <a:rPr lang="en-IN" dirty="0"/>
+              <a:rPr lang="en-IN"/>
               <a:t>-based phishing URL detection system. Extensive experimentation and validation were conducted using extracted URL and domain features to assess the effectiveness of the proposed model. The developed classifier achieved an impressive accuracy of **97.31%** in distinguishing phishing websites from legitimate websites, demonstrating the robustness and reliability of the proposed approach.</a:t>
             </a:r>
-          </a:p>
-          <a:p>
-            <a:r>
-              <a:rPr lang="en-IN" dirty="0"/>
+            <a:endParaRPr/>
+          </a:p>
+          <a:p>
+            <a:pPr>
+              <a:defRPr/>
+            </a:pPr>
+            <a:r>
+              <a:rPr lang="en-IN"/>
               <a:t> </a:t>
             </a:r>
-          </a:p>
-          <a:p>
-            <a:r>
-              <a:rPr lang="en-IN" dirty="0"/>
+            <a:endParaRPr/>
+          </a:p>
+          <a:p>
+            <a:pPr>
+              <a:defRPr/>
+            </a:pPr>
+            <a:r>
+              <a:rPr lang="en-IN"/>
               <a:t>The </a:t>
             </a:r>
             <a:r>
-              <a:rPr lang="en-IN" dirty="0" err="1"/>
+              <a:rPr lang="en-IN"/>
               <a:t>RandomForest</a:t>
             </a:r>
             <a:r>
-              <a:rPr lang="en-IN" dirty="0"/>
+              <a:rPr lang="en-IN"/>
               <a:t> model was trained using a comprehensive set of features extracted from URLs, including domain age, HTTPS usage, URL length, abnormal redirects, SSL certificate validity, and several webpage security indicators. The ensemble architecture of </a:t>
             </a:r>
             <a:r>
-              <a:rPr lang="en-IN" dirty="0" err="1"/>
+              <a:rPr lang="en-IN"/>
               <a:t>RandomForest</a:t>
             </a:r>
             <a:r>
-              <a:rPr lang="en-IN" dirty="0"/>
+              <a:rPr lang="en-IN"/>
               <a:t>, which combines predictions from multiple decision trees, significantly contributed to its ability to handle the complex and high-dimensional feature space associated with phishing detection.</a:t>
             </a:r>
-          </a:p>
-          <a:p>
-            <a:endParaRPr lang="en-IN" dirty="0"/>
+            <a:endParaRPr/>
+          </a:p>
+          <a:p>
+            <a:pPr>
+              <a:defRPr/>
+            </a:pPr>
+            <a:endParaRPr lang="en-IN"/>
           </a:p>
         </p:txBody>
       </p:sp>
     </p:spTree>
-    <p:extLst>
-      <p:ext uri="{BB962C8B-B14F-4D97-AF65-F5344CB8AC3E}">
-        <p14:creationId xmlns:p14="http://schemas.microsoft.com/office/powerpoint/2010/main" val="4020964094"/>
-      </p:ext>
-    </p:extLst>
   </p:cSld>
   <p:clrMapOvr>
     <a:masterClrMapping/>
   </p:clrMapOvr>
+  <mc:AlternateContent xmlns:mc="http://schemas.openxmlformats.org/markup-compatibility/2006">
+    <mc:Choice xmlns:p14="http://schemas.microsoft.com/office/powerpoint/2010/main" Requires="p14">
+      <p:transition p14:dur="2000" advClick="1"/>
+    </mc:Choice>
+    <mc:Fallback>
+      <p:transition advClick="1"/>
+    </mc:Fallback>
+  </mc:AlternateContent>
 </p:sld>
 </file>
 
 <file path=ppt/slides/slide17.xml><?xml version="1.0" encoding="utf-8"?>
-<p:sld xmlns:a="http://schemas.openxmlformats.org/drawingml/2006/main" xmlns:r="http://schemas.openxmlformats.org/officeDocument/2006/relationships" xmlns:p="http://schemas.openxmlformats.org/presentationml/2006/main">
-  <p:cSld>
+<p:sld xmlns:a="http://schemas.openxmlformats.org/drawingml/2006/main" xmlns:r="http://schemas.openxmlformats.org/officeDocument/2006/relationships" xmlns:p="http://schemas.openxmlformats.org/presentationml/2006/main" xmlns:m="http://schemas.openxmlformats.org/officeDocument/2006/math" xmlns:w="http://schemas.openxmlformats.org/wordprocessingml/2006/main" showMasterPhAnim="0" show="1">
+  <p:cSld name="">
     <p:spTree>
       <p:nvGrpSpPr>
-        <p:cNvPr id="1" name="">
-          <a:extLst>
-            <a:ext uri="{FF2B5EF4-FFF2-40B4-BE49-F238E27FC236}">
-              <a16:creationId xmlns:a16="http://schemas.microsoft.com/office/drawing/2014/main" id="{65774475-BB63-EC50-B933-2D50FCB033A4}"/>
-            </a:ext>
-          </a:extLst>
-        </p:cNvPr>
+        <p:cNvPr id="1" name=""/>
         <p:cNvGrpSpPr/>
         <p:nvPr/>
       </p:nvGrpSpPr>
-      <p:grpSpPr>
+      <p:grpSpPr bwMode="auto">
         <a:xfrm>
           <a:off x="0" y="0"/>
           <a:ext cx="0" cy="0"/>
@@ -5231,17 +4639,11 @@
       </p:grpSpPr>
       <p:sp>
         <p:nvSpPr>
-          <p:cNvPr id="108" name="TextShape 1">
-            <a:extLst>
-              <a:ext uri="{FF2B5EF4-FFF2-40B4-BE49-F238E27FC236}">
-                <a16:creationId xmlns:a16="http://schemas.microsoft.com/office/drawing/2014/main" id="{BB685D43-2867-83AE-5356-9CEEDA3AE00E}"/>
-              </a:ext>
-            </a:extLst>
-          </p:cNvPr>
+          <p:cNvPr id="108" name="TextShape 1"/>
           <p:cNvSpPr txBox="1"/>
           <p:nvPr/>
         </p:nvSpPr>
-        <p:spPr>
+        <p:spPr bwMode="auto">
           <a:xfrm>
             <a:off x="457200" y="0"/>
             <a:ext cx="6019560" cy="837720"/>
@@ -5260,30 +4662,27 @@
           </a:bodyPr>
           <a:lstStyle/>
           <a:p>
-            <a:pPr algn="ctr"/>
-            <a:r>
-              <a:rPr lang="en-IN" sz="3200" dirty="0">
-                <a:latin typeface="Times New Roman" panose="02020603050405020304" pitchFamily="18" charset="0"/>
-                <a:cs typeface="Times New Roman" panose="02020603050405020304" pitchFamily="18" charset="0"/>
+            <a:pPr algn="ctr">
+              <a:defRPr/>
+            </a:pPr>
+            <a:r>
+              <a:rPr lang="en-IN" sz="3200">
+                <a:latin typeface="Times New Roman"/>
+                <a:cs typeface="Times New Roman"/>
               </a:rPr>
               <a:t>Results and Discussion</a:t>
             </a:r>
-          </a:p>
-        </p:txBody>
-      </p:sp>
-      <p:sp>
-        <p:nvSpPr>
-          <p:cNvPr id="110" name="TextShape 3">
-            <a:extLst>
-              <a:ext uri="{FF2B5EF4-FFF2-40B4-BE49-F238E27FC236}">
-                <a16:creationId xmlns:a16="http://schemas.microsoft.com/office/drawing/2014/main" id="{A4E9E874-AE96-DD90-12AA-0BAFE2756020}"/>
-              </a:ext>
-            </a:extLst>
-          </p:cNvPr>
+            <a:endParaRPr/>
+          </a:p>
+        </p:txBody>
+      </p:sp>
+      <p:sp>
+        <p:nvSpPr>
+          <p:cNvPr id="110" name="TextShape 3"/>
           <p:cNvSpPr txBox="1"/>
           <p:nvPr/>
         </p:nvSpPr>
-        <p:spPr>
+        <p:spPr bwMode="auto">
           <a:xfrm>
             <a:off x="6553080" y="6356520"/>
             <a:ext cx="2133360" cy="364680"/>
@@ -5306,6 +4705,7 @@
               <a:lnSpc>
                 <a:spcPct val="100000"/>
               </a:lnSpc>
+              <a:defRPr/>
             </a:pPr>
             <a:fld id="{4D4FEEEE-7AC5-48A9-86F4-13448BE87B58}" type="slidenum">
               <a:rPr lang="en-US" sz="1200" b="1" strike="noStrike" spc="-1">
@@ -5315,12 +4715,7 @@
                 <a:latin typeface="Calibri"/>
                 <a:ea typeface="MS PGothic"/>
               </a:rPr>
-              <a:pPr algn="r">
-                <a:lnSpc>
-                  <a:spcPct val="100000"/>
-                </a:lnSpc>
-              </a:pPr>
-              <a:t>17</a:t>
+              <a:t/>
             </a:fld>
             <a:endParaRPr lang="en-GB" sz="1200" b="0" strike="noStrike" spc="-1">
               <a:latin typeface="Times New Roman"/>
@@ -5330,17 +4725,11 @@
       </p:sp>
       <p:sp>
         <p:nvSpPr>
-          <p:cNvPr id="5" name="TextShape 2">
-            <a:extLst>
-              <a:ext uri="{FF2B5EF4-FFF2-40B4-BE49-F238E27FC236}">
-                <a16:creationId xmlns:a16="http://schemas.microsoft.com/office/drawing/2014/main" id="{ABC08142-C040-E36A-CE3A-23345EA2E476}"/>
-              </a:ext>
-            </a:extLst>
-          </p:cNvPr>
+          <p:cNvPr id="5" name="TextShape 2"/>
           <p:cNvSpPr txBox="1"/>
           <p:nvPr/>
         </p:nvSpPr>
-        <p:spPr>
+        <p:spPr bwMode="auto">
           <a:xfrm>
             <a:off x="164008" y="1109742"/>
             <a:ext cx="8903792" cy="4838571"/>
@@ -5359,62 +4748,71 @@
           </a:bodyPr>
           <a:lstStyle/>
           <a:p>
-            <a:r>
-              <a:rPr lang="en-IN" dirty="0"/>
+            <a:pPr>
+              <a:defRPr/>
+            </a:pPr>
+            <a:r>
+              <a:rPr lang="en-IN"/>
               <a:t>Achieving an accuracy of 97.31% indicates that the proposed classifier correctly identified phishing URLs in the vast majority of cases. This level of performance is particularly important because phishing attacks continuously evolve, with attackers adopting new strategies to bypass traditional security mechanisms. The strong detection capability of the </a:t>
             </a:r>
             <a:r>
-              <a:rPr lang="en-IN" dirty="0" err="1"/>
+              <a:rPr lang="en-IN"/>
               <a:t>RandomForest</a:t>
             </a:r>
             <a:r>
-              <a:rPr lang="en-IN" dirty="0"/>
+              <a:rPr lang="en-IN"/>
               <a:t> classifier enhances online security and reduces the likelihood of users falling victim to malicious websites.</a:t>
             </a:r>
-          </a:p>
-          <a:p>
-            <a:r>
-              <a:rPr lang="en-IN" dirty="0"/>
+            <a:endParaRPr/>
+          </a:p>
+          <a:p>
+            <a:pPr>
+              <a:defRPr/>
+            </a:pPr>
+            <a:r>
+              <a:rPr lang="en-IN"/>
               <a:t> </a:t>
             </a:r>
-          </a:p>
-          <a:p>
-            <a:r>
-              <a:rPr lang="en-IN" dirty="0"/>
+            <a:endParaRPr/>
+          </a:p>
+          <a:p>
+            <a:pPr>
+              <a:defRPr/>
+            </a:pPr>
+            <a:r>
+              <a:rPr lang="en-IN"/>
               <a:t>Despite the high accuracy achieved, certain limitations were observed during implementation. Feature extraction from URLs can sometimes be computationally intensive and time-consuming. In some situations, the system may fail to retrieve all required webpage attributes or domain information due to network restrictions or inaccessible webpages. Such limitations can affect the overall classification performance and processing efficiency. These challenges highlight the need for future improvements in feature extraction optimization and real-time processing techniques.</a:t>
             </a:r>
+            <a:endParaRPr/>
           </a:p>
         </p:txBody>
       </p:sp>
     </p:spTree>
-    <p:extLst>
-      <p:ext uri="{BB962C8B-B14F-4D97-AF65-F5344CB8AC3E}">
-        <p14:creationId xmlns:p14="http://schemas.microsoft.com/office/powerpoint/2010/main" val="2958413178"/>
-      </p:ext>
-    </p:extLst>
   </p:cSld>
   <p:clrMapOvr>
     <a:masterClrMapping/>
   </p:clrMapOvr>
+  <mc:AlternateContent xmlns:mc="http://schemas.openxmlformats.org/markup-compatibility/2006">
+    <mc:Choice xmlns:p14="http://schemas.microsoft.com/office/powerpoint/2010/main" Requires="p14">
+      <p:transition p14:dur="2000" advClick="1"/>
+    </mc:Choice>
+    <mc:Fallback>
+      <p:transition advClick="1"/>
+    </mc:Fallback>
+  </mc:AlternateContent>
 </p:sld>
 </file>
 
 <file path=ppt/slides/slide18.xml><?xml version="1.0" encoding="utf-8"?>
-<p:sld xmlns:a="http://schemas.openxmlformats.org/drawingml/2006/main" xmlns:r="http://schemas.openxmlformats.org/officeDocument/2006/relationships" xmlns:p="http://schemas.openxmlformats.org/presentationml/2006/main">
-  <p:cSld>
+<p:sld xmlns:a="http://schemas.openxmlformats.org/drawingml/2006/main" xmlns:r="http://schemas.openxmlformats.org/officeDocument/2006/relationships" xmlns:p="http://schemas.openxmlformats.org/presentationml/2006/main" xmlns:m="http://schemas.openxmlformats.org/officeDocument/2006/math" xmlns:w="http://schemas.openxmlformats.org/wordprocessingml/2006/main" showMasterPhAnim="0" show="1">
+  <p:cSld name="">
     <p:spTree>
       <p:nvGrpSpPr>
-        <p:cNvPr id="1" name="">
-          <a:extLst>
-            <a:ext uri="{FF2B5EF4-FFF2-40B4-BE49-F238E27FC236}">
-              <a16:creationId xmlns:a16="http://schemas.microsoft.com/office/drawing/2014/main" id="{A2F2FBCF-CEDF-01B5-72EC-F4A69D864424}"/>
-            </a:ext>
-          </a:extLst>
-        </p:cNvPr>
+        <p:cNvPr id="1" name=""/>
         <p:cNvGrpSpPr/>
         <p:nvPr/>
       </p:nvGrpSpPr>
-      <p:grpSpPr>
+      <p:grpSpPr bwMode="auto">
         <a:xfrm>
           <a:off x="0" y="0"/>
           <a:ext cx="0" cy="0"/>
@@ -5424,17 +4822,11 @@
       </p:grpSpPr>
       <p:sp>
         <p:nvSpPr>
-          <p:cNvPr id="108" name="TextShape 1">
-            <a:extLst>
-              <a:ext uri="{FF2B5EF4-FFF2-40B4-BE49-F238E27FC236}">
-                <a16:creationId xmlns:a16="http://schemas.microsoft.com/office/drawing/2014/main" id="{3C24D90C-A7FE-33AF-2B28-5A999525EA40}"/>
-              </a:ext>
-            </a:extLst>
-          </p:cNvPr>
+          <p:cNvPr id="108" name="TextShape 1"/>
           <p:cNvSpPr txBox="1"/>
           <p:nvPr/>
         </p:nvSpPr>
-        <p:spPr>
+        <p:spPr bwMode="auto">
           <a:xfrm>
             <a:off x="457200" y="0"/>
             <a:ext cx="6019560" cy="837720"/>
@@ -5453,30 +4845,27 @@
           </a:bodyPr>
           <a:lstStyle/>
           <a:p>
-            <a:pPr algn="ctr"/>
-            <a:r>
-              <a:rPr lang="en-IN" sz="3200" dirty="0">
-                <a:latin typeface="Times New Roman" panose="02020603050405020304" pitchFamily="18" charset="0"/>
-                <a:cs typeface="Times New Roman" panose="02020603050405020304" pitchFamily="18" charset="0"/>
+            <a:pPr algn="ctr">
+              <a:defRPr/>
+            </a:pPr>
+            <a:r>
+              <a:rPr lang="en-IN" sz="3200">
+                <a:latin typeface="Times New Roman"/>
+                <a:cs typeface="Times New Roman"/>
               </a:rPr>
               <a:t>Results and Discussion</a:t>
             </a:r>
-          </a:p>
-        </p:txBody>
-      </p:sp>
-      <p:sp>
-        <p:nvSpPr>
-          <p:cNvPr id="110" name="TextShape 3">
-            <a:extLst>
-              <a:ext uri="{FF2B5EF4-FFF2-40B4-BE49-F238E27FC236}">
-                <a16:creationId xmlns:a16="http://schemas.microsoft.com/office/drawing/2014/main" id="{E837A4B5-F6EB-21A0-91CB-AE94E18E7DD4}"/>
-              </a:ext>
-            </a:extLst>
-          </p:cNvPr>
+            <a:endParaRPr/>
+          </a:p>
+        </p:txBody>
+      </p:sp>
+      <p:sp>
+        <p:nvSpPr>
+          <p:cNvPr id="110" name="TextShape 3"/>
           <p:cNvSpPr txBox="1"/>
           <p:nvPr/>
         </p:nvSpPr>
-        <p:spPr>
+        <p:spPr bwMode="auto">
           <a:xfrm>
             <a:off x="6553080" y="6356520"/>
             <a:ext cx="2133360" cy="364680"/>
@@ -5499,6 +4888,7 @@
               <a:lnSpc>
                 <a:spcPct val="100000"/>
               </a:lnSpc>
+              <a:defRPr/>
             </a:pPr>
             <a:fld id="{4D4FEEEE-7AC5-48A9-86F4-13448BE87B58}" type="slidenum">
               <a:rPr lang="en-US" sz="1200" b="1" strike="noStrike" spc="-1">
@@ -5508,12 +4898,7 @@
                 <a:latin typeface="Calibri"/>
                 <a:ea typeface="MS PGothic"/>
               </a:rPr>
-              <a:pPr algn="r">
-                <a:lnSpc>
-                  <a:spcPct val="100000"/>
-                </a:lnSpc>
-              </a:pPr>
-              <a:t>18</a:t>
+              <a:t/>
             </a:fld>
             <a:endParaRPr lang="en-GB" sz="1200" b="0" strike="noStrike" spc="-1">
               <a:latin typeface="Times New Roman"/>
@@ -5523,17 +4908,11 @@
       </p:sp>
       <p:sp>
         <p:nvSpPr>
-          <p:cNvPr id="5" name="TextShape 2">
-            <a:extLst>
-              <a:ext uri="{FF2B5EF4-FFF2-40B4-BE49-F238E27FC236}">
-                <a16:creationId xmlns:a16="http://schemas.microsoft.com/office/drawing/2014/main" id="{C05514A7-8DEE-A742-29B2-DD7C4831D2C5}"/>
-              </a:ext>
-            </a:extLst>
-          </p:cNvPr>
+          <p:cNvPr id="5" name="TextShape 2"/>
           <p:cNvSpPr txBox="1"/>
           <p:nvPr/>
         </p:nvSpPr>
-        <p:spPr>
+        <p:spPr bwMode="auto">
           <a:xfrm>
             <a:off x="164008" y="1109742"/>
             <a:ext cx="8903792" cy="4838571"/>
@@ -5552,150 +4931,213 @@
           </a:bodyPr>
           <a:lstStyle/>
           <a:p>
-            <a:r>
-              <a:rPr lang="en-IN" b="1" dirty="0"/>
+            <a:pPr>
+              <a:defRPr/>
+            </a:pPr>
+            <a:r>
+              <a:rPr lang="en-IN" b="1"/>
               <a:t>RANDOM FOREST MODEL SPECS:</a:t>
             </a:r>
-            <a:endParaRPr lang="en-IN" dirty="0"/>
-          </a:p>
-          <a:p>
-            <a:r>
-              <a:rPr lang="en-IN" dirty="0"/>
+            <a:endParaRPr lang="en-IN"/>
+          </a:p>
+          <a:p>
+            <a:pPr>
+              <a:defRPr/>
+            </a:pPr>
+            <a:r>
+              <a:rPr lang="en-IN"/>
               <a:t> </a:t>
             </a:r>
-          </a:p>
-          <a:p>
-            <a:pPr lvl="0"/>
-            <a:r>
-              <a:rPr lang="en-IN" dirty="0"/>
+            <a:endParaRPr/>
+          </a:p>
+          <a:p>
+            <a:pPr lvl="0">
+              <a:defRPr/>
+            </a:pPr>
+            <a:r>
+              <a:rPr lang="en-IN"/>
               <a:t>Accuracy of the model: 97.31789746464618%</a:t>
             </a:r>
-          </a:p>
-          <a:p>
-            <a:pPr lvl="0"/>
-            <a:r>
-              <a:rPr lang="en-IN" dirty="0"/>
+            <a:endParaRPr/>
+          </a:p>
+          <a:p>
+            <a:pPr lvl="0">
+              <a:defRPr/>
+            </a:pPr>
+            <a:r>
+              <a:rPr lang="en-IN"/>
               <a:t>Best Accuracy: 0.9731789746464618</a:t>
             </a:r>
-          </a:p>
-          <a:p>
-            <a:pPr lvl="0"/>
-            <a:r>
-              <a:rPr lang="en-IN" dirty="0"/>
+            <a:endParaRPr/>
+          </a:p>
+          <a:p>
+            <a:pPr lvl="0">
+              <a:defRPr/>
+            </a:pPr>
+            <a:r>
+              <a:rPr lang="en-IN"/>
               <a:t>Best Parameters:</a:t>
             </a:r>
-          </a:p>
-          <a:p>
-            <a:r>
-              <a:rPr lang="en-IN" dirty="0"/>
+            <a:endParaRPr/>
+          </a:p>
+          <a:p>
+            <a:pPr>
+              <a:defRPr/>
+            </a:pPr>
+            <a:r>
+              <a:rPr lang="en-IN"/>
               <a:t>Criterion = entropy</a:t>
             </a:r>
-          </a:p>
-          <a:p>
-            <a:r>
-              <a:rPr lang="en-IN" dirty="0"/>
+            <a:endParaRPr/>
+          </a:p>
+          <a:p>
+            <a:pPr>
+              <a:defRPr/>
+            </a:pPr>
+            <a:r>
+              <a:rPr lang="en-IN"/>
               <a:t>Max Features = log2</a:t>
             </a:r>
-          </a:p>
-          <a:p>
-            <a:r>
-              <a:rPr lang="en-IN" dirty="0"/>
+            <a:endParaRPr/>
+          </a:p>
+          <a:p>
+            <a:pPr>
+              <a:defRPr/>
+            </a:pPr>
+            <a:r>
+              <a:rPr lang="en-IN"/>
               <a:t>Number of Estimators = 100</a:t>
             </a:r>
-          </a:p>
-          <a:p>
-            <a:pPr lvl="0"/>
-            <a:r>
-              <a:rPr lang="en-IN" dirty="0"/>
+            <a:endParaRPr/>
+          </a:p>
+          <a:p>
+            <a:pPr lvl="0">
+              <a:defRPr/>
+            </a:pPr>
+            <a:r>
+              <a:rPr lang="en-IN"/>
               <a:t>Cross-validation Score:** 0.9693641373263504</a:t>
             </a:r>
-          </a:p>
-          <a:p>
-            <a:r>
-              <a:rPr lang="en-IN" dirty="0"/>
+            <a:endParaRPr/>
+          </a:p>
+          <a:p>
+            <a:pPr>
+              <a:defRPr/>
+            </a:pPr>
+            <a:r>
+              <a:rPr lang="en-IN"/>
               <a:t> </a:t>
             </a:r>
-          </a:p>
-          <a:p>
-            <a:r>
-              <a:rPr lang="en-IN" b="1" dirty="0"/>
+            <a:endParaRPr/>
+          </a:p>
+          <a:p>
+            <a:pPr>
+              <a:defRPr/>
+            </a:pPr>
+            <a:r>
+              <a:rPr lang="en-IN" b="1"/>
               <a:t>4.2 Confusion Matrix:</a:t>
             </a:r>
-            <a:endParaRPr lang="en-IN" dirty="0"/>
-          </a:p>
-          <a:p>
-            <a:r>
-              <a:rPr lang="en-IN" dirty="0"/>
+            <a:endParaRPr lang="en-IN"/>
+          </a:p>
+          <a:p>
+            <a:pPr>
+              <a:defRPr/>
+            </a:pPr>
+            <a:r>
+              <a:rPr lang="en-IN"/>
               <a:t> </a:t>
             </a:r>
-          </a:p>
-          <a:p>
-            <a:r>
-              <a:rPr lang="en-IN" dirty="0"/>
+            <a:endParaRPr/>
+          </a:p>
+          <a:p>
+            <a:pPr>
+              <a:defRPr/>
+            </a:pPr>
+            <a:r>
+              <a:rPr lang="en-IN"/>
               <a:t>|                 | Predicted Positive | Predicted Negative |</a:t>
             </a:r>
-          </a:p>
-          <a:p>
-            <a:r>
-              <a:rPr lang="en-IN" dirty="0"/>
+            <a:endParaRPr/>
+          </a:p>
+          <a:p>
+            <a:pPr>
+              <a:defRPr/>
+            </a:pPr>
+            <a:r>
+              <a:rPr lang="en-IN"/>
               <a:t>| --------------- | ------------------ | ------------------ |</a:t>
             </a:r>
-          </a:p>
-          <a:p>
-            <a:r>
-              <a:rPr lang="en-IN" dirty="0"/>
+            <a:endParaRPr/>
+          </a:p>
+          <a:p>
+            <a:pPr>
+              <a:defRPr/>
+            </a:pPr>
+            <a:r>
+              <a:rPr lang="en-IN"/>
               <a:t>| Actual Positive | 1186               | 63                 |</a:t>
             </a:r>
-          </a:p>
-          <a:p>
-            <a:r>
-              <a:rPr lang="en-IN" dirty="0"/>
+            <a:endParaRPr/>
+          </a:p>
+          <a:p>
+            <a:pPr>
+              <a:defRPr/>
+            </a:pPr>
+            <a:r>
+              <a:rPr lang="en-IN"/>
               <a:t>| Actual Negative | 26                 | 1489               |</a:t>
             </a:r>
-          </a:p>
-          <a:p>
-            <a:r>
-              <a:rPr lang="en-IN" dirty="0"/>
+            <a:endParaRPr/>
+          </a:p>
+          <a:p>
+            <a:pPr>
+              <a:defRPr/>
+            </a:pPr>
+            <a:r>
+              <a:rPr lang="en-IN"/>
               <a:t> </a:t>
             </a:r>
-          </a:p>
-          <a:p>
-            <a:r>
-              <a:rPr lang="en-IN" dirty="0"/>
+            <a:endParaRPr/>
+          </a:p>
+          <a:p>
+            <a:pPr>
+              <a:defRPr/>
+            </a:pPr>
+            <a:r>
+              <a:rPr lang="en-IN"/>
               <a:t>The confusion matrix further demonstrates the effectiveness of the classifier, showing a high number of correctly classified phishing and legitimate URLs while maintaining relatively low false positive and false negative rates.</a:t>
             </a:r>
+            <a:endParaRPr/>
           </a:p>
         </p:txBody>
       </p:sp>
     </p:spTree>
-    <p:extLst>
-      <p:ext uri="{BB962C8B-B14F-4D97-AF65-F5344CB8AC3E}">
-        <p14:creationId xmlns:p14="http://schemas.microsoft.com/office/powerpoint/2010/main" val="1796745639"/>
-      </p:ext>
-    </p:extLst>
   </p:cSld>
   <p:clrMapOvr>
     <a:masterClrMapping/>
   </p:clrMapOvr>
+  <mc:AlternateContent xmlns:mc="http://schemas.openxmlformats.org/markup-compatibility/2006">
+    <mc:Choice xmlns:p14="http://schemas.microsoft.com/office/powerpoint/2010/main" Requires="p14">
+      <p:transition p14:dur="2000" advClick="1"/>
+    </mc:Choice>
+    <mc:Fallback>
+      <p:transition advClick="1"/>
+    </mc:Fallback>
+  </mc:AlternateContent>
 </p:sld>
 </file>
 
 <file path=ppt/slides/slide19.xml><?xml version="1.0" encoding="utf-8"?>
-<p:sld xmlns:a="http://schemas.openxmlformats.org/drawingml/2006/main" xmlns:r="http://schemas.openxmlformats.org/officeDocument/2006/relationships" xmlns:p="http://schemas.openxmlformats.org/presentationml/2006/main">
-  <p:cSld>
+<p:sld xmlns:a="http://schemas.openxmlformats.org/drawingml/2006/main" xmlns:r="http://schemas.openxmlformats.org/officeDocument/2006/relationships" xmlns:p="http://schemas.openxmlformats.org/presentationml/2006/main" xmlns:m="http://schemas.openxmlformats.org/officeDocument/2006/math" xmlns:w="http://schemas.openxmlformats.org/wordprocessingml/2006/main" showMasterPhAnim="0" show="1">
+  <p:cSld name="">
     <p:spTree>
       <p:nvGrpSpPr>
-        <p:cNvPr id="1" name="">
-          <a:extLst>
-            <a:ext uri="{FF2B5EF4-FFF2-40B4-BE49-F238E27FC236}">
-              <a16:creationId xmlns:a16="http://schemas.microsoft.com/office/drawing/2014/main" id="{63072921-4510-D667-A738-A342F900C118}"/>
-            </a:ext>
-          </a:extLst>
-        </p:cNvPr>
+        <p:cNvPr id="1" name=""/>
         <p:cNvGrpSpPr/>
         <p:nvPr/>
       </p:nvGrpSpPr>
-      <p:grpSpPr>
+      <p:grpSpPr bwMode="auto">
         <a:xfrm>
           <a:off x="0" y="0"/>
           <a:ext cx="0" cy="0"/>
@@ -5705,17 +5147,11 @@
       </p:grpSpPr>
       <p:sp>
         <p:nvSpPr>
-          <p:cNvPr id="108" name="TextShape 1">
-            <a:extLst>
-              <a:ext uri="{FF2B5EF4-FFF2-40B4-BE49-F238E27FC236}">
-                <a16:creationId xmlns:a16="http://schemas.microsoft.com/office/drawing/2014/main" id="{8C12BDAC-A0E4-26DB-C0E6-16B427264C5D}"/>
-              </a:ext>
-            </a:extLst>
-          </p:cNvPr>
+          <p:cNvPr id="108" name="TextShape 1"/>
           <p:cNvSpPr txBox="1"/>
           <p:nvPr/>
         </p:nvSpPr>
-        <p:spPr>
+        <p:spPr bwMode="auto">
           <a:xfrm>
             <a:off x="457200" y="0"/>
             <a:ext cx="6019560" cy="837720"/>
@@ -5734,30 +5170,27 @@
           </a:bodyPr>
           <a:lstStyle/>
           <a:p>
-            <a:pPr algn="ctr"/>
-            <a:r>
-              <a:rPr lang="en-IN" sz="3200" dirty="0">
-                <a:latin typeface="Times New Roman" panose="02020603050405020304" pitchFamily="18" charset="0"/>
-                <a:cs typeface="Times New Roman" panose="02020603050405020304" pitchFamily="18" charset="0"/>
+            <a:pPr algn="ctr">
+              <a:defRPr/>
+            </a:pPr>
+            <a:r>
+              <a:rPr lang="en-IN" sz="3200">
+                <a:latin typeface="Times New Roman"/>
+                <a:cs typeface="Times New Roman"/>
               </a:rPr>
               <a:t>Conclusion</a:t>
             </a:r>
-          </a:p>
-        </p:txBody>
-      </p:sp>
-      <p:sp>
-        <p:nvSpPr>
-          <p:cNvPr id="110" name="TextShape 3">
-            <a:extLst>
-              <a:ext uri="{FF2B5EF4-FFF2-40B4-BE49-F238E27FC236}">
-                <a16:creationId xmlns:a16="http://schemas.microsoft.com/office/drawing/2014/main" id="{FB9D13BE-3355-82F8-FD2B-40B16AAC6774}"/>
-              </a:ext>
-            </a:extLst>
-          </p:cNvPr>
+            <a:endParaRPr/>
+          </a:p>
+        </p:txBody>
+      </p:sp>
+      <p:sp>
+        <p:nvSpPr>
+          <p:cNvPr id="110" name="TextShape 3"/>
           <p:cNvSpPr txBox="1"/>
           <p:nvPr/>
         </p:nvSpPr>
-        <p:spPr>
+        <p:spPr bwMode="auto">
           <a:xfrm>
             <a:off x="6553080" y="6356520"/>
             <a:ext cx="2133360" cy="364680"/>
@@ -5780,6 +5213,7 @@
               <a:lnSpc>
                 <a:spcPct val="100000"/>
               </a:lnSpc>
+              <a:defRPr/>
             </a:pPr>
             <a:fld id="{4D4FEEEE-7AC5-48A9-86F4-13448BE87B58}" type="slidenum">
               <a:rPr lang="en-US" sz="1200" b="1" strike="noStrike" spc="-1">
@@ -5789,12 +5223,7 @@
                 <a:latin typeface="Calibri"/>
                 <a:ea typeface="MS PGothic"/>
               </a:rPr>
-              <a:pPr algn="r">
-                <a:lnSpc>
-                  <a:spcPct val="100000"/>
-                </a:lnSpc>
-              </a:pPr>
-              <a:t>19</a:t>
+              <a:t/>
             </a:fld>
             <a:endParaRPr lang="en-GB" sz="1200" b="0" strike="noStrike" spc="-1">
               <a:latin typeface="Times New Roman"/>
@@ -5804,17 +5233,11 @@
       </p:sp>
       <p:sp>
         <p:nvSpPr>
-          <p:cNvPr id="5" name="TextShape 2">
-            <a:extLst>
-              <a:ext uri="{FF2B5EF4-FFF2-40B4-BE49-F238E27FC236}">
-                <a16:creationId xmlns:a16="http://schemas.microsoft.com/office/drawing/2014/main" id="{76247A4F-0A9C-C96D-2300-7E31EE1719F2}"/>
-              </a:ext>
-            </a:extLst>
-          </p:cNvPr>
+          <p:cNvPr id="5" name="TextShape 2"/>
           <p:cNvSpPr txBox="1"/>
           <p:nvPr/>
         </p:nvSpPr>
-        <p:spPr>
+        <p:spPr bwMode="auto">
           <a:xfrm>
             <a:off x="164008" y="1109742"/>
             <a:ext cx="8903792" cy="4838571"/>
@@ -5833,72 +5256,87 @@
           </a:bodyPr>
           <a:lstStyle/>
           <a:p>
-            <a:r>
-              <a:rPr lang="en-IN" dirty="0"/>
+            <a:pPr>
+              <a:defRPr/>
+            </a:pPr>
+            <a:r>
+              <a:rPr lang="en-IN"/>
               <a:t>Phishing attacks continue to pose significant threats in the modern digital ecosystem by exploiting human trust and technological vulnerabilities to steal sensitive information. This report examined various forms of phishing attacks, including email phishing, spear phishing, smishing, and vishing, emphasizing their sophisticated methodologies and harmful impacts on individuals and organizations.</a:t>
             </a:r>
-          </a:p>
-          <a:p>
-            <a:r>
-              <a:rPr lang="en-IN" dirty="0"/>
+            <a:endParaRPr/>
+          </a:p>
+          <a:p>
+            <a:pPr>
+              <a:defRPr/>
+            </a:pPr>
+            <a:r>
+              <a:rPr lang="en-IN"/>
               <a:t> </a:t>
             </a:r>
-          </a:p>
-          <a:p>
-            <a:r>
-              <a:rPr lang="en-IN" dirty="0"/>
+            <a:endParaRPr/>
+          </a:p>
+          <a:p>
+            <a:pPr>
+              <a:defRPr/>
+            </a:pPr>
+            <a:r>
+              <a:rPr lang="en-IN"/>
               <a:t>The project successfully developed and evaluated a </a:t>
             </a:r>
             <a:r>
-              <a:rPr lang="en-IN" dirty="0" err="1"/>
+              <a:rPr lang="en-IN"/>
               <a:t>RandomForest</a:t>
             </a:r>
             <a:r>
-              <a:rPr lang="en-IN" dirty="0"/>
+              <a:rPr lang="en-IN"/>
               <a:t>-based phishing URL detection system capable of accurately identifying malicious websites. By leveraging advanced machine learning techniques and comprehensive feature extraction methods, the system achieved a high detection accuracy of 97.31%. The model effectively </a:t>
             </a:r>
             <a:r>
-              <a:rPr lang="en-IN" dirty="0" err="1"/>
+              <a:rPr lang="en-IN"/>
               <a:t>analyzed</a:t>
             </a:r>
             <a:r>
-              <a:rPr lang="en-IN" dirty="0"/>
+              <a:rPr lang="en-IN"/>
               <a:t> URL structures, domain properties, HTTPS usage, security indicators, and webpage </a:t>
             </a:r>
             <a:r>
-              <a:rPr lang="en-IN" dirty="0" err="1"/>
+              <a:rPr lang="en-IN"/>
               <a:t>behaviors</a:t>
             </a:r>
             <a:r>
-              <a:rPr lang="en-IN" dirty="0"/>
+              <a:rPr lang="en-IN"/>
               <a:t> to distinguish legitimate websites from phishing websites.</a:t>
             </a:r>
+            <a:endParaRPr/>
           </a:p>
         </p:txBody>
       </p:sp>
     </p:spTree>
-    <p:extLst>
-      <p:ext uri="{BB962C8B-B14F-4D97-AF65-F5344CB8AC3E}">
-        <p14:creationId xmlns:p14="http://schemas.microsoft.com/office/powerpoint/2010/main" val="3063702568"/>
-      </p:ext>
-    </p:extLst>
   </p:cSld>
   <p:clrMapOvr>
     <a:masterClrMapping/>
   </p:clrMapOvr>
+  <mc:AlternateContent xmlns:mc="http://schemas.openxmlformats.org/markup-compatibility/2006">
+    <mc:Choice xmlns:p14="http://schemas.microsoft.com/office/powerpoint/2010/main" Requires="p14">
+      <p:transition p14:dur="2000" advClick="1"/>
+    </mc:Choice>
+    <mc:Fallback>
+      <p:transition advClick="1"/>
+    </mc:Fallback>
+  </mc:AlternateContent>
 </p:sld>
 </file>
 
 <file path=ppt/slides/slide2.xml><?xml version="1.0" encoding="utf-8"?>
-<p:sld xmlns:a="http://schemas.openxmlformats.org/drawingml/2006/main" xmlns:r="http://schemas.openxmlformats.org/officeDocument/2006/relationships" xmlns:p="http://schemas.openxmlformats.org/presentationml/2006/main">
-  <p:cSld>
+<p:sld xmlns:a="http://schemas.openxmlformats.org/drawingml/2006/main" xmlns:r="http://schemas.openxmlformats.org/officeDocument/2006/relationships" xmlns:p="http://schemas.openxmlformats.org/presentationml/2006/main" xmlns:m="http://schemas.openxmlformats.org/officeDocument/2006/math" xmlns:w="http://schemas.openxmlformats.org/wordprocessingml/2006/main" showMasterPhAnim="0" show="1">
+  <p:cSld name="">
     <p:spTree>
       <p:nvGrpSpPr>
         <p:cNvPr id="1" name=""/>
         <p:cNvGrpSpPr/>
         <p:nvPr/>
       </p:nvGrpSpPr>
-      <p:grpSpPr>
+      <p:grpSpPr bwMode="auto">
         <a:xfrm>
           <a:off x="0" y="0"/>
           <a:ext cx="0" cy="0"/>
@@ -5912,7 +5350,7 @@
           <p:cNvSpPr txBox="1"/>
           <p:nvPr/>
         </p:nvSpPr>
-        <p:spPr>
+        <p:spPr bwMode="auto">
           <a:xfrm>
             <a:off x="457200" y="0"/>
             <a:ext cx="6019560" cy="837720"/>
@@ -5935,20 +5373,21 @@
               <a:lnSpc>
                 <a:spcPct val="100000"/>
               </a:lnSpc>
-            </a:pPr>
-            <a:r>
-              <a:rPr lang="en" sz="3200" dirty="0">
-                <a:latin typeface="Times New Roman" panose="02020603050405020304" pitchFamily="18" charset="0"/>
-                <a:cs typeface="Times New Roman" panose="02020603050405020304" pitchFamily="18" charset="0"/>
+              <a:defRPr/>
+            </a:pPr>
+            <a:r>
+              <a:rPr lang="en" sz="3200">
+                <a:latin typeface="Times New Roman"/>
+                <a:cs typeface="Times New Roman"/>
               </a:rPr>
               <a:t>Introduction</a:t>
             </a:r>
-            <a:endParaRPr lang="en-US" sz="3000" b="0" strike="noStrike" spc="-1" dirty="0">
+            <a:endParaRPr lang="en-US" sz="3000" b="0" strike="noStrike" spc="-1">
               <a:solidFill>
                 <a:srgbClr val="000000"/>
               </a:solidFill>
-              <a:latin typeface="Times New Roman" panose="02020603050405020304" pitchFamily="18" charset="0"/>
-              <a:cs typeface="Times New Roman" panose="02020603050405020304" pitchFamily="18" charset="0"/>
+              <a:latin typeface="Times New Roman"/>
+              <a:cs typeface="Times New Roman"/>
             </a:endParaRPr>
           </a:p>
         </p:txBody>
@@ -5959,7 +5398,7 @@
           <p:cNvSpPr txBox="1"/>
           <p:nvPr/>
         </p:nvSpPr>
-        <p:spPr>
+        <p:spPr bwMode="auto">
           <a:xfrm>
             <a:off x="6553080" y="6356520"/>
             <a:ext cx="2133360" cy="364680"/>
@@ -5982,6 +5421,7 @@
               <a:lnSpc>
                 <a:spcPct val="100000"/>
               </a:lnSpc>
+              <a:defRPr/>
             </a:pPr>
             <a:fld id="{4D4FEEEE-7AC5-48A9-86F4-13448BE87B58}" type="slidenum">
               <a:rPr lang="en-US" sz="1200" b="1" strike="noStrike" spc="-1">
@@ -5991,12 +5431,7 @@
                 <a:latin typeface="Calibri"/>
                 <a:ea typeface="MS PGothic"/>
               </a:rPr>
-              <a:pPr algn="r">
-                <a:lnSpc>
-                  <a:spcPct val="100000"/>
-                </a:lnSpc>
-              </a:pPr>
-              <a:t>2</a:t>
+              <a:t/>
             </a:fld>
             <a:endParaRPr lang="en-GB" sz="1200" b="0" strike="noStrike" spc="-1">
               <a:latin typeface="Times New Roman"/>
@@ -6010,7 +5445,7 @@
           <p:cNvSpPr txBox="1"/>
           <p:nvPr/>
         </p:nvSpPr>
-        <p:spPr>
+        <p:spPr bwMode="auto">
           <a:xfrm>
             <a:off x="164008" y="1109742"/>
             <a:ext cx="8838720" cy="4838571"/>
@@ -6029,22 +5464,34 @@
           </a:bodyPr>
           <a:lstStyle/>
           <a:p>
-            <a:r>
-              <a:rPr lang="en-IN" dirty="0"/>
+            <a:pPr>
+              <a:defRPr/>
+            </a:pPr>
+            <a:r>
+              <a:rPr lang="en-IN"/>
               <a:t>Phishing attacks are among the most widespread and dangerous cybersecurity threats in the modern digital world. These attacks exploit human psychology, trust, and lack of awareness in online communications. In a phishing attack, cybercriminals impersonate trusted organizations such as banks, e-commerce platforms, government agencies, or reputable companies to manipulate users into revealing confidential information. Such sensitive information may include usernames, passwords, banking credentials, credit card details, and personal identification data. Attackers commonly use deceptive emails, fake websites, SMS messages, or social media communications that closely resemble legitimate platforms, making it difficult for users to distinguish between authentic and malicious sources.</a:t>
             </a:r>
-          </a:p>
-          <a:p>
-            <a:r>
-              <a:rPr lang="en-IN" dirty="0"/>
+            <a:endParaRPr/>
+          </a:p>
+          <a:p>
+            <a:pPr>
+              <a:defRPr/>
+            </a:pPr>
+            <a:r>
+              <a:rPr lang="en-IN"/>
               <a:t> </a:t>
             </a:r>
-          </a:p>
-          <a:p>
-            <a:r>
-              <a:rPr lang="en-IN" dirty="0"/>
+            <a:endParaRPr/>
+          </a:p>
+          <a:p>
+            <a:pPr>
+              <a:defRPr/>
+            </a:pPr>
+            <a:r>
+              <a:rPr lang="en-IN"/>
               <a:t>The impact of phishing attacks can be extremely severe for both individuals and organizations. Victims may suffer financial losses, identity theft, unauthorized account access, and exposure of confidential information. For businesses, phishing attacks can result in data breaches, operational disruptions, reputational damage, and legal consequences. As technology evolves, phishing techniques are becoming increasingly sophisticated, utilizing advanced social engineering tactics, fake SSL certificates, URL obfuscation, and realistic website cloning. These evolving strategies make phishing detection and prevention more challenging than ever before.</a:t>
             </a:r>
+            <a:endParaRPr/>
           </a:p>
           <a:p>
             <a:pPr>
@@ -6054,11 +5501,12 @@
               <a:spcBef>
                 <a:spcPts val="400"/>
               </a:spcBef>
-            </a:pPr>
-            <a:endParaRPr lang="en-US" sz="3600" dirty="0">
-              <a:latin typeface="Times New Roman" panose="02020603050405020304" pitchFamily="18" charset="0"/>
-              <a:ea typeface="Calibri" panose="020F0502020204030204" pitchFamily="34" charset="0"/>
-              <a:cs typeface="Times New Roman" panose="02020603050405020304" pitchFamily="18" charset="0"/>
+              <a:defRPr/>
+            </a:pPr>
+            <a:endParaRPr lang="en-US" sz="3600">
+              <a:latin typeface="Times New Roman"/>
+              <a:ea typeface="Calibri"/>
+              <a:cs typeface="Times New Roman"/>
             </a:endParaRPr>
           </a:p>
           <a:p>
@@ -6069,8 +5517,9 @@
               <a:spcBef>
                 <a:spcPts val="400"/>
               </a:spcBef>
-            </a:pPr>
-            <a:endParaRPr lang="en-US" sz="1900" b="0" strike="noStrike" spc="-1" dirty="0">
+              <a:defRPr/>
+            </a:pPr>
+            <a:endParaRPr lang="en-US" sz="1900" b="0" strike="noStrike" spc="-1">
               <a:solidFill>
                 <a:srgbClr val="000000"/>
               </a:solidFill>
@@ -6085,8 +5534,9 @@
               <a:spcBef>
                 <a:spcPts val="400"/>
               </a:spcBef>
-            </a:pPr>
-            <a:endParaRPr lang="en-US" sz="1900" spc="-1" dirty="0">
+              <a:defRPr/>
+            </a:pPr>
+            <a:endParaRPr lang="en-US" sz="1900" spc="-1">
               <a:solidFill>
                 <a:srgbClr val="000000"/>
               </a:solidFill>
@@ -6101,8 +5551,9 @@
               <a:spcBef>
                 <a:spcPts val="400"/>
               </a:spcBef>
-            </a:pPr>
-            <a:endParaRPr lang="en-US" sz="1900" b="0" strike="noStrike" spc="-1" dirty="0">
+              <a:defRPr/>
+            </a:pPr>
+            <a:endParaRPr lang="en-US" sz="1900" b="0" strike="noStrike" spc="-1">
               <a:solidFill>
                 <a:srgbClr val="000000"/>
               </a:solidFill>
@@ -6117,8 +5568,9 @@
               <a:spcBef>
                 <a:spcPts val="400"/>
               </a:spcBef>
-            </a:pPr>
-            <a:endParaRPr lang="en-US" sz="1900" b="0" strike="noStrike" spc="-1" dirty="0">
+              <a:defRPr/>
+            </a:pPr>
+            <a:endParaRPr lang="en-US" sz="1900" b="0" strike="noStrike" spc="-1">
               <a:solidFill>
                 <a:srgbClr val="000000"/>
               </a:solidFill>
@@ -6133,8 +5585,9 @@
               <a:spcBef>
                 <a:spcPts val="400"/>
               </a:spcBef>
-            </a:pPr>
-            <a:endParaRPr lang="en-US" sz="1900" b="0" strike="noStrike" spc="-1" dirty="0">
+              <a:defRPr/>
+            </a:pPr>
+            <a:endParaRPr lang="en-US" sz="1900" b="0" strike="noStrike" spc="-1">
               <a:solidFill>
                 <a:srgbClr val="000000"/>
               </a:solidFill>
@@ -6149,8 +5602,9 @@
               <a:spcBef>
                 <a:spcPts val="400"/>
               </a:spcBef>
-            </a:pPr>
-            <a:endParaRPr lang="en-US" sz="1900" b="0" strike="noStrike" spc="-1" dirty="0">
+              <a:defRPr/>
+            </a:pPr>
+            <a:endParaRPr lang="en-US" sz="1900" b="0" strike="noStrike" spc="-1">
               <a:solidFill>
                 <a:srgbClr val="000000"/>
               </a:solidFill>
@@ -6165,8 +5619,9 @@
               <a:spcBef>
                 <a:spcPts val="400"/>
               </a:spcBef>
-            </a:pPr>
-            <a:endParaRPr lang="en-US" sz="1900" b="0" strike="noStrike" spc="-1" dirty="0">
+              <a:defRPr/>
+            </a:pPr>
+            <a:endParaRPr lang="en-US" sz="1900" b="0" strike="noStrike" spc="-1">
               <a:solidFill>
                 <a:srgbClr val="000000"/>
               </a:solidFill>
@@ -6181,8 +5636,9 @@
               <a:spcBef>
                 <a:spcPts val="400"/>
               </a:spcBef>
-            </a:pPr>
-            <a:endParaRPr lang="en-US" sz="1900" b="0" strike="noStrike" spc="-1" dirty="0">
+              <a:defRPr/>
+            </a:pPr>
+            <a:endParaRPr lang="en-US" sz="1900" b="0" strike="noStrike" spc="-1">
               <a:solidFill>
                 <a:srgbClr val="000000"/>
               </a:solidFill>
@@ -6197,8 +5653,9 @@
               <a:spcBef>
                 <a:spcPts val="400"/>
               </a:spcBef>
-            </a:pPr>
-            <a:endParaRPr lang="en-US" sz="1900" b="0" strike="noStrike" spc="-1" dirty="0">
+              <a:defRPr/>
+            </a:pPr>
+            <a:endParaRPr lang="en-US" sz="1900" b="0" strike="noStrike" spc="-1">
               <a:solidFill>
                 <a:srgbClr val="000000"/>
               </a:solidFill>
@@ -6213,8 +5670,9 @@
               <a:spcBef>
                 <a:spcPts val="400"/>
               </a:spcBef>
-            </a:pPr>
-            <a:endParaRPr lang="en-US" sz="1900" b="0" strike="noStrike" spc="-1" dirty="0">
+              <a:defRPr/>
+            </a:pPr>
+            <a:endParaRPr lang="en-US" sz="1900" b="0" strike="noStrike" spc="-1">
               <a:solidFill>
                 <a:srgbClr val="000000"/>
               </a:solidFill>
@@ -6229,8 +5687,9 @@
               <a:spcBef>
                 <a:spcPts val="400"/>
               </a:spcBef>
-            </a:pPr>
-            <a:endParaRPr lang="en-US" sz="1900" b="0" strike="noStrike" spc="-1" dirty="0">
+              <a:defRPr/>
+            </a:pPr>
+            <a:endParaRPr lang="en-US" sz="1900" b="0" strike="noStrike" spc="-1">
               <a:solidFill>
                 <a:srgbClr val="000000"/>
               </a:solidFill>
@@ -6244,25 +5703,27 @@
   <p:clrMapOvr>
     <a:masterClrMapping/>
   </p:clrMapOvr>
+  <mc:AlternateContent xmlns:mc="http://schemas.openxmlformats.org/markup-compatibility/2006">
+    <mc:Choice xmlns:p14="http://schemas.microsoft.com/office/powerpoint/2010/main" Requires="p14">
+      <p:transition p14:dur="2000" advClick="1"/>
+    </mc:Choice>
+    <mc:Fallback>
+      <p:transition advClick="1"/>
+    </mc:Fallback>
+  </mc:AlternateContent>
 </p:sld>
 </file>
 
 <file path=ppt/slides/slide20.xml><?xml version="1.0" encoding="utf-8"?>
-<p:sld xmlns:a="http://schemas.openxmlformats.org/drawingml/2006/main" xmlns:r="http://schemas.openxmlformats.org/officeDocument/2006/relationships" xmlns:p="http://schemas.openxmlformats.org/presentationml/2006/main">
-  <p:cSld>
+<p:sld xmlns:a="http://schemas.openxmlformats.org/drawingml/2006/main" xmlns:r="http://schemas.openxmlformats.org/officeDocument/2006/relationships" xmlns:p="http://schemas.openxmlformats.org/presentationml/2006/main" xmlns:m="http://schemas.openxmlformats.org/officeDocument/2006/math" xmlns:w="http://schemas.openxmlformats.org/wordprocessingml/2006/main" showMasterPhAnim="0" show="1">
+  <p:cSld name="">
     <p:spTree>
       <p:nvGrpSpPr>
-        <p:cNvPr id="1" name="">
-          <a:extLst>
-            <a:ext uri="{FF2B5EF4-FFF2-40B4-BE49-F238E27FC236}">
-              <a16:creationId xmlns:a16="http://schemas.microsoft.com/office/drawing/2014/main" id="{042C90FC-67C7-FD4A-6B6B-5A9CA6412CA2}"/>
-            </a:ext>
-          </a:extLst>
-        </p:cNvPr>
+        <p:cNvPr id="1" name=""/>
         <p:cNvGrpSpPr/>
         <p:nvPr/>
       </p:nvGrpSpPr>
-      <p:grpSpPr>
+      <p:grpSpPr bwMode="auto">
         <a:xfrm>
           <a:off x="0" y="0"/>
           <a:ext cx="0" cy="0"/>
@@ -6272,17 +5733,11 @@
       </p:grpSpPr>
       <p:sp>
         <p:nvSpPr>
-          <p:cNvPr id="108" name="TextShape 1">
-            <a:extLst>
-              <a:ext uri="{FF2B5EF4-FFF2-40B4-BE49-F238E27FC236}">
-                <a16:creationId xmlns:a16="http://schemas.microsoft.com/office/drawing/2014/main" id="{CD888404-19BD-7937-CE53-784912E61F93}"/>
-              </a:ext>
-            </a:extLst>
-          </p:cNvPr>
+          <p:cNvPr id="108" name="TextShape 1"/>
           <p:cNvSpPr txBox="1"/>
           <p:nvPr/>
         </p:nvSpPr>
-        <p:spPr>
+        <p:spPr bwMode="auto">
           <a:xfrm>
             <a:off x="457200" y="0"/>
             <a:ext cx="6019560" cy="837720"/>
@@ -6301,30 +5756,27 @@
           </a:bodyPr>
           <a:lstStyle/>
           <a:p>
-            <a:pPr algn="ctr"/>
-            <a:r>
-              <a:rPr lang="en-IN" sz="3200" dirty="0">
-                <a:latin typeface="Times New Roman" panose="02020603050405020304" pitchFamily="18" charset="0"/>
-                <a:cs typeface="Times New Roman" panose="02020603050405020304" pitchFamily="18" charset="0"/>
+            <a:pPr algn="ctr">
+              <a:defRPr/>
+            </a:pPr>
+            <a:r>
+              <a:rPr lang="en-IN" sz="3200">
+                <a:latin typeface="Times New Roman"/>
+                <a:cs typeface="Times New Roman"/>
               </a:rPr>
               <a:t>Conclusion</a:t>
             </a:r>
-          </a:p>
-        </p:txBody>
-      </p:sp>
-      <p:sp>
-        <p:nvSpPr>
-          <p:cNvPr id="110" name="TextShape 3">
-            <a:extLst>
-              <a:ext uri="{FF2B5EF4-FFF2-40B4-BE49-F238E27FC236}">
-                <a16:creationId xmlns:a16="http://schemas.microsoft.com/office/drawing/2014/main" id="{4DE5BB7A-E464-BD1E-AFC7-0DC0F2418050}"/>
-              </a:ext>
-            </a:extLst>
-          </p:cNvPr>
+            <a:endParaRPr/>
+          </a:p>
+        </p:txBody>
+      </p:sp>
+      <p:sp>
+        <p:nvSpPr>
+          <p:cNvPr id="110" name="TextShape 3"/>
           <p:cNvSpPr txBox="1"/>
           <p:nvPr/>
         </p:nvSpPr>
-        <p:spPr>
+        <p:spPr bwMode="auto">
           <a:xfrm>
             <a:off x="6553080" y="6356520"/>
             <a:ext cx="2133360" cy="364680"/>
@@ -6347,6 +5799,7 @@
               <a:lnSpc>
                 <a:spcPct val="100000"/>
               </a:lnSpc>
+              <a:defRPr/>
             </a:pPr>
             <a:fld id="{4D4FEEEE-7AC5-48A9-86F4-13448BE87B58}" type="slidenum">
               <a:rPr lang="en-US" sz="1200" b="1" strike="noStrike" spc="-1">
@@ -6356,12 +5809,7 @@
                 <a:latin typeface="Calibri"/>
                 <a:ea typeface="MS PGothic"/>
               </a:rPr>
-              <a:pPr algn="r">
-                <a:lnSpc>
-                  <a:spcPct val="100000"/>
-                </a:lnSpc>
-              </a:pPr>
-              <a:t>20</a:t>
+              <a:t/>
             </a:fld>
             <a:endParaRPr lang="en-GB" sz="1200" b="0" strike="noStrike" spc="-1">
               <a:latin typeface="Times New Roman"/>
@@ -6371,17 +5819,11 @@
       </p:sp>
       <p:sp>
         <p:nvSpPr>
-          <p:cNvPr id="5" name="TextShape 2">
-            <a:extLst>
-              <a:ext uri="{FF2B5EF4-FFF2-40B4-BE49-F238E27FC236}">
-                <a16:creationId xmlns:a16="http://schemas.microsoft.com/office/drawing/2014/main" id="{7317AACB-AA10-10F6-7678-B02CDB27C16E}"/>
-              </a:ext>
-            </a:extLst>
-          </p:cNvPr>
+          <p:cNvPr id="5" name="TextShape 2"/>
           <p:cNvSpPr txBox="1"/>
           <p:nvPr/>
         </p:nvSpPr>
-        <p:spPr>
+        <p:spPr bwMode="auto">
           <a:xfrm>
             <a:off x="164008" y="1109742"/>
             <a:ext cx="8903792" cy="4838571"/>
@@ -6400,171 +5842,253 @@
           </a:bodyPr>
           <a:lstStyle/>
           <a:p>
-            <a:r>
-              <a:rPr lang="en-IN" dirty="0"/>
+            <a:pPr>
+              <a:defRPr/>
+            </a:pPr>
+            <a:r>
+              <a:rPr lang="en-IN"/>
               <a:t>The strong performance of the </a:t>
             </a:r>
             <a:r>
-              <a:rPr lang="en-IN" dirty="0" err="1"/>
+              <a:rPr lang="en-IN"/>
               <a:t>RandomForest</a:t>
             </a:r>
             <a:r>
-              <a:rPr lang="en-IN" dirty="0"/>
+              <a:rPr lang="en-IN"/>
               <a:t> classifier demonstrates the importance of machine learning in strengthening cybersecurity systems. The ensemble learning capabilities of </a:t>
             </a:r>
             <a:r>
-              <a:rPr lang="en-IN" dirty="0" err="1"/>
+              <a:rPr lang="en-IN"/>
               <a:t>RandomForest</a:t>
             </a:r>
             <a:r>
-              <a:rPr lang="en-IN" dirty="0"/>
+              <a:rPr lang="en-IN"/>
               <a:t> contributed significantly to improving classification accuracy, reducing overfitting, and enhancing model reliability against evolving phishing strategies.</a:t>
             </a:r>
-          </a:p>
-          <a:p>
-            <a:r>
-              <a:rPr lang="en-IN" dirty="0"/>
+            <a:endParaRPr/>
+          </a:p>
+          <a:p>
+            <a:pPr>
+              <a:defRPr/>
+            </a:pPr>
+            <a:r>
+              <a:rPr lang="en-IN"/>
               <a:t> </a:t>
             </a:r>
-          </a:p>
-          <a:p>
-            <a:r>
-              <a:rPr lang="en-IN" dirty="0"/>
+            <a:endParaRPr/>
+          </a:p>
+          <a:p>
+            <a:pPr>
+              <a:defRPr/>
+            </a:pPr>
+            <a:r>
+              <a:rPr lang="en-IN"/>
               <a:t>However, technological solutions alone are not sufficient to completely eliminate phishing threats. User awareness and cybersecurity education remain equally important components of an effective </a:t>
             </a:r>
             <a:r>
-              <a:rPr lang="en-IN" dirty="0" err="1"/>
+              <a:rPr lang="en-IN"/>
               <a:t>defense</a:t>
             </a:r>
             <a:r>
-              <a:rPr lang="en-IN" dirty="0"/>
+              <a:rPr lang="en-IN"/>
               <a:t> strategy. Educating users about phishing indicators, suspicious URLs, fake communications, and safe online practices can substantially reduce the success rate of phishing attacks.</a:t>
             </a:r>
-          </a:p>
-          <a:p>
-            <a:r>
-              <a:rPr lang="en-IN" dirty="0"/>
+            <a:endParaRPr/>
+          </a:p>
+          <a:p>
+            <a:pPr>
+              <a:defRPr/>
+            </a:pPr>
+            <a:r>
+              <a:rPr lang="en-IN"/>
               <a:t> </a:t>
             </a:r>
-          </a:p>
-          <a:p>
-            <a:r>
-              <a:rPr lang="en-IN" dirty="0"/>
+            <a:endParaRPr/>
+          </a:p>
+          <a:p>
+            <a:pPr>
+              <a:defRPr/>
+            </a:pPr>
+            <a:r>
+              <a:rPr lang="en-IN"/>
               <a:t>Looking toward the future, continuous research and innovation are necessary to combat increasingly advanced phishing techniques. Future improvements may involve integrating real-time threat intelligence systems, advanced feature engineering methods, deep learning architectures, browser security extensions, and cloud-based phishing detection services. Collaboration among researchers, cybersecurity professionals, organizations, and users will play a vital role in enhancing digital trust and minimizing the impact of phishing attacks worldwide.</a:t>
             </a:r>
-          </a:p>
-          <a:p>
-            <a:r>
-              <a:rPr lang="en-IN" dirty="0"/>
+            <a:endParaRPr/>
+          </a:p>
+          <a:p>
+            <a:pPr>
+              <a:defRPr/>
+            </a:pPr>
+            <a:r>
+              <a:rPr lang="en-IN"/>
               <a:t> </a:t>
             </a:r>
-          </a:p>
-          <a:p>
-            <a:r>
-              <a:rPr lang="en-IN" dirty="0"/>
+            <a:endParaRPr/>
+          </a:p>
+          <a:p>
+            <a:pPr>
+              <a:defRPr/>
+            </a:pPr>
+            <a:r>
+              <a:rPr lang="en-IN"/>
               <a:t> </a:t>
             </a:r>
-          </a:p>
-          <a:p>
-            <a:r>
-              <a:rPr lang="en-IN" dirty="0"/>
+            <a:endParaRPr/>
+          </a:p>
+          <a:p>
+            <a:pPr>
+              <a:defRPr/>
+            </a:pPr>
+            <a:r>
+              <a:rPr lang="en-IN"/>
               <a:t> </a:t>
             </a:r>
-          </a:p>
-          <a:p>
-            <a:r>
-              <a:rPr lang="en-IN" dirty="0"/>
+            <a:endParaRPr/>
+          </a:p>
+          <a:p>
+            <a:pPr>
+              <a:defRPr/>
+            </a:pPr>
+            <a:r>
+              <a:rPr lang="en-IN"/>
               <a:t> </a:t>
             </a:r>
-          </a:p>
-          <a:p>
-            <a:r>
-              <a:rPr lang="en-IN" dirty="0"/>
+            <a:endParaRPr/>
+          </a:p>
+          <a:p>
+            <a:pPr>
+              <a:defRPr/>
+            </a:pPr>
+            <a:r>
+              <a:rPr lang="en-IN"/>
               <a:t> </a:t>
             </a:r>
-          </a:p>
-          <a:p>
-            <a:r>
-              <a:rPr lang="en-IN" dirty="0"/>
+            <a:endParaRPr/>
+          </a:p>
+          <a:p>
+            <a:pPr>
+              <a:defRPr/>
+            </a:pPr>
+            <a:r>
+              <a:rPr lang="en-IN"/>
               <a:t> </a:t>
             </a:r>
-          </a:p>
-          <a:p>
-            <a:r>
-              <a:rPr lang="en-IN" dirty="0"/>
+            <a:endParaRPr/>
+          </a:p>
+          <a:p>
+            <a:pPr>
+              <a:defRPr/>
+            </a:pPr>
+            <a:r>
+              <a:rPr lang="en-IN"/>
               <a:t> </a:t>
             </a:r>
-          </a:p>
-          <a:p>
-            <a:r>
-              <a:rPr lang="en-IN" dirty="0"/>
+            <a:endParaRPr/>
+          </a:p>
+          <a:p>
+            <a:pPr>
+              <a:defRPr/>
+            </a:pPr>
+            <a:r>
+              <a:rPr lang="en-IN"/>
               <a:t> </a:t>
             </a:r>
-          </a:p>
-          <a:p>
-            <a:r>
-              <a:rPr lang="en-IN" dirty="0"/>
+            <a:endParaRPr/>
+          </a:p>
+          <a:p>
+            <a:pPr>
+              <a:defRPr/>
+            </a:pPr>
+            <a:r>
+              <a:rPr lang="en-IN"/>
               <a:t> </a:t>
             </a:r>
-          </a:p>
-          <a:p>
-            <a:r>
-              <a:rPr lang="en-IN" dirty="0"/>
+            <a:endParaRPr/>
+          </a:p>
+          <a:p>
+            <a:pPr>
+              <a:defRPr/>
+            </a:pPr>
+            <a:r>
+              <a:rPr lang="en-IN"/>
               <a:t> </a:t>
             </a:r>
-          </a:p>
-          <a:p>
-            <a:r>
-              <a:rPr lang="en-IN" dirty="0"/>
+            <a:endParaRPr/>
+          </a:p>
+          <a:p>
+            <a:pPr>
+              <a:defRPr/>
+            </a:pPr>
+            <a:r>
+              <a:rPr lang="en-IN"/>
               <a:t> </a:t>
             </a:r>
-          </a:p>
-          <a:p>
-            <a:r>
-              <a:rPr lang="en-IN" dirty="0"/>
+            <a:endParaRPr/>
+          </a:p>
+          <a:p>
+            <a:pPr>
+              <a:defRPr/>
+            </a:pPr>
+            <a:r>
+              <a:rPr lang="en-IN"/>
               <a:t> </a:t>
             </a:r>
-          </a:p>
-          <a:p>
-            <a:r>
-              <a:rPr lang="en-IN" dirty="0"/>
+            <a:endParaRPr/>
+          </a:p>
+          <a:p>
+            <a:pPr>
+              <a:defRPr/>
+            </a:pPr>
+            <a:r>
+              <a:rPr lang="en-IN"/>
               <a:t> </a:t>
             </a:r>
-          </a:p>
-          <a:p>
-            <a:r>
-              <a:rPr lang="en-IN" dirty="0"/>
+            <a:endParaRPr/>
+          </a:p>
+          <a:p>
+            <a:pPr>
+              <a:defRPr/>
+            </a:pPr>
+            <a:r>
+              <a:rPr lang="en-IN"/>
               <a:t> </a:t>
             </a:r>
-          </a:p>
-          <a:p>
-            <a:endParaRPr lang="en-IN" dirty="0"/>
+            <a:endParaRPr/>
+          </a:p>
+          <a:p>
+            <a:pPr>
+              <a:defRPr/>
+            </a:pPr>
+            <a:endParaRPr lang="en-IN"/>
           </a:p>
         </p:txBody>
       </p:sp>
     </p:spTree>
-    <p:extLst>
-      <p:ext uri="{BB962C8B-B14F-4D97-AF65-F5344CB8AC3E}">
-        <p14:creationId xmlns:p14="http://schemas.microsoft.com/office/powerpoint/2010/main" val="1664362684"/>
-      </p:ext>
-    </p:extLst>
   </p:cSld>
   <p:clrMapOvr>
     <a:masterClrMapping/>
   </p:clrMapOvr>
+  <mc:AlternateContent xmlns:mc="http://schemas.openxmlformats.org/markup-compatibility/2006">
+    <mc:Choice xmlns:p14="http://schemas.microsoft.com/office/powerpoint/2010/main" Requires="p14">
+      <p:transition p14:dur="2000" advClick="1"/>
+    </mc:Choice>
+    <mc:Fallback>
+      <p:transition advClick="1"/>
+    </mc:Fallback>
+  </mc:AlternateContent>
 </p:sld>
 </file>
 
 <file path=ppt/slides/slide21.xml><?xml version="1.0" encoding="utf-8"?>
-<p:sld xmlns:a="http://schemas.openxmlformats.org/drawingml/2006/main" xmlns:r="http://schemas.openxmlformats.org/officeDocument/2006/relationships" xmlns:p="http://schemas.openxmlformats.org/presentationml/2006/main">
-  <p:cSld>
+<p:sld xmlns:a="http://schemas.openxmlformats.org/drawingml/2006/main" xmlns:r="http://schemas.openxmlformats.org/officeDocument/2006/relationships" xmlns:p="http://schemas.openxmlformats.org/presentationml/2006/main" xmlns:m="http://schemas.openxmlformats.org/officeDocument/2006/math" xmlns:w="http://schemas.openxmlformats.org/wordprocessingml/2006/main" showMasterPhAnim="0" show="1">
+  <p:cSld name="">
     <p:spTree>
       <p:nvGrpSpPr>
         <p:cNvPr id="1" name=""/>
         <p:cNvGrpSpPr/>
         <p:nvPr/>
       </p:nvGrpSpPr>
-      <p:grpSpPr>
+      <p:grpSpPr bwMode="auto">
         <a:xfrm>
           <a:off x="0" y="0"/>
           <a:ext cx="0" cy="0"/>
@@ -6578,7 +6102,7 @@
           <p:cNvSpPr txBox="1"/>
           <p:nvPr/>
         </p:nvSpPr>
-        <p:spPr>
+        <p:spPr bwMode="auto">
           <a:xfrm>
             <a:off x="1297577" y="2821578"/>
             <a:ext cx="6705599" cy="1410788"/>
@@ -6601,20 +6125,21 @@
               <a:lnSpc>
                 <a:spcPct val="100000"/>
               </a:lnSpc>
-            </a:pPr>
-            <a:r>
-              <a:rPr lang="en" sz="5400" dirty="0">
-                <a:latin typeface="Times New Roman" panose="02020603050405020304" pitchFamily="18" charset="0"/>
-                <a:cs typeface="Times New Roman" panose="02020603050405020304" pitchFamily="18" charset="0"/>
+              <a:defRPr/>
+            </a:pPr>
+            <a:r>
+              <a:rPr lang="en" sz="5400">
+                <a:latin typeface="Times New Roman"/>
+                <a:cs typeface="Times New Roman"/>
               </a:rPr>
               <a:t>Thank You</a:t>
             </a:r>
-            <a:endParaRPr lang="en-US" sz="5400" b="0" strike="noStrike" spc="-1" dirty="0">
+            <a:endParaRPr lang="en-US" sz="5400" b="0" strike="noStrike" spc="-1">
               <a:solidFill>
                 <a:srgbClr val="000000"/>
               </a:solidFill>
-              <a:latin typeface="Times New Roman" panose="02020603050405020304" pitchFamily="18" charset="0"/>
-              <a:cs typeface="Times New Roman" panose="02020603050405020304" pitchFamily="18" charset="0"/>
+              <a:latin typeface="Times New Roman"/>
+              <a:cs typeface="Times New Roman"/>
             </a:endParaRPr>
           </a:p>
         </p:txBody>
@@ -6625,7 +6150,7 @@
           <p:cNvSpPr txBox="1"/>
           <p:nvPr/>
         </p:nvSpPr>
-        <p:spPr>
+        <p:spPr bwMode="auto">
           <a:xfrm>
             <a:off x="6553080" y="6356520"/>
             <a:ext cx="2133360" cy="364680"/>
@@ -6648,6 +6173,7 @@
               <a:lnSpc>
                 <a:spcPct val="100000"/>
               </a:lnSpc>
+              <a:defRPr/>
             </a:pPr>
             <a:fld id="{4D4FEEEE-7AC5-48A9-86F4-13448BE87B58}" type="slidenum">
               <a:rPr lang="en-US" sz="1200" b="1" strike="noStrike" spc="-1">
@@ -6657,12 +6183,7 @@
                 <a:latin typeface="Calibri"/>
                 <a:ea typeface="MS PGothic"/>
               </a:rPr>
-              <a:pPr algn="r">
-                <a:lnSpc>
-                  <a:spcPct val="100000"/>
-                </a:lnSpc>
-              </a:pPr>
-              <a:t>21</a:t>
+              <a:t/>
             </a:fld>
             <a:endParaRPr lang="en-GB" sz="1200" b="0" strike="noStrike" spc="-1">
               <a:latin typeface="Times New Roman"/>
@@ -6671,34 +6192,31 @@
         </p:txBody>
       </p:sp>
     </p:spTree>
-    <p:extLst>
-      <p:ext uri="{BB962C8B-B14F-4D97-AF65-F5344CB8AC3E}">
-        <p14:creationId xmlns:p14="http://schemas.microsoft.com/office/powerpoint/2010/main" val="2834479809"/>
-      </p:ext>
-    </p:extLst>
   </p:cSld>
   <p:clrMapOvr>
     <a:masterClrMapping/>
   </p:clrMapOvr>
+  <mc:AlternateContent xmlns:mc="http://schemas.openxmlformats.org/markup-compatibility/2006">
+    <mc:Choice xmlns:p14="http://schemas.microsoft.com/office/powerpoint/2010/main" Requires="p14">
+      <p:transition p14:dur="2000" advClick="1"/>
+    </mc:Choice>
+    <mc:Fallback>
+      <p:transition advClick="1"/>
+    </mc:Fallback>
+  </mc:AlternateContent>
 </p:sld>
 </file>
 
 <file path=ppt/slides/slide3.xml><?xml version="1.0" encoding="utf-8"?>
-<p:sld xmlns:a="http://schemas.openxmlformats.org/drawingml/2006/main" xmlns:r="http://schemas.openxmlformats.org/officeDocument/2006/relationships" xmlns:p="http://schemas.openxmlformats.org/presentationml/2006/main">
-  <p:cSld>
+<p:sld xmlns:a="http://schemas.openxmlformats.org/drawingml/2006/main" xmlns:r="http://schemas.openxmlformats.org/officeDocument/2006/relationships" xmlns:p="http://schemas.openxmlformats.org/presentationml/2006/main" xmlns:m="http://schemas.openxmlformats.org/officeDocument/2006/math" xmlns:w="http://schemas.openxmlformats.org/wordprocessingml/2006/main" showMasterPhAnim="0" show="1">
+  <p:cSld name="">
     <p:spTree>
       <p:nvGrpSpPr>
-        <p:cNvPr id="1" name="">
-          <a:extLst>
-            <a:ext uri="{FF2B5EF4-FFF2-40B4-BE49-F238E27FC236}">
-              <a16:creationId xmlns:a16="http://schemas.microsoft.com/office/drawing/2014/main" id="{C2E2FC49-E83C-768F-0350-CFD3770DA01C}"/>
-            </a:ext>
-          </a:extLst>
-        </p:cNvPr>
+        <p:cNvPr id="1" name=""/>
         <p:cNvGrpSpPr/>
         <p:nvPr/>
       </p:nvGrpSpPr>
-      <p:grpSpPr>
+      <p:grpSpPr bwMode="auto">
         <a:xfrm>
           <a:off x="0" y="0"/>
           <a:ext cx="0" cy="0"/>
@@ -6708,17 +6226,11 @@
       </p:grpSpPr>
       <p:sp>
         <p:nvSpPr>
-          <p:cNvPr id="108" name="TextShape 1">
-            <a:extLst>
-              <a:ext uri="{FF2B5EF4-FFF2-40B4-BE49-F238E27FC236}">
-                <a16:creationId xmlns:a16="http://schemas.microsoft.com/office/drawing/2014/main" id="{834AE706-8B73-6474-F56D-8B29C11336F6}"/>
-              </a:ext>
-            </a:extLst>
-          </p:cNvPr>
+          <p:cNvPr id="108" name="TextShape 1"/>
           <p:cNvSpPr txBox="1"/>
           <p:nvPr/>
         </p:nvSpPr>
-        <p:spPr>
+        <p:spPr bwMode="auto">
           <a:xfrm>
             <a:off x="457200" y="0"/>
             <a:ext cx="6019560" cy="837720"/>
@@ -6741,37 +6253,32 @@
               <a:lnSpc>
                 <a:spcPct val="100000"/>
               </a:lnSpc>
-            </a:pPr>
-            <a:r>
-              <a:rPr lang="en" sz="3200" dirty="0">
-                <a:latin typeface="Times New Roman" panose="02020603050405020304" pitchFamily="18" charset="0"/>
-                <a:cs typeface="Times New Roman" panose="02020603050405020304" pitchFamily="18" charset="0"/>
+              <a:defRPr/>
+            </a:pPr>
+            <a:r>
+              <a:rPr lang="en" sz="3200">
+                <a:latin typeface="Times New Roman"/>
+                <a:cs typeface="Times New Roman"/>
               </a:rPr>
               <a:t>Introduction</a:t>
             </a:r>
-            <a:endParaRPr lang="en-US" sz="3000" b="0" strike="noStrike" spc="-1" dirty="0">
+            <a:endParaRPr lang="en-US" sz="3000" b="0" strike="noStrike" spc="-1">
               <a:solidFill>
                 <a:srgbClr val="000000"/>
               </a:solidFill>
-              <a:latin typeface="Times New Roman" panose="02020603050405020304" pitchFamily="18" charset="0"/>
-              <a:cs typeface="Times New Roman" panose="02020603050405020304" pitchFamily="18" charset="0"/>
-            </a:endParaRPr>
-          </a:p>
-        </p:txBody>
-      </p:sp>
-      <p:sp>
-        <p:nvSpPr>
-          <p:cNvPr id="110" name="TextShape 3">
-            <a:extLst>
-              <a:ext uri="{FF2B5EF4-FFF2-40B4-BE49-F238E27FC236}">
-                <a16:creationId xmlns:a16="http://schemas.microsoft.com/office/drawing/2014/main" id="{F6EF9AF5-382E-0E11-C5EE-8EC06C0EEEA0}"/>
-              </a:ext>
-            </a:extLst>
-          </p:cNvPr>
+              <a:latin typeface="Times New Roman"/>
+              <a:cs typeface="Times New Roman"/>
+            </a:endParaRPr>
+          </a:p>
+        </p:txBody>
+      </p:sp>
+      <p:sp>
+        <p:nvSpPr>
+          <p:cNvPr id="110" name="TextShape 3"/>
           <p:cNvSpPr txBox="1"/>
           <p:nvPr/>
         </p:nvSpPr>
-        <p:spPr>
+        <p:spPr bwMode="auto">
           <a:xfrm>
             <a:off x="6553080" y="6356520"/>
             <a:ext cx="2133360" cy="364680"/>
@@ -6794,6 +6301,7 @@
               <a:lnSpc>
                 <a:spcPct val="100000"/>
               </a:lnSpc>
+              <a:defRPr/>
             </a:pPr>
             <a:fld id="{4D4FEEEE-7AC5-48A9-86F4-13448BE87B58}" type="slidenum">
               <a:rPr lang="en-US" sz="1200" b="1" strike="noStrike" spc="-1">
@@ -6803,12 +6311,7 @@
                 <a:latin typeface="Calibri"/>
                 <a:ea typeface="MS PGothic"/>
               </a:rPr>
-              <a:pPr algn="r">
-                <a:lnSpc>
-                  <a:spcPct val="100000"/>
-                </a:lnSpc>
-              </a:pPr>
-              <a:t>3</a:t>
+              <a:t/>
             </a:fld>
             <a:endParaRPr lang="en-GB" sz="1200" b="0" strike="noStrike" spc="-1">
               <a:latin typeface="Times New Roman"/>
@@ -6818,17 +6321,11 @@
       </p:sp>
       <p:sp>
         <p:nvSpPr>
-          <p:cNvPr id="5" name="TextShape 2">
-            <a:extLst>
-              <a:ext uri="{FF2B5EF4-FFF2-40B4-BE49-F238E27FC236}">
-                <a16:creationId xmlns:a16="http://schemas.microsoft.com/office/drawing/2014/main" id="{7C8F6128-C965-B862-7C8B-3690CD6B0BF5}"/>
-              </a:ext>
-            </a:extLst>
-          </p:cNvPr>
+          <p:cNvPr id="5" name="TextShape 2"/>
           <p:cNvSpPr txBox="1"/>
           <p:nvPr/>
         </p:nvSpPr>
-        <p:spPr>
+        <p:spPr bwMode="auto">
           <a:xfrm>
             <a:off x="164008" y="1109742"/>
             <a:ext cx="8838720" cy="4838571"/>
@@ -6847,86 +6344,95 @@
           </a:bodyPr>
           <a:lstStyle/>
           <a:p>
-            <a:r>
-              <a:rPr lang="en-IN" dirty="0"/>
+            <a:pPr>
+              <a:defRPr/>
+            </a:pPr>
+            <a:r>
+              <a:rPr lang="en-IN"/>
               <a:t>To address this growing cybersecurity issue, detecting phishing URLs has become an essential security requirement. This project utilizes the </a:t>
             </a:r>
             <a:r>
-              <a:rPr lang="en-IN" dirty="0" err="1"/>
+              <a:rPr lang="en-IN"/>
               <a:t>RandomForest</a:t>
             </a:r>
             <a:r>
-              <a:rPr lang="en-IN" dirty="0"/>
+              <a:rPr lang="en-IN"/>
               <a:t> classifier, a powerful and efficient machine learning algorithm capable of </a:t>
             </a:r>
             <a:r>
-              <a:rPr lang="en-IN" dirty="0" err="1"/>
+              <a:rPr lang="en-IN"/>
               <a:t>analyzing</a:t>
             </a:r>
             <a:r>
-              <a:rPr lang="en-IN" dirty="0"/>
+              <a:rPr lang="en-IN"/>
               <a:t> a diverse set of URL-based and website-related features. The extracted features include URL structure analysis, domain-related characteristics, SSL certificate validation, suspicious webpage </a:t>
             </a:r>
             <a:r>
-              <a:rPr lang="en-IN" dirty="0" err="1"/>
+              <a:rPr lang="en-IN"/>
               <a:t>behaviors</a:t>
             </a:r>
             <a:r>
-              <a:rPr lang="en-IN" dirty="0"/>
+              <a:rPr lang="en-IN"/>
               <a:t>, redirection patterns, and abnormal webpage attributes. The </a:t>
             </a:r>
             <a:r>
-              <a:rPr lang="en-IN" dirty="0" err="1"/>
+              <a:rPr lang="en-IN"/>
               <a:t>RandomForest</a:t>
             </a:r>
             <a:r>
-              <a:rPr lang="en-IN" dirty="0"/>
+              <a:rPr lang="en-IN"/>
               <a:t> algorithm operates through an ensemble of multiple decision trees, where each tree independently evaluates the input features and contributes to the final prediction. This ensemble voting mechanism improves classification accuracy and enhances resistance against overfitting, making the model highly reliable for phishing detection tasks.</a:t>
             </a:r>
-          </a:p>
-          <a:p>
-            <a:r>
-              <a:rPr lang="en-IN" dirty="0"/>
+            <a:endParaRPr/>
+          </a:p>
+          <a:p>
+            <a:pPr>
+              <a:defRPr/>
+            </a:pPr>
+            <a:r>
+              <a:rPr lang="en-IN"/>
               <a:t> </a:t>
             </a:r>
-          </a:p>
-          <a:p>
-            <a:r>
-              <a:rPr lang="en-IN" dirty="0"/>
+            <a:endParaRPr/>
+          </a:p>
+          <a:p>
+            <a:pPr>
+              <a:defRPr/>
+            </a:pPr>
+            <a:r>
+              <a:rPr lang="en-IN"/>
               <a:t>By integrating detailed feature extraction techniques with advanced machine learning methodologies, this project aims to strengthen online security by accurately identifying and mitigating phishing threats. The proposed system provides an intelligent and automated mechanism for detecting malicious URLs before users interact with them. Future improvements to the system may include the integration of real-time URL verification APIs, enhanced feature engineering techniques, deep learning-based detection methods, and browser extensions that provide instant phishing alerts for seamless user protection against emerging cyber threats.</a:t>
             </a:r>
+            <a:endParaRPr/>
           </a:p>
         </p:txBody>
       </p:sp>
     </p:spTree>
-    <p:extLst>
-      <p:ext uri="{BB962C8B-B14F-4D97-AF65-F5344CB8AC3E}">
-        <p14:creationId xmlns:p14="http://schemas.microsoft.com/office/powerpoint/2010/main" val="2647144701"/>
-      </p:ext>
-    </p:extLst>
   </p:cSld>
   <p:clrMapOvr>
     <a:masterClrMapping/>
   </p:clrMapOvr>
+  <mc:AlternateContent xmlns:mc="http://schemas.openxmlformats.org/markup-compatibility/2006">
+    <mc:Choice xmlns:p14="http://schemas.microsoft.com/office/powerpoint/2010/main" Requires="p14">
+      <p:transition p14:dur="2000" advClick="1"/>
+    </mc:Choice>
+    <mc:Fallback>
+      <p:transition advClick="1"/>
+    </mc:Fallback>
+  </mc:AlternateContent>
 </p:sld>
 </file>
 
 <file path=ppt/slides/slide4.xml><?xml version="1.0" encoding="utf-8"?>
-<p:sld xmlns:a="http://schemas.openxmlformats.org/drawingml/2006/main" xmlns:r="http://schemas.openxmlformats.org/officeDocument/2006/relationships" xmlns:p="http://schemas.openxmlformats.org/presentationml/2006/main">
-  <p:cSld>
+<p:sld xmlns:a="http://schemas.openxmlformats.org/drawingml/2006/main" xmlns:r="http://schemas.openxmlformats.org/officeDocument/2006/relationships" xmlns:p="http://schemas.openxmlformats.org/presentationml/2006/main" xmlns:m="http://schemas.openxmlformats.org/officeDocument/2006/math" xmlns:w="http://schemas.openxmlformats.org/wordprocessingml/2006/main" showMasterPhAnim="0" show="1">
+  <p:cSld name="">
     <p:spTree>
       <p:nvGrpSpPr>
-        <p:cNvPr id="1" name="">
-          <a:extLst>
-            <a:ext uri="{FF2B5EF4-FFF2-40B4-BE49-F238E27FC236}">
-              <a16:creationId xmlns:a16="http://schemas.microsoft.com/office/drawing/2014/main" id="{20718EDA-58AA-76A8-740C-A608ADB6021E}"/>
-            </a:ext>
-          </a:extLst>
-        </p:cNvPr>
+        <p:cNvPr id="1" name=""/>
         <p:cNvGrpSpPr/>
         <p:nvPr/>
       </p:nvGrpSpPr>
-      <p:grpSpPr>
+      <p:grpSpPr bwMode="auto">
         <a:xfrm>
           <a:off x="0" y="0"/>
           <a:ext cx="0" cy="0"/>
@@ -6936,17 +6442,11 @@
       </p:grpSpPr>
       <p:sp>
         <p:nvSpPr>
-          <p:cNvPr id="108" name="TextShape 1">
-            <a:extLst>
-              <a:ext uri="{FF2B5EF4-FFF2-40B4-BE49-F238E27FC236}">
-                <a16:creationId xmlns:a16="http://schemas.microsoft.com/office/drawing/2014/main" id="{A74F02AE-79D9-2B0E-73F1-C6B25815DDDE}"/>
-              </a:ext>
-            </a:extLst>
-          </p:cNvPr>
+          <p:cNvPr id="108" name="TextShape 1"/>
           <p:cNvSpPr txBox="1"/>
           <p:nvPr/>
         </p:nvSpPr>
-        <p:spPr>
+        <p:spPr bwMode="auto">
           <a:xfrm>
             <a:off x="457200" y="0"/>
             <a:ext cx="6019560" cy="837720"/>
@@ -6969,37 +6469,32 @@
               <a:lnSpc>
                 <a:spcPct val="100000"/>
               </a:lnSpc>
-            </a:pPr>
-            <a:r>
-              <a:rPr lang="en-IN" sz="3200" dirty="0">
-                <a:latin typeface="Times New Roman" panose="02020603050405020304" pitchFamily="18" charset="0"/>
-                <a:cs typeface="Times New Roman" panose="02020603050405020304" pitchFamily="18" charset="0"/>
+              <a:defRPr/>
+            </a:pPr>
+            <a:r>
+              <a:rPr lang="en-IN" sz="3200">
+                <a:latin typeface="Times New Roman"/>
+                <a:cs typeface="Times New Roman"/>
               </a:rPr>
               <a:t>Literature Survey</a:t>
             </a:r>
-            <a:endParaRPr lang="en-US" sz="3200" strike="noStrike" spc="-1" dirty="0">
+            <a:endParaRPr lang="en-US" sz="3200" strike="noStrike" spc="-1">
               <a:solidFill>
                 <a:srgbClr val="000000"/>
               </a:solidFill>
-              <a:latin typeface="Times New Roman" panose="02020603050405020304" pitchFamily="18" charset="0"/>
-              <a:cs typeface="Times New Roman" panose="02020603050405020304" pitchFamily="18" charset="0"/>
-            </a:endParaRPr>
-          </a:p>
-        </p:txBody>
-      </p:sp>
-      <p:sp>
-        <p:nvSpPr>
-          <p:cNvPr id="110" name="TextShape 3">
-            <a:extLst>
-              <a:ext uri="{FF2B5EF4-FFF2-40B4-BE49-F238E27FC236}">
-                <a16:creationId xmlns:a16="http://schemas.microsoft.com/office/drawing/2014/main" id="{FA370610-4EDC-9890-FBA8-80A8EC51B49F}"/>
-              </a:ext>
-            </a:extLst>
-          </p:cNvPr>
+              <a:latin typeface="Times New Roman"/>
+              <a:cs typeface="Times New Roman"/>
+            </a:endParaRPr>
+          </a:p>
+        </p:txBody>
+      </p:sp>
+      <p:sp>
+        <p:nvSpPr>
+          <p:cNvPr id="110" name="TextShape 3"/>
           <p:cNvSpPr txBox="1"/>
           <p:nvPr/>
         </p:nvSpPr>
-        <p:spPr>
+        <p:spPr bwMode="auto">
           <a:xfrm>
             <a:off x="6553080" y="6356520"/>
             <a:ext cx="2133360" cy="364680"/>
@@ -7022,6 +6517,7 @@
               <a:lnSpc>
                 <a:spcPct val="100000"/>
               </a:lnSpc>
+              <a:defRPr/>
             </a:pPr>
             <a:fld id="{4D4FEEEE-7AC5-48A9-86F4-13448BE87B58}" type="slidenum">
               <a:rPr lang="en-US" sz="1200" b="1" strike="noStrike" spc="-1">
@@ -7031,12 +6527,7 @@
                 <a:latin typeface="Calibri"/>
                 <a:ea typeface="MS PGothic"/>
               </a:rPr>
-              <a:pPr algn="r">
-                <a:lnSpc>
-                  <a:spcPct val="100000"/>
-                </a:lnSpc>
-              </a:pPr>
-              <a:t>4</a:t>
+              <a:t/>
             </a:fld>
             <a:endParaRPr lang="en-GB" sz="1200" b="0" strike="noStrike" spc="-1">
               <a:latin typeface="Times New Roman"/>
@@ -7046,17 +6537,11 @@
       </p:sp>
       <p:sp>
         <p:nvSpPr>
-          <p:cNvPr id="5" name="TextShape 2">
-            <a:extLst>
-              <a:ext uri="{FF2B5EF4-FFF2-40B4-BE49-F238E27FC236}">
-                <a16:creationId xmlns:a16="http://schemas.microsoft.com/office/drawing/2014/main" id="{F5092D0C-12F3-5D3C-7ABB-FEFA1262362A}"/>
-              </a:ext>
-            </a:extLst>
-          </p:cNvPr>
+          <p:cNvPr id="5" name="TextShape 2"/>
           <p:cNvSpPr txBox="1"/>
           <p:nvPr/>
         </p:nvSpPr>
-        <p:spPr>
+        <p:spPr bwMode="auto">
           <a:xfrm>
             <a:off x="152640" y="1360114"/>
             <a:ext cx="4604417" cy="4838571"/>
@@ -7075,22 +6560,20 @@
           </a:bodyPr>
           <a:lstStyle/>
           <a:p>
-            <a:r>
-              <a:rPr lang="en-IN" dirty="0"/>
+            <a:pPr>
+              <a:defRPr/>
+            </a:pPr>
+            <a:r>
+              <a:rPr lang="en-IN"/>
               <a:t>Phishing has emerged as a major cybersecurity challenge in the digital era, where attackers create fraudulent websites and deceptive communications to trick users into sharing sensitive information. Due to the increasing number and complexity of phishing attacks, researchers have explored various machine learning and data mining techniques to improve phishing website detection systems. This literature survey examines different methodologies, detection approaches, feature selection techniques, and experimental findings proposed by researchers in the field of phishing detection.</a:t>
             </a:r>
+            <a:endParaRPr/>
           </a:p>
         </p:txBody>
       </p:sp>
       <p:pic>
         <p:nvPicPr>
-          <p:cNvPr id="3" name="Picture 2">
-            <a:extLst>
-              <a:ext uri="{FF2B5EF4-FFF2-40B4-BE49-F238E27FC236}">
-                <a16:creationId xmlns:a16="http://schemas.microsoft.com/office/drawing/2014/main" id="{5AB9385E-AAEF-4B6F-08C0-9948341B4274}"/>
-              </a:ext>
-            </a:extLst>
-          </p:cNvPr>
+          <p:cNvPr id="3" name="Picture 2"/>
           <p:cNvPicPr>
             <a:picLocks noChangeAspect="1"/>
           </p:cNvPicPr>
@@ -7098,11 +6581,9 @@
         </p:nvPicPr>
         <p:blipFill>
           <a:blip r:embed="rId2"/>
-          <a:stretch>
-            <a:fillRect/>
-          </a:stretch>
+          <a:stretch/>
         </p:blipFill>
-        <p:spPr>
+        <p:spPr bwMode="auto">
           <a:xfrm>
             <a:off x="4798480" y="1398642"/>
             <a:ext cx="4098940" cy="4208330"/>
@@ -7113,34 +6594,31 @@
         </p:spPr>
       </p:pic>
     </p:spTree>
-    <p:extLst>
-      <p:ext uri="{BB962C8B-B14F-4D97-AF65-F5344CB8AC3E}">
-        <p14:creationId xmlns:p14="http://schemas.microsoft.com/office/powerpoint/2010/main" val="2710921896"/>
-      </p:ext>
-    </p:extLst>
   </p:cSld>
   <p:clrMapOvr>
     <a:masterClrMapping/>
   </p:clrMapOvr>
+  <mc:AlternateContent xmlns:mc="http://schemas.openxmlformats.org/markup-compatibility/2006">
+    <mc:Choice xmlns:p14="http://schemas.microsoft.com/office/powerpoint/2010/main" Requires="p14">
+      <p:transition p14:dur="2000" advClick="1"/>
+    </mc:Choice>
+    <mc:Fallback>
+      <p:transition advClick="1"/>
+    </mc:Fallback>
+  </mc:AlternateContent>
 </p:sld>
 </file>
 
 <file path=ppt/slides/slide5.xml><?xml version="1.0" encoding="utf-8"?>
-<p:sld xmlns:a="http://schemas.openxmlformats.org/drawingml/2006/main" xmlns:r="http://schemas.openxmlformats.org/officeDocument/2006/relationships" xmlns:p="http://schemas.openxmlformats.org/presentationml/2006/main">
-  <p:cSld>
+<p:sld xmlns:a="http://schemas.openxmlformats.org/drawingml/2006/main" xmlns:r="http://schemas.openxmlformats.org/officeDocument/2006/relationships" xmlns:p="http://schemas.openxmlformats.org/presentationml/2006/main" xmlns:m="http://schemas.openxmlformats.org/officeDocument/2006/math" xmlns:w="http://schemas.openxmlformats.org/wordprocessingml/2006/main" showMasterPhAnim="0" show="1">
+  <p:cSld name="">
     <p:spTree>
       <p:nvGrpSpPr>
-        <p:cNvPr id="1" name="">
-          <a:extLst>
-            <a:ext uri="{FF2B5EF4-FFF2-40B4-BE49-F238E27FC236}">
-              <a16:creationId xmlns:a16="http://schemas.microsoft.com/office/drawing/2014/main" id="{1D160BC6-A435-6614-EE73-77479377951D}"/>
-            </a:ext>
-          </a:extLst>
-        </p:cNvPr>
+        <p:cNvPr id="1" name=""/>
         <p:cNvGrpSpPr/>
         <p:nvPr/>
       </p:nvGrpSpPr>
-      <p:grpSpPr>
+      <p:grpSpPr bwMode="auto">
         <a:xfrm>
           <a:off x="0" y="0"/>
           <a:ext cx="0" cy="0"/>
@@ -7150,17 +6628,11 @@
       </p:grpSpPr>
       <p:sp>
         <p:nvSpPr>
-          <p:cNvPr id="108" name="TextShape 1">
-            <a:extLst>
-              <a:ext uri="{FF2B5EF4-FFF2-40B4-BE49-F238E27FC236}">
-                <a16:creationId xmlns:a16="http://schemas.microsoft.com/office/drawing/2014/main" id="{7097DCD0-AF70-9A0D-8EE7-A2AEF5A45AF7}"/>
-              </a:ext>
-            </a:extLst>
-          </p:cNvPr>
+          <p:cNvPr id="108" name="TextShape 1"/>
           <p:cNvSpPr txBox="1"/>
           <p:nvPr/>
         </p:nvSpPr>
-        <p:spPr>
+        <p:spPr bwMode="auto">
           <a:xfrm>
             <a:off x="457200" y="0"/>
             <a:ext cx="6019560" cy="837720"/>
@@ -7183,37 +6655,32 @@
               <a:lnSpc>
                 <a:spcPct val="100000"/>
               </a:lnSpc>
-            </a:pPr>
-            <a:r>
-              <a:rPr lang="en-IN" sz="3200" dirty="0">
-                <a:latin typeface="Times New Roman" panose="02020603050405020304" pitchFamily="18" charset="0"/>
-                <a:cs typeface="Times New Roman" panose="02020603050405020304" pitchFamily="18" charset="0"/>
+              <a:defRPr/>
+            </a:pPr>
+            <a:r>
+              <a:rPr lang="en-IN" sz="3200">
+                <a:latin typeface="Times New Roman"/>
+                <a:cs typeface="Times New Roman"/>
               </a:rPr>
               <a:t>Literature Survey</a:t>
             </a:r>
-            <a:endParaRPr lang="en-US" sz="3200" strike="noStrike" spc="-1" dirty="0">
+            <a:endParaRPr lang="en-US" sz="3200" strike="noStrike" spc="-1">
               <a:solidFill>
                 <a:srgbClr val="000000"/>
               </a:solidFill>
-              <a:latin typeface="Times New Roman" panose="02020603050405020304" pitchFamily="18" charset="0"/>
-              <a:cs typeface="Times New Roman" panose="02020603050405020304" pitchFamily="18" charset="0"/>
-            </a:endParaRPr>
-          </a:p>
-        </p:txBody>
-      </p:sp>
-      <p:sp>
-        <p:nvSpPr>
-          <p:cNvPr id="110" name="TextShape 3">
-            <a:extLst>
-              <a:ext uri="{FF2B5EF4-FFF2-40B4-BE49-F238E27FC236}">
-                <a16:creationId xmlns:a16="http://schemas.microsoft.com/office/drawing/2014/main" id="{8D36C34F-F9BE-E526-FEB7-2E718A84BE2B}"/>
-              </a:ext>
-            </a:extLst>
-          </p:cNvPr>
+              <a:latin typeface="Times New Roman"/>
+              <a:cs typeface="Times New Roman"/>
+            </a:endParaRPr>
+          </a:p>
+        </p:txBody>
+      </p:sp>
+      <p:sp>
+        <p:nvSpPr>
+          <p:cNvPr id="110" name="TextShape 3"/>
           <p:cNvSpPr txBox="1"/>
           <p:nvPr/>
         </p:nvSpPr>
-        <p:spPr>
+        <p:spPr bwMode="auto">
           <a:xfrm>
             <a:off x="6553080" y="6356520"/>
             <a:ext cx="2133360" cy="364680"/>
@@ -7236,6 +6703,7 @@
               <a:lnSpc>
                 <a:spcPct val="100000"/>
               </a:lnSpc>
+              <a:defRPr/>
             </a:pPr>
             <a:fld id="{4D4FEEEE-7AC5-48A9-86F4-13448BE87B58}" type="slidenum">
               <a:rPr lang="en-US" sz="1200" b="1" strike="noStrike" spc="-1">
@@ -7245,12 +6713,7 @@
                 <a:latin typeface="Calibri"/>
                 <a:ea typeface="MS PGothic"/>
               </a:rPr>
-              <a:pPr algn="r">
-                <a:lnSpc>
-                  <a:spcPct val="100000"/>
-                </a:lnSpc>
-              </a:pPr>
-              <a:t>5</a:t>
+              <a:t/>
             </a:fld>
             <a:endParaRPr lang="en-GB" sz="1200" b="0" strike="noStrike" spc="-1">
               <a:latin typeface="Times New Roman"/>
@@ -7260,17 +6723,11 @@
       </p:sp>
       <p:sp>
         <p:nvSpPr>
-          <p:cNvPr id="5" name="TextShape 2">
-            <a:extLst>
-              <a:ext uri="{FF2B5EF4-FFF2-40B4-BE49-F238E27FC236}">
-                <a16:creationId xmlns:a16="http://schemas.microsoft.com/office/drawing/2014/main" id="{783C8F6F-760A-F58E-C9B0-4C6AA3CFD6AC}"/>
-              </a:ext>
-            </a:extLst>
-          </p:cNvPr>
+          <p:cNvPr id="5" name="TextShape 2"/>
           <p:cNvSpPr txBox="1"/>
           <p:nvPr/>
         </p:nvSpPr>
-        <p:spPr>
+        <p:spPr bwMode="auto">
           <a:xfrm>
             <a:off x="164008" y="1109742"/>
             <a:ext cx="8903792" cy="4838571"/>
@@ -7289,130 +6746,167 @@
           </a:bodyPr>
           <a:lstStyle/>
           <a:p>
-            <a:r>
-              <a:rPr lang="en-IN" b="1" dirty="0"/>
+            <a:pPr>
+              <a:defRPr/>
+            </a:pPr>
+            <a:r>
+              <a:rPr lang="en-IN" b="1"/>
               <a:t>Detection Techniques:</a:t>
             </a:r>
-            <a:endParaRPr lang="en-IN" dirty="0"/>
-          </a:p>
-          <a:p>
-            <a:r>
-              <a:rPr lang="en-IN" dirty="0"/>
+            <a:endParaRPr lang="en-IN"/>
+          </a:p>
+          <a:p>
+            <a:pPr>
+              <a:defRPr/>
+            </a:pPr>
+            <a:r>
+              <a:rPr lang="en-IN"/>
               <a:t> </a:t>
             </a:r>
-          </a:p>
-          <a:p>
-            <a:pPr lvl="0"/>
-            <a:r>
-              <a:rPr lang="en-IN" dirty="0"/>
+            <a:endParaRPr/>
+          </a:p>
+          <a:p>
+            <a:pPr lvl="0">
+              <a:defRPr/>
+            </a:pPr>
+            <a:r>
+              <a:rPr lang="en-IN"/>
               <a:t>Domain-based Features:</a:t>
             </a:r>
-          </a:p>
-          <a:p>
-            <a:r>
-              <a:rPr lang="en-IN" dirty="0"/>
+            <a:endParaRPr/>
+          </a:p>
+          <a:p>
+            <a:pPr>
+              <a:defRPr/>
+            </a:pPr>
+            <a:r>
+              <a:rPr lang="en-IN"/>
               <a:t>Hossein Shirazi proposed an unbiased phishing detection mechanism using domain name–based characteristics such as domain age, registration details, and domain structure analysis [3].</a:t>
             </a:r>
-          </a:p>
-          <a:p>
-            <a:r>
-              <a:rPr lang="en-IN" dirty="0"/>
+            <a:endParaRPr/>
+          </a:p>
+          <a:p>
+            <a:pPr>
+              <a:defRPr/>
+            </a:pPr>
+            <a:r>
+              <a:rPr lang="en-IN"/>
               <a:t> </a:t>
             </a:r>
-          </a:p>
-          <a:p>
-            <a:pPr lvl="0"/>
-            <a:r>
-              <a:rPr lang="en-IN" dirty="0"/>
+            <a:endParaRPr/>
+          </a:p>
+          <a:p>
+            <a:pPr lvl="0">
+              <a:defRPr/>
+            </a:pPr>
+            <a:r>
+              <a:rPr lang="en-IN"/>
               <a:t>Hybrid SVM and KNN:</a:t>
             </a:r>
-          </a:p>
-          <a:p>
-            <a:r>
-              <a:rPr lang="en-IN" dirty="0"/>
+            <a:endParaRPr/>
+          </a:p>
+          <a:p>
+            <a:pPr>
+              <a:defRPr/>
+            </a:pPr>
+            <a:r>
+              <a:rPr lang="en-IN"/>
               <a:t> </a:t>
             </a:r>
             <a:r>
-              <a:rPr lang="en-IN" dirty="0" err="1"/>
+              <a:rPr lang="en-IN"/>
               <a:t>Altyeb</a:t>
             </a:r>
             <a:r>
-              <a:rPr lang="en-IN" dirty="0"/>
+              <a:rPr lang="en-IN"/>
               <a:t> Altaher introduced a hybrid classification model that combines Support Vector Machine (SVM) and K-Nearest </a:t>
             </a:r>
             <a:r>
-              <a:rPr lang="en-IN" dirty="0" err="1"/>
+              <a:rPr lang="en-IN"/>
               <a:t>Neighbor</a:t>
             </a:r>
             <a:r>
-              <a:rPr lang="en-IN" dirty="0"/>
+              <a:rPr lang="en-IN"/>
               <a:t> (KNN) algorithms to improve phishing website classification accuracy [4].</a:t>
             </a:r>
-          </a:p>
-          <a:p>
-            <a:r>
-              <a:rPr lang="en-IN" dirty="0"/>
+            <a:endParaRPr/>
+          </a:p>
+          <a:p>
+            <a:pPr>
+              <a:defRPr/>
+            </a:pPr>
+            <a:r>
+              <a:rPr lang="en-IN"/>
               <a:t> </a:t>
             </a:r>
-          </a:p>
-          <a:p>
-            <a:pPr lvl="0"/>
-            <a:r>
-              <a:rPr lang="en-IN" dirty="0"/>
+            <a:endParaRPr/>
+          </a:p>
+          <a:p>
+            <a:pPr lvl="0">
+              <a:defRPr/>
+            </a:pPr>
+            <a:r>
+              <a:rPr lang="en-IN"/>
               <a:t>Content Consistency:</a:t>
             </a:r>
-          </a:p>
-          <a:p>
-            <a:r>
-              <a:rPr lang="en-IN" dirty="0"/>
+            <a:endParaRPr/>
+          </a:p>
+          <a:p>
+            <a:pPr>
+              <a:defRPr/>
+            </a:pPr>
+            <a:r>
+              <a:rPr lang="en-IN"/>
               <a:t> Chen et al. developed a phishing detection approach based on </a:t>
             </a:r>
             <a:r>
-              <a:rPr lang="en-IN" dirty="0" err="1"/>
+              <a:rPr lang="en-IN"/>
               <a:t>analyzing</a:t>
             </a:r>
             <a:r>
-              <a:rPr lang="en-IN" dirty="0"/>
+              <a:rPr lang="en-IN"/>
               <a:t> the consistency between webpage content and domain information to identify fraudulent websites [5].</a:t>
             </a:r>
-          </a:p>
-          <a:p>
-            <a:r>
-              <a:rPr lang="en-IN" dirty="0"/>
+            <a:endParaRPr/>
+          </a:p>
+          <a:p>
+            <a:pPr>
+              <a:defRPr/>
+            </a:pPr>
+            <a:r>
+              <a:rPr lang="en-IN"/>
               <a:t> </a:t>
             </a:r>
+            <a:endParaRPr/>
           </a:p>
         </p:txBody>
       </p:sp>
     </p:spTree>
-    <p:extLst>
-      <p:ext uri="{BB962C8B-B14F-4D97-AF65-F5344CB8AC3E}">
-        <p14:creationId xmlns:p14="http://schemas.microsoft.com/office/powerpoint/2010/main" val="2180564775"/>
-      </p:ext>
-    </p:extLst>
   </p:cSld>
   <p:clrMapOvr>
     <a:masterClrMapping/>
   </p:clrMapOvr>
+  <mc:AlternateContent xmlns:mc="http://schemas.openxmlformats.org/markup-compatibility/2006">
+    <mc:Choice xmlns:p14="http://schemas.microsoft.com/office/powerpoint/2010/main" Requires="p14">
+      <p:transition p14:dur="2000" advClick="1"/>
+    </mc:Choice>
+    <mc:Fallback>
+      <p:transition advClick="1"/>
+    </mc:Fallback>
+  </mc:AlternateContent>
 </p:sld>
 </file>
 
 <file path=ppt/slides/slide6.xml><?xml version="1.0" encoding="utf-8"?>
-<p:sld xmlns:a="http://schemas.openxmlformats.org/drawingml/2006/main" xmlns:r="http://schemas.openxmlformats.org/officeDocument/2006/relationships" xmlns:p="http://schemas.openxmlformats.org/presentationml/2006/main">
-  <p:cSld>
+<p:sld xmlns:a="http://schemas.openxmlformats.org/drawingml/2006/main" xmlns:r="http://schemas.openxmlformats.org/officeDocument/2006/relationships" xmlns:p="http://schemas.openxmlformats.org/presentationml/2006/main" xmlns:m="http://schemas.openxmlformats.org/officeDocument/2006/math" xmlns:w="http://schemas.openxmlformats.org/wordprocessingml/2006/main" showMasterPhAnim="0" show="1">
+  <p:cSld name="">
     <p:spTree>
       <p:nvGrpSpPr>
-        <p:cNvPr id="1" name="">
-          <a:extLst>
-            <a:ext uri="{FF2B5EF4-FFF2-40B4-BE49-F238E27FC236}">
-              <a16:creationId xmlns:a16="http://schemas.microsoft.com/office/drawing/2014/main" id="{0DD8CEF9-0F7B-0BFF-DBBA-BE54898CA0D4}"/>
-            </a:ext>
-          </a:extLst>
-        </p:cNvPr>
+        <p:cNvPr id="1" name=""/>
         <p:cNvGrpSpPr/>
         <p:nvPr/>
       </p:nvGrpSpPr>
-      <p:grpSpPr>
+      <p:grpSpPr bwMode="auto">
         <a:xfrm>
           <a:off x="0" y="0"/>
           <a:ext cx="0" cy="0"/>
@@ -7422,17 +6916,11 @@
       </p:grpSpPr>
       <p:sp>
         <p:nvSpPr>
-          <p:cNvPr id="108" name="TextShape 1">
-            <a:extLst>
-              <a:ext uri="{FF2B5EF4-FFF2-40B4-BE49-F238E27FC236}">
-                <a16:creationId xmlns:a16="http://schemas.microsoft.com/office/drawing/2014/main" id="{CCD0BA11-682E-DB08-164A-5C0B3F2926E4}"/>
-              </a:ext>
-            </a:extLst>
-          </p:cNvPr>
+          <p:cNvPr id="108" name="TextShape 1"/>
           <p:cNvSpPr txBox="1"/>
           <p:nvPr/>
         </p:nvSpPr>
-        <p:spPr>
+        <p:spPr bwMode="auto">
           <a:xfrm>
             <a:off x="457200" y="0"/>
             <a:ext cx="6019560" cy="837720"/>
@@ -7455,37 +6943,32 @@
               <a:lnSpc>
                 <a:spcPct val="100000"/>
               </a:lnSpc>
-            </a:pPr>
-            <a:r>
-              <a:rPr lang="en-IN" sz="3200" dirty="0">
-                <a:latin typeface="Times New Roman" panose="02020603050405020304" pitchFamily="18" charset="0"/>
-                <a:cs typeface="Times New Roman" panose="02020603050405020304" pitchFamily="18" charset="0"/>
+              <a:defRPr/>
+            </a:pPr>
+            <a:r>
+              <a:rPr lang="en-IN" sz="3200">
+                <a:latin typeface="Times New Roman"/>
+                <a:cs typeface="Times New Roman"/>
               </a:rPr>
               <a:t>Literature Survey</a:t>
             </a:r>
-            <a:endParaRPr lang="en-US" sz="3200" strike="noStrike" spc="-1" dirty="0">
+            <a:endParaRPr lang="en-US" sz="3200" strike="noStrike" spc="-1">
               <a:solidFill>
                 <a:srgbClr val="000000"/>
               </a:solidFill>
-              <a:latin typeface="Times New Roman" panose="02020603050405020304" pitchFamily="18" charset="0"/>
-              <a:cs typeface="Times New Roman" panose="02020603050405020304" pitchFamily="18" charset="0"/>
-            </a:endParaRPr>
-          </a:p>
-        </p:txBody>
-      </p:sp>
-      <p:sp>
-        <p:nvSpPr>
-          <p:cNvPr id="110" name="TextShape 3">
-            <a:extLst>
-              <a:ext uri="{FF2B5EF4-FFF2-40B4-BE49-F238E27FC236}">
-                <a16:creationId xmlns:a16="http://schemas.microsoft.com/office/drawing/2014/main" id="{BF115C0B-9CAB-937A-6A82-EB7E0751D035}"/>
-              </a:ext>
-            </a:extLst>
-          </p:cNvPr>
+              <a:latin typeface="Times New Roman"/>
+              <a:cs typeface="Times New Roman"/>
+            </a:endParaRPr>
+          </a:p>
+        </p:txBody>
+      </p:sp>
+      <p:sp>
+        <p:nvSpPr>
+          <p:cNvPr id="110" name="TextShape 3"/>
           <p:cNvSpPr txBox="1"/>
           <p:nvPr/>
         </p:nvSpPr>
-        <p:spPr>
+        <p:spPr bwMode="auto">
           <a:xfrm>
             <a:off x="6553080" y="6356520"/>
             <a:ext cx="2133360" cy="364680"/>
@@ -7508,6 +6991,7 @@
               <a:lnSpc>
                 <a:spcPct val="100000"/>
               </a:lnSpc>
+              <a:defRPr/>
             </a:pPr>
             <a:fld id="{4D4FEEEE-7AC5-48A9-86F4-13448BE87B58}" type="slidenum">
               <a:rPr lang="en-US" sz="1200" b="1" strike="noStrike" spc="-1">
@@ -7517,12 +7001,7 @@
                 <a:latin typeface="Calibri"/>
                 <a:ea typeface="MS PGothic"/>
               </a:rPr>
-              <a:pPr algn="r">
-                <a:lnSpc>
-                  <a:spcPct val="100000"/>
-                </a:lnSpc>
-              </a:pPr>
-              <a:t>6</a:t>
+              <a:t/>
             </a:fld>
             <a:endParaRPr lang="en-GB" sz="1200" b="0" strike="noStrike" spc="-1">
               <a:latin typeface="Times New Roman"/>
@@ -7532,17 +7011,11 @@
       </p:sp>
       <p:sp>
         <p:nvSpPr>
-          <p:cNvPr id="5" name="TextShape 2">
-            <a:extLst>
-              <a:ext uri="{FF2B5EF4-FFF2-40B4-BE49-F238E27FC236}">
-                <a16:creationId xmlns:a16="http://schemas.microsoft.com/office/drawing/2014/main" id="{FB4450B2-D76A-A066-B7D3-49799A650575}"/>
-              </a:ext>
-            </a:extLst>
-          </p:cNvPr>
+          <p:cNvPr id="5" name="TextShape 2"/>
           <p:cNvSpPr txBox="1"/>
           <p:nvPr/>
         </p:nvSpPr>
-        <p:spPr>
+        <p:spPr bwMode="auto">
           <a:xfrm>
             <a:off x="164008" y="1109742"/>
             <a:ext cx="8903792" cy="5486267"/>
@@ -7561,151 +7034,203 @@
           </a:bodyPr>
           <a:lstStyle/>
           <a:p>
-            <a:pPr lvl="0"/>
-            <a:r>
-              <a:rPr lang="en-IN" dirty="0"/>
+            <a:pPr lvl="0">
+              <a:defRPr/>
+            </a:pPr>
+            <a:r>
+              <a:rPr lang="en-IN"/>
               <a:t>Associative Classification:</a:t>
             </a:r>
-          </a:p>
-          <a:p>
-            <a:r>
-              <a:rPr lang="en-IN" dirty="0"/>
+            <a:endParaRPr/>
+          </a:p>
+          <a:p>
+            <a:pPr>
+              <a:defRPr/>
+            </a:pPr>
+            <a:r>
+              <a:rPr lang="en-IN"/>
               <a:t>Abdelhamid et al. employed associative classification and data mining techniques to discover phishing-related rules and patterns for improved detection performance [6].</a:t>
             </a:r>
-          </a:p>
-          <a:p>
-            <a:r>
-              <a:rPr lang="en-IN" dirty="0"/>
+            <a:endParaRPr/>
+          </a:p>
+          <a:p>
+            <a:pPr>
+              <a:defRPr/>
+            </a:pPr>
+            <a:r>
+              <a:rPr lang="en-IN"/>
               <a:t> </a:t>
             </a:r>
-          </a:p>
-          <a:p>
-            <a:pPr lvl="0"/>
-            <a:r>
-              <a:rPr lang="en-IN" dirty="0"/>
+            <a:endParaRPr/>
+          </a:p>
+          <a:p>
+            <a:pPr lvl="0">
+              <a:defRPr/>
+            </a:pPr>
+            <a:r>
+              <a:rPr lang="en-IN"/>
               <a:t>Rule-Based Methods:</a:t>
             </a:r>
-          </a:p>
-          <a:p>
-            <a:r>
-              <a:rPr lang="en-IN" dirty="0"/>
+            <a:endParaRPr/>
+          </a:p>
+          <a:p>
+            <a:pPr>
+              <a:defRPr/>
+            </a:pPr>
+            <a:r>
+              <a:rPr lang="en-IN"/>
               <a:t>Moghimi and </a:t>
             </a:r>
             <a:r>
-              <a:rPr lang="en-IN" dirty="0" err="1"/>
+              <a:rPr lang="en-IN"/>
               <a:t>Varjani</a:t>
             </a:r>
             <a:r>
-              <a:rPr lang="en-IN" dirty="0"/>
+              <a:rPr lang="en-IN"/>
               <a:t> proposed a rule-based phishing detection framework that uses predefined rules and heuristic indicators to identify suspicious websites [7].</a:t>
             </a:r>
-          </a:p>
-          <a:p>
-            <a:r>
-              <a:rPr lang="en-IN" dirty="0"/>
+            <a:endParaRPr/>
+          </a:p>
+          <a:p>
+            <a:pPr>
+              <a:defRPr/>
+            </a:pPr>
+            <a:r>
+              <a:rPr lang="en-IN"/>
               <a:t> </a:t>
             </a:r>
-          </a:p>
-          <a:p>
-            <a:pPr lvl="0"/>
-            <a:r>
-              <a:rPr lang="en-IN" dirty="0"/>
+            <a:endParaRPr/>
+          </a:p>
+          <a:p>
+            <a:pPr lvl="0">
+              <a:defRPr/>
+            </a:pPr>
+            <a:r>
+              <a:rPr lang="en-IN"/>
               <a:t>Fuzzy Data Mining:</a:t>
             </a:r>
-          </a:p>
-          <a:p>
-            <a:r>
-              <a:rPr lang="en-IN" dirty="0" err="1"/>
+            <a:endParaRPr/>
+          </a:p>
+          <a:p>
+            <a:pPr>
+              <a:defRPr/>
+            </a:pPr>
+            <a:r>
+              <a:rPr lang="en-IN"/>
               <a:t>Aburrous</a:t>
             </a:r>
             <a:r>
-              <a:rPr lang="en-IN" dirty="0"/>
+              <a:rPr lang="en-IN"/>
               <a:t> et al. utilized fuzzy logic and fuzzy data mining techniques to handle uncertain and ambiguous phishing data, especially in e-banking environments [8].</a:t>
             </a:r>
-          </a:p>
-          <a:p>
-            <a:r>
-              <a:rPr lang="en-IN" dirty="0"/>
+            <a:endParaRPr/>
+          </a:p>
+          <a:p>
+            <a:pPr>
+              <a:defRPr/>
+            </a:pPr>
+            <a:r>
+              <a:rPr lang="en-IN"/>
               <a:t> </a:t>
             </a:r>
-          </a:p>
-          <a:p>
-            <a:pPr lvl="0"/>
-            <a:r>
-              <a:rPr lang="en-IN" dirty="0"/>
+            <a:endParaRPr/>
+          </a:p>
+          <a:p>
+            <a:pPr lvl="0">
+              <a:defRPr/>
+            </a:pPr>
+            <a:r>
+              <a:rPr lang="en-IN"/>
               <a:t>Heuristic Approaches:</a:t>
             </a:r>
-          </a:p>
-          <a:p>
-            <a:r>
-              <a:rPr lang="en-IN" dirty="0"/>
+            <a:endParaRPr/>
+          </a:p>
+          <a:p>
+            <a:pPr>
+              <a:defRPr/>
+            </a:pPr>
+            <a:r>
+              <a:rPr lang="en-IN"/>
               <a:t>Solanki et al. and Lee et al. proposed heuristic-based phishing detection systems that </a:t>
             </a:r>
             <a:r>
-              <a:rPr lang="en-IN" dirty="0" err="1"/>
+              <a:rPr lang="en-IN"/>
               <a:t>analyze</a:t>
             </a:r>
             <a:r>
-              <a:rPr lang="en-IN" dirty="0"/>
+              <a:rPr lang="en-IN"/>
               <a:t> suspicious URL patterns and webpage characteristics [10], [11].</a:t>
             </a:r>
-          </a:p>
-          <a:p>
-            <a:r>
-              <a:rPr lang="en-IN" dirty="0"/>
+            <a:endParaRPr/>
+          </a:p>
+          <a:p>
+            <a:pPr>
+              <a:defRPr/>
+            </a:pPr>
+            <a:r>
+              <a:rPr lang="en-IN"/>
               <a:t> </a:t>
             </a:r>
-          </a:p>
-          <a:p>
-            <a:pPr lvl="0"/>
-            <a:r>
-              <a:rPr lang="en-IN" dirty="0"/>
+            <a:endParaRPr/>
+          </a:p>
+          <a:p>
+            <a:pPr lvl="0">
+              <a:defRPr/>
+            </a:pPr>
+            <a:r>
+              <a:rPr lang="en-IN"/>
               <a:t>Logo Utilization:</a:t>
             </a:r>
-          </a:p>
-          <a:p>
-            <a:r>
-              <a:rPr lang="en-IN" dirty="0"/>
+            <a:endParaRPr/>
+          </a:p>
+          <a:p>
+            <a:pPr>
+              <a:defRPr/>
+            </a:pPr>
+            <a:r>
+              <a:rPr lang="en-IN"/>
               <a:t>Chiew et al. introduced a phishing detection mechanism that uses website logos and visual similarity analysis to verify website authenticity [9].</a:t>
             </a:r>
-          </a:p>
-          <a:p>
-            <a:r>
-              <a:rPr lang="en-IN" dirty="0"/>
+            <a:endParaRPr/>
+          </a:p>
+          <a:p>
+            <a:pPr>
+              <a:defRPr/>
+            </a:pPr>
+            <a:r>
+              <a:rPr lang="en-IN"/>
               <a:t> </a:t>
             </a:r>
+            <a:endParaRPr/>
           </a:p>
         </p:txBody>
       </p:sp>
     </p:spTree>
-    <p:extLst>
-      <p:ext uri="{BB962C8B-B14F-4D97-AF65-F5344CB8AC3E}">
-        <p14:creationId xmlns:p14="http://schemas.microsoft.com/office/powerpoint/2010/main" val="3869344552"/>
-      </p:ext>
-    </p:extLst>
   </p:cSld>
   <p:clrMapOvr>
     <a:masterClrMapping/>
   </p:clrMapOvr>
+  <mc:AlternateContent xmlns:mc="http://schemas.openxmlformats.org/markup-compatibility/2006">
+    <mc:Choice xmlns:p14="http://schemas.microsoft.com/office/powerpoint/2010/main" Requires="p14">
+      <p:transition p14:dur="2000" advClick="1"/>
+    </mc:Choice>
+    <mc:Fallback>
+      <p:transition advClick="1"/>
+    </mc:Fallback>
+  </mc:AlternateContent>
 </p:sld>
 </file>
 
 <file path=ppt/slides/slide7.xml><?xml version="1.0" encoding="utf-8"?>
-<p:sld xmlns:a="http://schemas.openxmlformats.org/drawingml/2006/main" xmlns:r="http://schemas.openxmlformats.org/officeDocument/2006/relationships" xmlns:p="http://schemas.openxmlformats.org/presentationml/2006/main">
-  <p:cSld>
+<p:sld xmlns:a="http://schemas.openxmlformats.org/drawingml/2006/main" xmlns:r="http://schemas.openxmlformats.org/officeDocument/2006/relationships" xmlns:p="http://schemas.openxmlformats.org/presentationml/2006/main" xmlns:m="http://schemas.openxmlformats.org/officeDocument/2006/math" xmlns:w="http://schemas.openxmlformats.org/wordprocessingml/2006/main" showMasterPhAnim="0" show="1">
+  <p:cSld name="">
     <p:spTree>
       <p:nvGrpSpPr>
-        <p:cNvPr id="1" name="">
-          <a:extLst>
-            <a:ext uri="{FF2B5EF4-FFF2-40B4-BE49-F238E27FC236}">
-              <a16:creationId xmlns:a16="http://schemas.microsoft.com/office/drawing/2014/main" id="{3084D5B2-A6C2-DA32-806C-B02F2E716531}"/>
-            </a:ext>
-          </a:extLst>
-        </p:cNvPr>
+        <p:cNvPr id="1" name=""/>
         <p:cNvGrpSpPr/>
         <p:nvPr/>
       </p:nvGrpSpPr>
-      <p:grpSpPr>
+      <p:grpSpPr bwMode="auto">
         <a:xfrm>
           <a:off x="0" y="0"/>
           <a:ext cx="0" cy="0"/>
@@ -7715,17 +7240,11 @@
       </p:grpSpPr>
       <p:sp>
         <p:nvSpPr>
-          <p:cNvPr id="108" name="TextShape 1">
-            <a:extLst>
-              <a:ext uri="{FF2B5EF4-FFF2-40B4-BE49-F238E27FC236}">
-                <a16:creationId xmlns:a16="http://schemas.microsoft.com/office/drawing/2014/main" id="{42468832-1B3B-2D36-D322-B5A0579478AA}"/>
-              </a:ext>
-            </a:extLst>
-          </p:cNvPr>
+          <p:cNvPr id="108" name="TextShape 1"/>
           <p:cNvSpPr txBox="1"/>
           <p:nvPr/>
         </p:nvSpPr>
-        <p:spPr>
+        <p:spPr bwMode="auto">
           <a:xfrm>
             <a:off x="457200" y="0"/>
             <a:ext cx="6019560" cy="837720"/>
@@ -7748,37 +7267,32 @@
               <a:lnSpc>
                 <a:spcPct val="100000"/>
               </a:lnSpc>
-            </a:pPr>
-            <a:r>
-              <a:rPr lang="en-IN" sz="3200" dirty="0">
-                <a:latin typeface="Times New Roman" panose="02020603050405020304" pitchFamily="18" charset="0"/>
-                <a:cs typeface="Times New Roman" panose="02020603050405020304" pitchFamily="18" charset="0"/>
+              <a:defRPr/>
+            </a:pPr>
+            <a:r>
+              <a:rPr lang="en-IN" sz="3200">
+                <a:latin typeface="Times New Roman"/>
+                <a:cs typeface="Times New Roman"/>
               </a:rPr>
               <a:t>Literature Survey</a:t>
             </a:r>
-            <a:endParaRPr lang="en-US" sz="3200" strike="noStrike" spc="-1" dirty="0">
+            <a:endParaRPr lang="en-US" sz="3200" strike="noStrike" spc="-1">
               <a:solidFill>
                 <a:srgbClr val="000000"/>
               </a:solidFill>
-              <a:latin typeface="Times New Roman" panose="02020603050405020304" pitchFamily="18" charset="0"/>
-              <a:cs typeface="Times New Roman" panose="02020603050405020304" pitchFamily="18" charset="0"/>
-            </a:endParaRPr>
-          </a:p>
-        </p:txBody>
-      </p:sp>
-      <p:sp>
-        <p:nvSpPr>
-          <p:cNvPr id="110" name="TextShape 3">
-            <a:extLst>
-              <a:ext uri="{FF2B5EF4-FFF2-40B4-BE49-F238E27FC236}">
-                <a16:creationId xmlns:a16="http://schemas.microsoft.com/office/drawing/2014/main" id="{F7428B28-2706-69D7-0EDE-09804B19F9E8}"/>
-              </a:ext>
-            </a:extLst>
-          </p:cNvPr>
+              <a:latin typeface="Times New Roman"/>
+              <a:cs typeface="Times New Roman"/>
+            </a:endParaRPr>
+          </a:p>
+        </p:txBody>
+      </p:sp>
+      <p:sp>
+        <p:nvSpPr>
+          <p:cNvPr id="110" name="TextShape 3"/>
           <p:cNvSpPr txBox="1"/>
           <p:nvPr/>
         </p:nvSpPr>
-        <p:spPr>
+        <p:spPr bwMode="auto">
           <a:xfrm>
             <a:off x="6553080" y="6356520"/>
             <a:ext cx="2133360" cy="364680"/>
@@ -7801,6 +7315,7 @@
               <a:lnSpc>
                 <a:spcPct val="100000"/>
               </a:lnSpc>
+              <a:defRPr/>
             </a:pPr>
             <a:fld id="{4D4FEEEE-7AC5-48A9-86F4-13448BE87B58}" type="slidenum">
               <a:rPr lang="en-US" sz="1200" b="1" strike="noStrike" spc="-1">
@@ -7810,12 +7325,7 @@
                 <a:latin typeface="Calibri"/>
                 <a:ea typeface="MS PGothic"/>
               </a:rPr>
-              <a:pPr algn="r">
-                <a:lnSpc>
-                  <a:spcPct val="100000"/>
-                </a:lnSpc>
-              </a:pPr>
-              <a:t>7</a:t>
+              <a:t/>
             </a:fld>
             <a:endParaRPr lang="en-GB" sz="1200" b="0" strike="noStrike" spc="-1">
               <a:latin typeface="Times New Roman"/>
@@ -7825,17 +7335,11 @@
       </p:sp>
       <p:sp>
         <p:nvSpPr>
-          <p:cNvPr id="5" name="TextShape 2">
-            <a:extLst>
-              <a:ext uri="{FF2B5EF4-FFF2-40B4-BE49-F238E27FC236}">
-                <a16:creationId xmlns:a16="http://schemas.microsoft.com/office/drawing/2014/main" id="{EB1B48C1-0B82-A246-556E-6DD057DE1DD9}"/>
-              </a:ext>
-            </a:extLst>
-          </p:cNvPr>
+          <p:cNvPr id="5" name="TextShape 2"/>
           <p:cNvSpPr txBox="1"/>
           <p:nvPr/>
         </p:nvSpPr>
-        <p:spPr>
+        <p:spPr bwMode="auto">
           <a:xfrm>
             <a:off x="164008" y="1109742"/>
             <a:ext cx="8903792" cy="4838571"/>
@@ -7854,143 +7358,187 @@
           </a:bodyPr>
           <a:lstStyle/>
           <a:p>
-            <a:r>
-              <a:rPr lang="en-IN" b="1" dirty="0"/>
+            <a:pPr>
+              <a:defRPr/>
+            </a:pPr>
+            <a:r>
+              <a:rPr lang="en-IN" b="1"/>
               <a:t>Machine Learning Techniques:</a:t>
             </a:r>
-            <a:endParaRPr lang="en-IN" dirty="0"/>
-          </a:p>
-          <a:p>
-            <a:r>
-              <a:rPr lang="en-IN" dirty="0"/>
+            <a:endParaRPr lang="en-IN"/>
+          </a:p>
+          <a:p>
+            <a:pPr>
+              <a:defRPr/>
+            </a:pPr>
+            <a:r>
+              <a:rPr lang="en-IN"/>
               <a:t> </a:t>
             </a:r>
-          </a:p>
-          <a:p>
-            <a:pPr lvl="0"/>
-            <a:r>
-              <a:rPr lang="en-IN" dirty="0"/>
+            <a:endParaRPr/>
+          </a:p>
+          <a:p>
+            <a:pPr lvl="0">
+              <a:defRPr/>
+            </a:pPr>
+            <a:r>
+              <a:rPr lang="en-IN"/>
               <a:t>URL Analysis:</a:t>
             </a:r>
-          </a:p>
-          <a:p>
-            <a:r>
-              <a:rPr lang="en-IN" dirty="0"/>
+            <a:endParaRPr/>
+          </a:p>
+          <a:p>
+            <a:pPr>
+              <a:defRPr/>
+            </a:pPr>
+            <a:r>
+              <a:rPr lang="en-IN"/>
               <a:t>  Basnet and </a:t>
             </a:r>
             <a:r>
-              <a:rPr lang="en-IN" dirty="0" err="1"/>
+              <a:rPr lang="en-IN"/>
               <a:t>Doleck</a:t>
             </a:r>
             <a:r>
-              <a:rPr lang="en-IN" dirty="0"/>
+              <a:rPr lang="en-IN"/>
               <a:t> implemented machine learning approaches for detecting phishing URLs by </a:t>
             </a:r>
             <a:r>
-              <a:rPr lang="en-IN" dirty="0" err="1"/>
+              <a:rPr lang="en-IN"/>
               <a:t>analyzing</a:t>
             </a:r>
             <a:r>
-              <a:rPr lang="en-IN" dirty="0"/>
+              <a:rPr lang="en-IN"/>
               <a:t> URL-based features and suspicious structures [12].</a:t>
             </a:r>
-          </a:p>
-          <a:p>
-            <a:r>
-              <a:rPr lang="en-IN" dirty="0"/>
+            <a:endParaRPr/>
+          </a:p>
+          <a:p>
+            <a:pPr>
+              <a:defRPr/>
+            </a:pPr>
+            <a:r>
+              <a:rPr lang="en-IN"/>
               <a:t> </a:t>
             </a:r>
-          </a:p>
-          <a:p>
-            <a:pPr lvl="0"/>
-            <a:r>
-              <a:rPr lang="en-IN" dirty="0"/>
+            <a:endParaRPr/>
+          </a:p>
+          <a:p>
+            <a:pPr lvl="0">
+              <a:defRPr/>
+            </a:pPr>
+            <a:r>
+              <a:rPr lang="en-IN"/>
               <a:t>Efficiency-Oriented Detection:</a:t>
             </a:r>
-          </a:p>
-          <a:p>
-            <a:r>
-              <a:rPr lang="en-IN" dirty="0"/>
+            <a:endParaRPr/>
+          </a:p>
+          <a:p>
+            <a:pPr>
+              <a:defRPr/>
+            </a:pPr>
+            <a:r>
+              <a:rPr lang="en-IN"/>
               <a:t>  Gu et al. proposed an efficient phishing website detection framework designed to improve computational performance while maintaining detection accuracy [13].</a:t>
             </a:r>
-          </a:p>
-          <a:p>
-            <a:r>
-              <a:rPr lang="en-IN" dirty="0"/>
+            <a:endParaRPr/>
+          </a:p>
+          <a:p>
+            <a:pPr>
+              <a:defRPr/>
+            </a:pPr>
+            <a:r>
+              <a:rPr lang="en-IN"/>
               <a:t> </a:t>
             </a:r>
-          </a:p>
-          <a:p>
-            <a:pPr lvl="0"/>
-            <a:r>
-              <a:rPr lang="en-IN" dirty="0"/>
+            <a:endParaRPr/>
+          </a:p>
+          <a:p>
+            <a:pPr lvl="0">
+              <a:defRPr/>
+            </a:pPr>
+            <a:r>
+              <a:rPr lang="en-IN"/>
               <a:t>Ensemble Feature Selection:</a:t>
             </a:r>
-          </a:p>
-          <a:p>
-            <a:r>
-              <a:rPr lang="en-IN" dirty="0"/>
+            <a:endParaRPr/>
+          </a:p>
+          <a:p>
+            <a:pPr>
+              <a:defRPr/>
+            </a:pPr>
+            <a:r>
+              <a:rPr lang="en-IN"/>
               <a:t>  Chiew et al. developed a hybrid ensemble feature selection framework that enhances machine learning performance in phishing detection systems [14].</a:t>
             </a:r>
-          </a:p>
-          <a:p>
-            <a:r>
-              <a:rPr lang="en-IN" dirty="0"/>
+            <a:endParaRPr/>
+          </a:p>
+          <a:p>
+            <a:pPr>
+              <a:defRPr/>
+            </a:pPr>
+            <a:r>
+              <a:rPr lang="en-IN"/>
               <a:t> </a:t>
             </a:r>
-          </a:p>
-          <a:p>
-            <a:pPr lvl="0"/>
-            <a:r>
-              <a:rPr lang="en-IN" dirty="0"/>
+            <a:endParaRPr/>
+          </a:p>
+          <a:p>
+            <a:pPr lvl="0">
+              <a:defRPr/>
+            </a:pPr>
+            <a:r>
+              <a:rPr lang="en-IN"/>
               <a:t>Feature Selection Using Fuzzy Rough Set Theory:</a:t>
             </a:r>
-          </a:p>
-          <a:p>
-            <a:r>
-              <a:rPr lang="en-IN" dirty="0"/>
+            <a:endParaRPr/>
+          </a:p>
+          <a:p>
+            <a:pPr>
+              <a:defRPr/>
+            </a:pPr>
+            <a:r>
+              <a:rPr lang="en-IN"/>
               <a:t>  </a:t>
             </a:r>
             <a:r>
-              <a:rPr lang="en-IN" dirty="0" err="1"/>
+              <a:rPr lang="en-IN"/>
               <a:t>Zabihimayvan</a:t>
             </a:r>
             <a:r>
-              <a:rPr lang="en-IN" dirty="0"/>
+              <a:rPr lang="en-IN"/>
               <a:t> and Doran applied fuzzy rough set theory to select the most relevant features, thereby improving phishing attack detection efficiency and accuracy [15].</a:t>
             </a:r>
+            <a:endParaRPr/>
           </a:p>
         </p:txBody>
       </p:sp>
     </p:spTree>
-    <p:extLst>
-      <p:ext uri="{BB962C8B-B14F-4D97-AF65-F5344CB8AC3E}">
-        <p14:creationId xmlns:p14="http://schemas.microsoft.com/office/powerpoint/2010/main" val="1585835349"/>
-      </p:ext>
-    </p:extLst>
   </p:cSld>
   <p:clrMapOvr>
     <a:masterClrMapping/>
   </p:clrMapOvr>
+  <mc:AlternateContent xmlns:mc="http://schemas.openxmlformats.org/markup-compatibility/2006">
+    <mc:Choice xmlns:p14="http://schemas.microsoft.com/office/powerpoint/2010/main" Requires="p14">
+      <p:transition p14:dur="2000" advClick="1"/>
+    </mc:Choice>
+    <mc:Fallback>
+      <p:transition advClick="1"/>
+    </mc:Fallback>
+  </mc:AlternateContent>
 </p:sld>
 </file>
 
 <file path=ppt/slides/slide8.xml><?xml version="1.0" encoding="utf-8"?>
-<p:sld xmlns:a="http://schemas.openxmlformats.org/drawingml/2006/main" xmlns:r="http://schemas.openxmlformats.org/officeDocument/2006/relationships" xmlns:p="http://schemas.openxmlformats.org/presentationml/2006/main">
-  <p:cSld>
+<p:sld xmlns:a="http://schemas.openxmlformats.org/drawingml/2006/main" xmlns:r="http://schemas.openxmlformats.org/officeDocument/2006/relationships" xmlns:p="http://schemas.openxmlformats.org/presentationml/2006/main" xmlns:m="http://schemas.openxmlformats.org/officeDocument/2006/math" xmlns:w="http://schemas.openxmlformats.org/wordprocessingml/2006/main" showMasterPhAnim="0" show="1">
+  <p:cSld name="">
     <p:spTree>
       <p:nvGrpSpPr>
-        <p:cNvPr id="1" name="">
-          <a:extLst>
-            <a:ext uri="{FF2B5EF4-FFF2-40B4-BE49-F238E27FC236}">
-              <a16:creationId xmlns:a16="http://schemas.microsoft.com/office/drawing/2014/main" id="{333B78E3-6327-F13D-E6AA-581760A0F924}"/>
-            </a:ext>
-          </a:extLst>
-        </p:cNvPr>
+        <p:cNvPr id="1" name=""/>
         <p:cNvGrpSpPr/>
         <p:nvPr/>
       </p:nvGrpSpPr>
-      <p:grpSpPr>
+      <p:grpSpPr bwMode="auto">
         <a:xfrm>
           <a:off x="0" y="0"/>
           <a:ext cx="0" cy="0"/>
@@ -8000,17 +7548,11 @@
       </p:grpSpPr>
       <p:sp>
         <p:nvSpPr>
-          <p:cNvPr id="108" name="TextShape 1">
-            <a:extLst>
-              <a:ext uri="{FF2B5EF4-FFF2-40B4-BE49-F238E27FC236}">
-                <a16:creationId xmlns:a16="http://schemas.microsoft.com/office/drawing/2014/main" id="{BAE94AC0-5AB2-916E-9F84-C48253EC17E4}"/>
-              </a:ext>
-            </a:extLst>
-          </p:cNvPr>
+          <p:cNvPr id="108" name="TextShape 1"/>
           <p:cNvSpPr txBox="1"/>
           <p:nvPr/>
         </p:nvSpPr>
-        <p:spPr>
+        <p:spPr bwMode="auto">
           <a:xfrm>
             <a:off x="457200" y="0"/>
             <a:ext cx="6019560" cy="837720"/>
@@ -8033,37 +7575,32 @@
               <a:lnSpc>
                 <a:spcPct val="100000"/>
               </a:lnSpc>
-            </a:pPr>
-            <a:r>
-              <a:rPr lang="en-IN" sz="3200" dirty="0">
-                <a:latin typeface="Times New Roman" panose="02020603050405020304" pitchFamily="18" charset="0"/>
-                <a:cs typeface="Times New Roman" panose="02020603050405020304" pitchFamily="18" charset="0"/>
+              <a:defRPr/>
+            </a:pPr>
+            <a:r>
+              <a:rPr lang="en-IN" sz="3200">
+                <a:latin typeface="Times New Roman"/>
+                <a:cs typeface="Times New Roman"/>
               </a:rPr>
               <a:t>Literature Survey</a:t>
             </a:r>
-            <a:endParaRPr lang="en-US" sz="3200" strike="noStrike" spc="-1" dirty="0">
+            <a:endParaRPr lang="en-US" sz="3200" strike="noStrike" spc="-1">
               <a:solidFill>
                 <a:srgbClr val="000000"/>
               </a:solidFill>
-              <a:latin typeface="Times New Roman" panose="02020603050405020304" pitchFamily="18" charset="0"/>
-              <a:cs typeface="Times New Roman" panose="02020603050405020304" pitchFamily="18" charset="0"/>
-            </a:endParaRPr>
-          </a:p>
-        </p:txBody>
-      </p:sp>
-      <p:sp>
-        <p:nvSpPr>
-          <p:cNvPr id="110" name="TextShape 3">
-            <a:extLst>
-              <a:ext uri="{FF2B5EF4-FFF2-40B4-BE49-F238E27FC236}">
-                <a16:creationId xmlns:a16="http://schemas.microsoft.com/office/drawing/2014/main" id="{533F7F9A-3B13-0F39-AF13-EA71FD1B5D91}"/>
-              </a:ext>
-            </a:extLst>
-          </p:cNvPr>
+              <a:latin typeface="Times New Roman"/>
+              <a:cs typeface="Times New Roman"/>
+            </a:endParaRPr>
+          </a:p>
+        </p:txBody>
+      </p:sp>
+      <p:sp>
+        <p:nvSpPr>
+          <p:cNvPr id="110" name="TextShape 3"/>
           <p:cNvSpPr txBox="1"/>
           <p:nvPr/>
         </p:nvSpPr>
-        <p:spPr>
+        <p:spPr bwMode="auto">
           <a:xfrm>
             <a:off x="6553080" y="6356520"/>
             <a:ext cx="2133360" cy="364680"/>
@@ -8086,6 +7623,7 @@
               <a:lnSpc>
                 <a:spcPct val="100000"/>
               </a:lnSpc>
+              <a:defRPr/>
             </a:pPr>
             <a:fld id="{4D4FEEEE-7AC5-48A9-86F4-13448BE87B58}" type="slidenum">
               <a:rPr lang="en-US" sz="1200" b="1" strike="noStrike" spc="-1">
@@ -8095,12 +7633,7 @@
                 <a:latin typeface="Calibri"/>
                 <a:ea typeface="MS PGothic"/>
               </a:rPr>
-              <a:pPr algn="r">
-                <a:lnSpc>
-                  <a:spcPct val="100000"/>
-                </a:lnSpc>
-              </a:pPr>
-              <a:t>8</a:t>
+              <a:t/>
             </a:fld>
             <a:endParaRPr lang="en-GB" sz="1200" b="0" strike="noStrike" spc="-1">
               <a:latin typeface="Times New Roman"/>
@@ -8110,17 +7643,11 @@
       </p:sp>
       <p:sp>
         <p:nvSpPr>
-          <p:cNvPr id="5" name="TextShape 2">
-            <a:extLst>
-              <a:ext uri="{FF2B5EF4-FFF2-40B4-BE49-F238E27FC236}">
-                <a16:creationId xmlns:a16="http://schemas.microsoft.com/office/drawing/2014/main" id="{71F819F5-4684-D03E-22F9-83CA9F02AA01}"/>
-              </a:ext>
-            </a:extLst>
-          </p:cNvPr>
+          <p:cNvPr id="5" name="TextShape 2"/>
           <p:cNvSpPr txBox="1"/>
           <p:nvPr/>
         </p:nvSpPr>
-        <p:spPr>
+        <p:spPr bwMode="auto">
           <a:xfrm>
             <a:off x="164008" y="1109742"/>
             <a:ext cx="8903792" cy="4838571"/>
@@ -8139,102 +7666,125 @@
           </a:bodyPr>
           <a:lstStyle/>
           <a:p>
-            <a:r>
-              <a:rPr lang="en-IN" b="1" dirty="0"/>
+            <a:pPr>
+              <a:defRPr/>
+            </a:pPr>
+            <a:r>
+              <a:rPr lang="en-IN" b="1"/>
               <a:t>Experimental Findings:</a:t>
             </a:r>
-            <a:endParaRPr lang="en-IN" dirty="0"/>
-          </a:p>
-          <a:p>
-            <a:r>
-              <a:rPr lang="en-IN" dirty="0"/>
+            <a:endParaRPr lang="en-IN"/>
+          </a:p>
+          <a:p>
+            <a:pPr>
+              <a:defRPr/>
+            </a:pPr>
+            <a:r>
+              <a:rPr lang="en-IN"/>
               <a:t> </a:t>
             </a:r>
-          </a:p>
-          <a:p>
-            <a:pPr lvl="0"/>
-            <a:r>
-              <a:rPr lang="en-IN" dirty="0"/>
+            <a:endParaRPr/>
+          </a:p>
+          <a:p>
+            <a:pPr lvl="0">
+              <a:defRPr/>
+            </a:pPr>
+            <a:r>
+              <a:rPr lang="en-IN"/>
               <a:t> Several studies evaluated machine learning algorithms such as J48, Random Forest, and Multi-Layer Perceptron (MLP) classifiers using feature selection methods including </a:t>
             </a:r>
             <a:r>
-              <a:rPr lang="en-IN" dirty="0" err="1"/>
+              <a:rPr lang="en-IN"/>
               <a:t>InfoGain</a:t>
             </a:r>
             <a:r>
-              <a:rPr lang="en-IN" dirty="0"/>
+              <a:rPr lang="en-IN"/>
               <a:t> and </a:t>
             </a:r>
             <a:r>
-              <a:rPr lang="en-IN" dirty="0" err="1"/>
+              <a:rPr lang="en-IN"/>
               <a:t>ReliefF</a:t>
             </a:r>
             <a:r>
-              <a:rPr lang="en-IN" dirty="0"/>
+              <a:rPr lang="en-IN"/>
               <a:t> [17].</a:t>
             </a:r>
-          </a:p>
-          <a:p>
-            <a:pPr lvl="0"/>
-            <a:r>
-              <a:rPr lang="en-IN" dirty="0"/>
+            <a:endParaRPr/>
+          </a:p>
+          <a:p>
+            <a:pPr lvl="0">
+              <a:defRPr/>
+            </a:pPr>
+            <a:r>
+              <a:rPr lang="en-IN"/>
               <a:t> Experimental results from these studies demonstrated that effective feature selection significantly improves classification accuracy while reducing computational complexity [18].</a:t>
             </a:r>
-          </a:p>
-          <a:p>
-            <a:pPr lvl="0"/>
-            <a:endParaRPr lang="en-IN" dirty="0"/>
-          </a:p>
-          <a:p>
-            <a:pPr lvl="0"/>
-            <a:r>
-              <a:rPr lang="en-IN" dirty="0"/>
+            <a:endParaRPr/>
+          </a:p>
+          <a:p>
+            <a:pPr lvl="0">
+              <a:defRPr/>
+            </a:pPr>
+            <a:endParaRPr lang="en-IN"/>
+          </a:p>
+          <a:p>
+            <a:pPr lvl="0">
+              <a:defRPr/>
+            </a:pPr>
+            <a:r>
+              <a:rPr lang="en-IN"/>
               <a:t>Research findings also showed that reducing feature sets from 48 features to approximately 20 optimized features can improve model efficiency without significantly affecting detection accuracy [22].</a:t>
             </a:r>
-          </a:p>
-          <a:p>
-            <a:r>
-              <a:rPr lang="en-IN" dirty="0"/>
+            <a:endParaRPr/>
+          </a:p>
+          <a:p>
+            <a:pPr>
+              <a:defRPr/>
+            </a:pPr>
+            <a:r>
+              <a:rPr lang="en-IN"/>
               <a:t> </a:t>
             </a:r>
-          </a:p>
-          <a:p>
-            <a:r>
-              <a:rPr lang="en-IN" dirty="0"/>
+            <a:endParaRPr/>
+          </a:p>
+          <a:p>
+            <a:pPr>
+              <a:defRPr/>
+            </a:pPr>
+            <a:r>
+              <a:rPr lang="en-IN"/>
               <a:t>The reviewed literature clearly demonstrates that machine learning–based phishing detection systems are highly effective in combating phishing attacks. The combination of feature engineering, intelligent classification models, and optimized feature selection methods continues to improve phishing detection performance and adaptability against evolving cyber threats.</a:t>
             </a:r>
+            <a:endParaRPr/>
           </a:p>
         </p:txBody>
       </p:sp>
     </p:spTree>
-    <p:extLst>
-      <p:ext uri="{BB962C8B-B14F-4D97-AF65-F5344CB8AC3E}">
-        <p14:creationId xmlns:p14="http://schemas.microsoft.com/office/powerpoint/2010/main" val="761793386"/>
-      </p:ext>
-    </p:extLst>
   </p:cSld>
   <p:clrMapOvr>
     <a:masterClrMapping/>
   </p:clrMapOvr>
+  <mc:AlternateContent xmlns:mc="http://schemas.openxmlformats.org/markup-compatibility/2006">
+    <mc:Choice xmlns:p14="http://schemas.microsoft.com/office/powerpoint/2010/main" Requires="p14">
+      <p:transition p14:dur="2000" advClick="1"/>
+    </mc:Choice>
+    <mc:Fallback>
+      <p:transition advClick="1"/>
+    </mc:Fallback>
+  </mc:AlternateContent>
 </p:sld>
 </file>
 
 <file path=ppt/slides/slide9.xml><?xml version="1.0" encoding="utf-8"?>
-<p:sld xmlns:a="http://schemas.openxmlformats.org/drawingml/2006/main" xmlns:r="http://schemas.openxmlformats.org/officeDocument/2006/relationships" xmlns:p="http://schemas.openxmlformats.org/presentationml/2006/main">
-  <p:cSld>
+<p:sld xmlns:a="http://schemas.openxmlformats.org/drawingml/2006/main" xmlns:r="http://schemas.openxmlformats.org/officeDocument/2006/relationships" xmlns:p="http://schemas.openxmlformats.org/presentationml/2006/main" xmlns:m="http://schemas.openxmlformats.org/officeDocument/2006/math" xmlns:w="http://schemas.openxmlformats.org/wordprocessingml/2006/main" showMasterPhAnim="0" show="1">
+  <p:cSld name="">
     <p:spTree>
       <p:nvGrpSpPr>
-        <p:cNvPr id="1" name="">
-          <a:extLst>
-            <a:ext uri="{FF2B5EF4-FFF2-40B4-BE49-F238E27FC236}">
-              <a16:creationId xmlns:a16="http://schemas.microsoft.com/office/drawing/2014/main" id="{53865A00-8AF6-942E-FB9E-74C1D1DFFC87}"/>
-            </a:ext>
-          </a:extLst>
-        </p:cNvPr>
+        <p:cNvPr id="1" name=""/>
         <p:cNvGrpSpPr/>
         <p:nvPr/>
       </p:nvGrpSpPr>
-      <p:grpSpPr>
+      <p:grpSpPr bwMode="auto">
         <a:xfrm>
           <a:off x="0" y="0"/>
           <a:ext cx="0" cy="0"/>
@@ -8244,17 +7794,11 @@
       </p:grpSpPr>
       <p:sp>
         <p:nvSpPr>
-          <p:cNvPr id="108" name="TextShape 1">
-            <a:extLst>
-              <a:ext uri="{FF2B5EF4-FFF2-40B4-BE49-F238E27FC236}">
-                <a16:creationId xmlns:a16="http://schemas.microsoft.com/office/drawing/2014/main" id="{DC73B8EC-4A74-E376-CCEC-A61785CB46A7}"/>
-              </a:ext>
-            </a:extLst>
-          </p:cNvPr>
+          <p:cNvPr id="108" name="TextShape 1"/>
           <p:cNvSpPr txBox="1"/>
           <p:nvPr/>
         </p:nvSpPr>
-        <p:spPr>
+        <p:spPr bwMode="auto">
           <a:xfrm>
             <a:off x="457200" y="0"/>
             <a:ext cx="6019560" cy="837720"/>
@@ -8277,37 +7821,32 @@
               <a:lnSpc>
                 <a:spcPct val="100000"/>
               </a:lnSpc>
-            </a:pPr>
-            <a:r>
-              <a:rPr lang="en-IN" sz="3200" dirty="0">
-                <a:latin typeface="Times New Roman" panose="02020603050405020304" pitchFamily="18" charset="0"/>
-                <a:cs typeface="Times New Roman" panose="02020603050405020304" pitchFamily="18" charset="0"/>
+              <a:defRPr/>
+            </a:pPr>
+            <a:r>
+              <a:rPr lang="en-IN" sz="3200">
+                <a:latin typeface="Times New Roman"/>
+                <a:cs typeface="Times New Roman"/>
               </a:rPr>
               <a:t>Methodology</a:t>
             </a:r>
-            <a:endParaRPr lang="en-US" sz="3200" strike="noStrike" spc="-1" dirty="0">
+            <a:endParaRPr lang="en-US" sz="3200" strike="noStrike" spc="-1">
               <a:solidFill>
                 <a:srgbClr val="000000"/>
               </a:solidFill>
-              <a:latin typeface="Times New Roman" panose="02020603050405020304" pitchFamily="18" charset="0"/>
-              <a:cs typeface="Times New Roman" panose="02020603050405020304" pitchFamily="18" charset="0"/>
-            </a:endParaRPr>
-          </a:p>
-        </p:txBody>
-      </p:sp>
-      <p:sp>
-        <p:nvSpPr>
-          <p:cNvPr id="110" name="TextShape 3">
-            <a:extLst>
-              <a:ext uri="{FF2B5EF4-FFF2-40B4-BE49-F238E27FC236}">
-                <a16:creationId xmlns:a16="http://schemas.microsoft.com/office/drawing/2014/main" id="{B37990FC-0CE1-9235-5C43-B76C99C6F5A5}"/>
-              </a:ext>
-            </a:extLst>
-          </p:cNvPr>
+              <a:latin typeface="Times New Roman"/>
+              <a:cs typeface="Times New Roman"/>
+            </a:endParaRPr>
+          </a:p>
+        </p:txBody>
+      </p:sp>
+      <p:sp>
+        <p:nvSpPr>
+          <p:cNvPr id="110" name="TextShape 3"/>
           <p:cNvSpPr txBox="1"/>
           <p:nvPr/>
         </p:nvSpPr>
-        <p:spPr>
+        <p:spPr bwMode="auto">
           <a:xfrm>
             <a:off x="6553080" y="6356520"/>
             <a:ext cx="2133360" cy="364680"/>
@@ -8330,6 +7869,7 @@
               <a:lnSpc>
                 <a:spcPct val="100000"/>
               </a:lnSpc>
+              <a:defRPr/>
             </a:pPr>
             <a:fld id="{4D4FEEEE-7AC5-48A9-86F4-13448BE87B58}" type="slidenum">
               <a:rPr lang="en-US" sz="1200" b="1" strike="noStrike" spc="-1">
@@ -8339,12 +7879,7 @@
                 <a:latin typeface="Calibri"/>
                 <a:ea typeface="MS PGothic"/>
               </a:rPr>
-              <a:pPr algn="r">
-                <a:lnSpc>
-                  <a:spcPct val="100000"/>
-                </a:lnSpc>
-              </a:pPr>
-              <a:t>9</a:t>
+              <a:t/>
             </a:fld>
             <a:endParaRPr lang="en-GB" sz="1200" b="0" strike="noStrike" spc="-1">
               <a:latin typeface="Times New Roman"/>
@@ -8354,17 +7889,11 @@
       </p:sp>
       <p:sp>
         <p:nvSpPr>
-          <p:cNvPr id="5" name="TextShape 2">
-            <a:extLst>
-              <a:ext uri="{FF2B5EF4-FFF2-40B4-BE49-F238E27FC236}">
-                <a16:creationId xmlns:a16="http://schemas.microsoft.com/office/drawing/2014/main" id="{A940F859-1DB0-F873-A57A-A014554FB4AF}"/>
-              </a:ext>
-            </a:extLst>
-          </p:cNvPr>
+          <p:cNvPr id="5" name="TextShape 2"/>
           <p:cNvSpPr txBox="1"/>
           <p:nvPr/>
         </p:nvSpPr>
-        <p:spPr>
+        <p:spPr bwMode="auto">
           <a:xfrm>
             <a:off x="164008" y="1109742"/>
             <a:ext cx="8903792" cy="4838571"/>
@@ -8383,103 +7912,139 @@
           </a:bodyPr>
           <a:lstStyle/>
           <a:p>
-            <a:r>
-              <a:rPr lang="en-IN" b="1" dirty="0"/>
+            <a:pPr>
+              <a:defRPr/>
+            </a:pPr>
+            <a:r>
+              <a:rPr lang="en-IN" b="1"/>
               <a:t>Feature Extraction Process:</a:t>
             </a:r>
-            <a:endParaRPr lang="en-IN" dirty="0"/>
-          </a:p>
-          <a:p>
-            <a:r>
-              <a:rPr lang="en-IN" dirty="0"/>
+            <a:endParaRPr lang="en-IN"/>
+          </a:p>
+          <a:p>
+            <a:pPr>
+              <a:defRPr/>
+            </a:pPr>
+            <a:r>
+              <a:rPr lang="en-IN"/>
               <a:t> </a:t>
             </a:r>
-          </a:p>
-          <a:p>
-            <a:r>
-              <a:rPr lang="en-IN" dirty="0"/>
+            <a:endParaRPr/>
+          </a:p>
+          <a:p>
+            <a:pPr>
+              <a:defRPr/>
+            </a:pPr>
+            <a:r>
+              <a:rPr lang="en-IN"/>
               <a:t>When a URL is provided as input to the system, it undergoes a detailed feature extraction process to </a:t>
             </a:r>
             <a:r>
-              <a:rPr lang="en-IN" dirty="0" err="1"/>
+              <a:rPr lang="en-IN"/>
               <a:t>analyze</a:t>
             </a:r>
             <a:r>
-              <a:rPr lang="en-IN" dirty="0"/>
+              <a:rPr lang="en-IN"/>
               <a:t> multiple characteristics associated with phishing </a:t>
             </a:r>
             <a:r>
-              <a:rPr lang="en-IN" dirty="0" err="1"/>
+              <a:rPr lang="en-IN"/>
               <a:t>behavior</a:t>
             </a:r>
             <a:r>
-              <a:rPr lang="en-IN" dirty="0"/>
+              <a:rPr lang="en-IN"/>
               <a:t>. These extracted features help the machine learning model differentiate between legitimate and malicious websites. The feature extraction process includes the following categories:</a:t>
             </a:r>
-          </a:p>
-          <a:p>
-            <a:r>
-              <a:rPr lang="en-IN" dirty="0"/>
+            <a:endParaRPr/>
+          </a:p>
+          <a:p>
+            <a:pPr>
+              <a:defRPr/>
+            </a:pPr>
+            <a:r>
+              <a:rPr lang="en-IN"/>
               <a:t> </a:t>
             </a:r>
-          </a:p>
-          <a:p>
-            <a:pPr lvl="0"/>
-            <a:r>
-              <a:rPr lang="en-IN" dirty="0"/>
+            <a:endParaRPr/>
+          </a:p>
+          <a:p>
+            <a:pPr lvl="0">
+              <a:defRPr/>
+            </a:pPr>
+            <a:r>
+              <a:rPr lang="en-IN"/>
               <a:t>URL Type:</a:t>
             </a:r>
-          </a:p>
-          <a:p>
-            <a:r>
-              <a:rPr lang="en-IN" dirty="0"/>
+            <a:endParaRPr/>
+          </a:p>
+          <a:p>
+            <a:pPr>
+              <a:defRPr/>
+            </a:pPr>
+            <a:r>
+              <a:rPr lang="en-IN"/>
               <a:t>  The system checks whether the URL contains an IP address instead of a domain name, evaluates the URL length, and determines whether the URL has been shortened using URL shortening services. These characteristics are commonly associated with phishing websites.</a:t>
             </a:r>
-          </a:p>
-          <a:p>
-            <a:r>
-              <a:rPr lang="en-IN" dirty="0"/>
+            <a:endParaRPr/>
+          </a:p>
+          <a:p>
+            <a:pPr>
+              <a:defRPr/>
+            </a:pPr>
+            <a:r>
+              <a:rPr lang="en-IN"/>
               <a:t> </a:t>
             </a:r>
-          </a:p>
-          <a:p>
-            <a:pPr lvl="0"/>
-            <a:r>
-              <a:rPr lang="en-IN" dirty="0"/>
+            <a:endParaRPr/>
+          </a:p>
+          <a:p>
+            <a:pPr lvl="0">
+              <a:defRPr/>
+            </a:pPr>
+            <a:r>
+              <a:rPr lang="en-IN"/>
               <a:t>Special Characters:</a:t>
             </a:r>
-          </a:p>
-          <a:p>
-            <a:r>
-              <a:rPr lang="en-IN" dirty="0"/>
+            <a:endParaRPr/>
+          </a:p>
+          <a:p>
+            <a:pPr>
+              <a:defRPr/>
+            </a:pPr>
+            <a:r>
+              <a:rPr lang="en-IN"/>
               <a:t>  The presence of suspicious symbols such as the “@” character and double slashes (“//”) in the URL path is </a:t>
             </a:r>
             <a:r>
-              <a:rPr lang="en-IN" dirty="0" err="1"/>
+              <a:rPr lang="en-IN"/>
               <a:t>analyzed</a:t>
             </a:r>
             <a:r>
-              <a:rPr lang="en-IN" dirty="0"/>
+              <a:rPr lang="en-IN"/>
               <a:t> because attackers frequently use these patterns to mislead users.</a:t>
             </a:r>
+            <a:endParaRPr/>
           </a:p>
         </p:txBody>
       </p:sp>
     </p:spTree>
-    <p:extLst>
-      <p:ext uri="{BB962C8B-B14F-4D97-AF65-F5344CB8AC3E}">
-        <p14:creationId xmlns:p14="http://schemas.microsoft.com/office/powerpoint/2010/main" val="1060561845"/>
-      </p:ext>
-    </p:extLst>
   </p:cSld>
   <p:clrMapOvr>
     <a:masterClrMapping/>
   </p:clrMapOvr>
+  <mc:AlternateContent xmlns:mc="http://schemas.openxmlformats.org/markup-compatibility/2006">
+    <mc:Choice xmlns:p14="http://schemas.microsoft.com/office/powerpoint/2010/main" Requires="p14">
+      <p:transition p14:dur="2000" advClick="1"/>
+    </mc:Choice>
+    <mc:Fallback>
+      <p:transition advClick="1"/>
+    </mc:Fallback>
+  </mc:AlternateContent>
 </p:sld>
 </file>
 
 <file path=ppt/theme/theme1.xml><?xml version="1.0" encoding="utf-8"?>
-<a:theme xmlns:a="http://schemas.openxmlformats.org/drawingml/2006/main" name="Office Theme">
+<a:theme xmlns:a="http://schemas.openxmlformats.org/drawingml/2006/main" xmlns:r="http://schemas.openxmlformats.org/officeDocument/2006/relationships" xmlns:p="http://schemas.openxmlformats.org/presentationml/2006/main" name="Office Theme">
   <a:themeElements>
     <a:clrScheme name="Office">
       <a:dk1>
@@ -8536,7 +8101,7 @@
         <a:solidFill>
           <a:schemeClr val="phClr"/>
         </a:solidFill>
-        <a:gradFill rotWithShape="1">
+        <a:gradFill>
           <a:gsLst>
             <a:gs pos="0">
               <a:schemeClr val="phClr">
@@ -8559,7 +8124,7 @@
           </a:gsLst>
           <a:lin ang="16200000" scaled="1"/>
         </a:gradFill>
-        <a:gradFill rotWithShape="1">
+        <a:gradFill>
           <a:gsLst>
             <a:gs pos="0">
               <a:schemeClr val="phClr">
@@ -8636,24 +8201,13 @@
               </a:srgbClr>
             </a:outerShdw>
           </a:effectLst>
-          <a:scene3d>
-            <a:camera prst="orthographicFront">
-              <a:rot lat="0" lon="0" rev="0"/>
-            </a:camera>
-            <a:lightRig rig="threePt" dir="t">
-              <a:rot lat="0" lon="0" rev="1200000"/>
-            </a:lightRig>
-          </a:scene3d>
-          <a:sp3d>
-            <a:bevelT w="63500" h="25400"/>
-          </a:sp3d>
         </a:effectStyle>
       </a:effectStyleLst>
       <a:bgFillStyleLst>
         <a:solidFill>
           <a:schemeClr val="phClr"/>
         </a:solidFill>
-        <a:gradFill rotWithShape="1">
+        <a:gradFill>
           <a:gsLst>
             <a:gs pos="0">
               <a:schemeClr val="phClr">
@@ -8675,11 +8229,9 @@
               </a:schemeClr>
             </a:gs>
           </a:gsLst>
-          <a:path path="circle">
-            <a:fillToRect l="50000" t="-80000" r="50000" b="180000"/>
-          </a:path>
+          <a:path path="circle"/>
         </a:gradFill>
-        <a:gradFill rotWithShape="1">
+        <a:gradFill>
           <a:gsLst>
             <a:gs pos="0">
               <a:schemeClr val="phClr">
@@ -8694,575 +8246,31 @@
               </a:schemeClr>
             </a:gs>
           </a:gsLst>
-          <a:path path="circle">
-            <a:fillToRect l="50000" t="50000" r="50000" b="50000"/>
-          </a:path>
+          <a:path path="circle"/>
         </a:gradFill>
       </a:bgFillStyleLst>
     </a:fmtScheme>
   </a:themeElements>
   <a:objectDefaults/>
-  <a:extraClrSchemeLst/>
-</a:theme>
-</file>
-
-<file path=ppt/theme/theme2.xml><?xml version="1.0" encoding="utf-8"?>
-<a:theme xmlns:a="http://schemas.openxmlformats.org/drawingml/2006/main" name="Office Theme">
-  <a:themeElements>
-    <a:clrScheme name="Office">
-      <a:dk1>
-        <a:sysClr val="windowText" lastClr="000000"/>
-      </a:dk1>
-      <a:lt1>
-        <a:sysClr val="window" lastClr="FFFFFF"/>
-      </a:lt1>
-      <a:dk2>
-        <a:srgbClr val="44546A"/>
-      </a:dk2>
-      <a:lt2>
-        <a:srgbClr val="E7E6E6"/>
-      </a:lt2>
-      <a:accent1>
-        <a:srgbClr val="5B9BD5"/>
-      </a:accent1>
-      <a:accent2>
-        <a:srgbClr val="ED7D31"/>
-      </a:accent2>
-      <a:accent3>
-        <a:srgbClr val="A5A5A5"/>
-      </a:accent3>
-      <a:accent4>
-        <a:srgbClr val="FFC000"/>
-      </a:accent4>
-      <a:accent5>
-        <a:srgbClr val="4472C4"/>
-      </a:accent5>
-      <a:accent6>
-        <a:srgbClr val="70AD47"/>
-      </a:accent6>
-      <a:hlink>
-        <a:srgbClr val="0563C1"/>
-      </a:hlink>
-      <a:folHlink>
-        <a:srgbClr val="954F72"/>
-      </a:folHlink>
-    </a:clrScheme>
-    <a:fontScheme name="Office">
-      <a:majorFont>
-        <a:latin typeface="Calibri Light"/>
-        <a:ea typeface=""/>
-        <a:cs typeface=""/>
-        <a:font script="Jpan" typeface="ＭＳ Ｐゴシック"/>
-        <a:font script="Hang" typeface="맑은 고딕"/>
-        <a:font script="Hans" typeface="宋体"/>
-        <a:font script="Hant" typeface="新細明體"/>
-        <a:font script="Arab" typeface="Times New Roman"/>
-        <a:font script="Hebr" typeface="Times New Roman"/>
-        <a:font script="Thai" typeface="Angsana New"/>
-        <a:font script="Ethi" typeface="Nyala"/>
-        <a:font script="Beng" typeface="Vrinda"/>
-        <a:font script="Gujr" typeface="Shruti"/>
-        <a:font script="Khmr" typeface="MoolBoran"/>
-        <a:font script="Knda" typeface="Tunga"/>
-        <a:font script="Guru" typeface="Raavi"/>
-        <a:font script="Cans" typeface="Euphemia"/>
-        <a:font script="Cher" typeface="Plantagenet Cherokee"/>
-        <a:font script="Yiii" typeface="Microsoft Yi Baiti"/>
-        <a:font script="Tibt" typeface="Microsoft Himalaya"/>
-        <a:font script="Thaa" typeface="MV Boli"/>
-        <a:font script="Deva" typeface="Mangal"/>
-        <a:font script="Telu" typeface="Gautami"/>
-        <a:font script="Taml" typeface="Latha"/>
-        <a:font script="Syrc" typeface="Estrangelo Edessa"/>
-        <a:font script="Orya" typeface="Kalinga"/>
-        <a:font script="Mlym" typeface="Kartika"/>
-        <a:font script="Laoo" typeface="DokChampa"/>
-        <a:font script="Sinh" typeface="Iskoola Pota"/>
-        <a:font script="Mong" typeface="Mongolian Baiti"/>
-        <a:font script="Viet" typeface="Times New Roman"/>
-        <a:font script="Uigh" typeface="Microsoft Uighur"/>
-        <a:font script="Geor" typeface="Sylfaen"/>
-      </a:majorFont>
-      <a:minorFont>
-        <a:latin typeface="Calibri"/>
-        <a:ea typeface=""/>
-        <a:cs typeface=""/>
-        <a:font script="Jpan" typeface="ＭＳ Ｐゴシック"/>
-        <a:font script="Hang" typeface="맑은 고딕"/>
-        <a:font script="Hans" typeface="宋体"/>
-        <a:font script="Hant" typeface="新細明體"/>
-        <a:font script="Arab" typeface="Arial"/>
-        <a:font script="Hebr" typeface="Arial"/>
-        <a:font script="Thai" typeface="Cordia New"/>
-        <a:font script="Ethi" typeface="Nyala"/>
-        <a:font script="Beng" typeface="Vrinda"/>
-        <a:font script="Gujr" typeface="Shruti"/>
-        <a:font script="Khmr" typeface="DaunPenh"/>
-        <a:font script="Knda" typeface="Tunga"/>
-        <a:font script="Guru" typeface="Raavi"/>
-        <a:font script="Cans" typeface="Euphemia"/>
-        <a:font script="Cher" typeface="Plantagenet Cherokee"/>
-        <a:font script="Yiii" typeface="Microsoft Yi Baiti"/>
-        <a:font script="Tibt" typeface="Microsoft Himalaya"/>
-        <a:font script="Thaa" typeface="MV Boli"/>
-        <a:font script="Deva" typeface="Mangal"/>
-        <a:font script="Telu" typeface="Gautami"/>
-        <a:font script="Taml" typeface="Latha"/>
-        <a:font script="Syrc" typeface="Estrangelo Edessa"/>
-        <a:font script="Orya" typeface="Kalinga"/>
-        <a:font script="Mlym" typeface="Kartika"/>
-        <a:font script="Laoo" typeface="DokChampa"/>
-        <a:font script="Sinh" typeface="Iskoola Pota"/>
-        <a:font script="Mong" typeface="Mongolian Baiti"/>
-        <a:font script="Viet" typeface="Arial"/>
-        <a:font script="Uigh" typeface="Microsoft Uighur"/>
-        <a:font script="Geor" typeface="Sylfaen"/>
-      </a:minorFont>
-    </a:fontScheme>
-    <a:fmtScheme name="Office">
-      <a:fillStyleLst>
-        <a:solidFill>
-          <a:schemeClr val="phClr"/>
-        </a:solidFill>
-        <a:gradFill rotWithShape="1">
-          <a:gsLst>
-            <a:gs pos="0">
-              <a:schemeClr val="phClr">
-                <a:lumMod val="110000"/>
-                <a:satMod val="105000"/>
-                <a:tint val="67000"/>
-              </a:schemeClr>
-            </a:gs>
-            <a:gs pos="50000">
-              <a:schemeClr val="phClr">
-                <a:lumMod val="105000"/>
-                <a:satMod val="103000"/>
-                <a:tint val="73000"/>
-              </a:schemeClr>
-            </a:gs>
-            <a:gs pos="100000">
-              <a:schemeClr val="phClr">
-                <a:lumMod val="105000"/>
-                <a:satMod val="109000"/>
-                <a:tint val="81000"/>
-              </a:schemeClr>
-            </a:gs>
-          </a:gsLst>
-          <a:lin ang="5400000" scaled="0"/>
-        </a:gradFill>
-        <a:gradFill rotWithShape="1">
-          <a:gsLst>
-            <a:gs pos="0">
-              <a:schemeClr val="phClr">
-                <a:satMod val="103000"/>
-                <a:lumMod val="102000"/>
-                <a:tint val="94000"/>
-              </a:schemeClr>
-            </a:gs>
-            <a:gs pos="50000">
-              <a:schemeClr val="phClr">
-                <a:satMod val="110000"/>
-                <a:lumMod val="100000"/>
-                <a:shade val="100000"/>
-              </a:schemeClr>
-            </a:gs>
-            <a:gs pos="100000">
-              <a:schemeClr val="phClr">
-                <a:lumMod val="99000"/>
-                <a:satMod val="120000"/>
-                <a:shade val="78000"/>
-              </a:schemeClr>
-            </a:gs>
-          </a:gsLst>
-          <a:lin ang="5400000" scaled="0"/>
-        </a:gradFill>
-      </a:fillStyleLst>
-      <a:lnStyleLst>
-        <a:ln w="6350" cap="flat" cmpd="sng" algn="ctr">
-          <a:solidFill>
-            <a:schemeClr val="phClr"/>
-          </a:solidFill>
-          <a:prstDash val="solid"/>
-          <a:miter lim="800000"/>
-        </a:ln>
-        <a:ln w="12700" cap="flat" cmpd="sng" algn="ctr">
-          <a:solidFill>
-            <a:schemeClr val="phClr"/>
-          </a:solidFill>
-          <a:prstDash val="solid"/>
-          <a:miter lim="800000"/>
-        </a:ln>
-        <a:ln w="19050" cap="flat" cmpd="sng" algn="ctr">
-          <a:solidFill>
-            <a:schemeClr val="phClr"/>
-          </a:solidFill>
-          <a:prstDash val="solid"/>
-          <a:miter lim="800000"/>
-        </a:ln>
-      </a:lnStyleLst>
-      <a:effectStyleLst>
-        <a:effectStyle>
-          <a:effectLst/>
-        </a:effectStyle>
-        <a:effectStyle>
-          <a:effectLst/>
-        </a:effectStyle>
-        <a:effectStyle>
-          <a:effectLst>
-            <a:outerShdw blurRad="57150" dist="19050" dir="5400000" algn="ctr" rotWithShape="0">
-              <a:srgbClr val="000000">
-                <a:alpha val="63000"/>
-              </a:srgbClr>
-            </a:outerShdw>
-          </a:effectLst>
-        </a:effectStyle>
-      </a:effectStyleLst>
-      <a:bgFillStyleLst>
-        <a:solidFill>
-          <a:schemeClr val="phClr"/>
-        </a:solidFill>
-        <a:solidFill>
-          <a:schemeClr val="phClr">
-            <a:tint val="95000"/>
-            <a:satMod val="170000"/>
-          </a:schemeClr>
-        </a:solidFill>
-        <a:gradFill rotWithShape="1">
-          <a:gsLst>
-            <a:gs pos="0">
-              <a:schemeClr val="phClr">
-                <a:tint val="93000"/>
-                <a:satMod val="150000"/>
-                <a:shade val="98000"/>
-                <a:lumMod val="102000"/>
-              </a:schemeClr>
-            </a:gs>
-            <a:gs pos="50000">
-              <a:schemeClr val="phClr">
-                <a:tint val="98000"/>
-                <a:satMod val="130000"/>
-                <a:shade val="90000"/>
-                <a:lumMod val="103000"/>
-              </a:schemeClr>
-            </a:gs>
-            <a:gs pos="100000">
-              <a:schemeClr val="phClr">
-                <a:shade val="63000"/>
-                <a:satMod val="120000"/>
-              </a:schemeClr>
-            </a:gs>
-          </a:gsLst>
-          <a:lin ang="5400000" scaled="0"/>
-        </a:gradFill>
-      </a:bgFillStyleLst>
-    </a:fmtScheme>
-  </a:themeElements>
-  <a:objectDefaults/>
-  <a:extraClrSchemeLst/>
-  <a:extLst>
-    <a:ext uri="{05A4C25C-085E-4340-85A3-A5531E510DB2}">
-      <thm15:themeFamily xmlns:thm15="http://schemas.microsoft.com/office/thememl/2012/main" name="Office Theme" id="{62F939B6-93AF-4DB8-9C6B-D6C7DFDC589F}" vid="{4A3C46E8-61CC-4603-A589-7422A47A8E4A}"/>
-    </a:ext>
-  </a:extLst>
-</a:theme>
-</file>
-
-<file path=ppt/theme/theme3.xml><?xml version="1.0" encoding="utf-8"?>
-<a:theme xmlns:a="http://schemas.openxmlformats.org/drawingml/2006/main" name="Office Theme">
-  <a:themeElements>
-    <a:clrScheme name="Office">
-      <a:dk1>
-        <a:sysClr val="windowText" lastClr="000000"/>
-      </a:dk1>
-      <a:lt1>
-        <a:sysClr val="window" lastClr="FFFFFF"/>
-      </a:lt1>
-      <a:dk2>
-        <a:srgbClr val="44546A"/>
-      </a:dk2>
-      <a:lt2>
-        <a:srgbClr val="E7E6E6"/>
-      </a:lt2>
-      <a:accent1>
-        <a:srgbClr val="4472C4"/>
-      </a:accent1>
-      <a:accent2>
-        <a:srgbClr val="ED7D31"/>
-      </a:accent2>
-      <a:accent3>
-        <a:srgbClr val="A5A5A5"/>
-      </a:accent3>
-      <a:accent4>
-        <a:srgbClr val="FFC000"/>
-      </a:accent4>
-      <a:accent5>
-        <a:srgbClr val="5B9BD5"/>
-      </a:accent5>
-      <a:accent6>
-        <a:srgbClr val="70AD47"/>
-      </a:accent6>
-      <a:hlink>
-        <a:srgbClr val="0563C1"/>
-      </a:hlink>
-      <a:folHlink>
-        <a:srgbClr val="954F72"/>
-      </a:folHlink>
-    </a:clrScheme>
-    <a:fontScheme name="Office">
-      <a:majorFont>
-        <a:latin typeface="Calibri Light"/>
-        <a:ea typeface=""/>
-        <a:cs typeface=""/>
-        <a:font script="Jpan" typeface="游ゴシック Light"/>
-        <a:font script="Hang" typeface="맑은 고딕"/>
-        <a:font script="Hans" typeface="等线 Light"/>
-        <a:font script="Hant" typeface="新細明體"/>
-        <a:font script="Arab" typeface="Times New Roman"/>
-        <a:font script="Hebr" typeface="Times New Roman"/>
-        <a:font script="Thai" typeface="Angsana New"/>
-        <a:font script="Ethi" typeface="Nyala"/>
-        <a:font script="Beng" typeface="Vrinda"/>
-        <a:font script="Gujr" typeface="Shruti"/>
-        <a:font script="Khmr" typeface="MoolBoran"/>
-        <a:font script="Knda" typeface="Tunga"/>
-        <a:font script="Guru" typeface="Raavi"/>
-        <a:font script="Cans" typeface="Euphemia"/>
-        <a:font script="Cher" typeface="Plantagenet Cherokee"/>
-        <a:font script="Yiii" typeface="Microsoft Yi Baiti"/>
-        <a:font script="Tibt" typeface="Microsoft Himalaya"/>
-        <a:font script="Thaa" typeface="MV Boli"/>
-        <a:font script="Deva" typeface="Mangal"/>
-        <a:font script="Telu" typeface="Gautami"/>
-        <a:font script="Taml" typeface="Latha"/>
-        <a:font script="Syrc" typeface="Estrangelo Edessa"/>
-        <a:font script="Orya" typeface="Kalinga"/>
-        <a:font script="Mlym" typeface="Kartika"/>
-        <a:font script="Laoo" typeface="DokChampa"/>
-        <a:font script="Sinh" typeface="Iskoola Pota"/>
-        <a:font script="Mong" typeface="Mongolian Baiti"/>
-        <a:font script="Viet" typeface="Times New Roman"/>
-        <a:font script="Uigh" typeface="Microsoft Uighur"/>
-        <a:font script="Geor" typeface="Sylfaen"/>
-        <a:font script="Armn" typeface="Arial"/>
-        <a:font script="Bugi" typeface="Leelawadee UI"/>
-        <a:font script="Bopo" typeface="Microsoft JhengHei"/>
-        <a:font script="Java" typeface="Javanese Text"/>
-        <a:font script="Lisu" typeface="Segoe UI"/>
-        <a:font script="Mymr" typeface="Myanmar Text"/>
-        <a:font script="Nkoo" typeface="Ebrima"/>
-        <a:font script="Olck" typeface="Nirmala UI"/>
-        <a:font script="Osma" typeface="Ebrima"/>
-        <a:font script="Phag" typeface="Phagspa"/>
-        <a:font script="Syrn" typeface="Estrangelo Edessa"/>
-        <a:font script="Syrj" typeface="Estrangelo Edessa"/>
-        <a:font script="Syre" typeface="Estrangelo Edessa"/>
-        <a:font script="Sora" typeface="Nirmala UI"/>
-        <a:font script="Tale" typeface="Microsoft Tai Le"/>
-        <a:font script="Talu" typeface="Microsoft New Tai Lue"/>
-        <a:font script="Tfng" typeface="Ebrima"/>
-      </a:majorFont>
-      <a:minorFont>
-        <a:latin typeface="Calibri"/>
-        <a:ea typeface=""/>
-        <a:cs typeface=""/>
-        <a:font script="Jpan" typeface="游ゴシック"/>
-        <a:font script="Hang" typeface="맑은 고딕"/>
-        <a:font script="Hans" typeface="等线"/>
-        <a:font script="Hant" typeface="新細明體"/>
-        <a:font script="Arab" typeface="Arial"/>
-        <a:font script="Hebr" typeface="Arial"/>
-        <a:font script="Thai" typeface="Cordia New"/>
-        <a:font script="Ethi" typeface="Nyala"/>
-        <a:font script="Beng" typeface="Vrinda"/>
-        <a:font script="Gujr" typeface="Shruti"/>
-        <a:font script="Khmr" typeface="DaunPenh"/>
-        <a:font script="Knda" typeface="Tunga"/>
-        <a:font script="Guru" typeface="Raavi"/>
-        <a:font script="Cans" typeface="Euphemia"/>
-        <a:font script="Cher" typeface="Plantagenet Cherokee"/>
-        <a:font script="Yiii" typeface="Microsoft Yi Baiti"/>
-        <a:font script="Tibt" typeface="Microsoft Himalaya"/>
-        <a:font script="Thaa" typeface="MV Boli"/>
-        <a:font script="Deva" typeface="Mangal"/>
-        <a:font script="Telu" typeface="Gautami"/>
-        <a:font script="Taml" typeface="Latha"/>
-        <a:font script="Syrc" typeface="Estrangelo Edessa"/>
-        <a:font script="Orya" typeface="Kalinga"/>
-        <a:font script="Mlym" typeface="Kartika"/>
-        <a:font script="Laoo" typeface="DokChampa"/>
-        <a:font script="Sinh" typeface="Iskoola Pota"/>
-        <a:font script="Mong" typeface="Mongolian Baiti"/>
-        <a:font script="Viet" typeface="Arial"/>
-        <a:font script="Uigh" typeface="Microsoft Uighur"/>
-        <a:font script="Geor" typeface="Sylfaen"/>
-        <a:font script="Armn" typeface="Arial"/>
-        <a:font script="Bugi" typeface="Leelawadee UI"/>
-        <a:font script="Bopo" typeface="Microsoft JhengHei"/>
-        <a:font script="Java" typeface="Javanese Text"/>
-        <a:font script="Lisu" typeface="Segoe UI"/>
-        <a:font script="Mymr" typeface="Myanmar Text"/>
-        <a:font script="Nkoo" typeface="Ebrima"/>
-        <a:font script="Olck" typeface="Nirmala UI"/>
-        <a:font script="Osma" typeface="Ebrima"/>
-        <a:font script="Phag" typeface="Phagspa"/>
-        <a:font script="Syrn" typeface="Estrangelo Edessa"/>
-        <a:font script="Syrj" typeface="Estrangelo Edessa"/>
-        <a:font script="Syre" typeface="Estrangelo Edessa"/>
-        <a:font script="Sora" typeface="Nirmala UI"/>
-        <a:font script="Tale" typeface="Microsoft Tai Le"/>
-        <a:font script="Talu" typeface="Microsoft New Tai Lue"/>
-        <a:font script="Tfng" typeface="Ebrima"/>
-      </a:minorFont>
-    </a:fontScheme>
-    <a:fmtScheme name="Office">
-      <a:fillStyleLst>
-        <a:solidFill>
-          <a:schemeClr val="phClr"/>
-        </a:solidFill>
-        <a:gradFill rotWithShape="1">
-          <a:gsLst>
-            <a:gs pos="0">
-              <a:schemeClr val="phClr">
-                <a:lumMod val="110000"/>
-                <a:satMod val="105000"/>
-                <a:tint val="67000"/>
-              </a:schemeClr>
-            </a:gs>
-            <a:gs pos="50000">
-              <a:schemeClr val="phClr">
-                <a:lumMod val="105000"/>
-                <a:satMod val="103000"/>
-                <a:tint val="73000"/>
-              </a:schemeClr>
-            </a:gs>
-            <a:gs pos="100000">
-              <a:schemeClr val="phClr">
-                <a:lumMod val="105000"/>
-                <a:satMod val="109000"/>
-                <a:tint val="81000"/>
-              </a:schemeClr>
-            </a:gs>
-          </a:gsLst>
-          <a:lin ang="5400000" scaled="0"/>
-        </a:gradFill>
-        <a:gradFill rotWithShape="1">
-          <a:gsLst>
-            <a:gs pos="0">
-              <a:schemeClr val="phClr">
-                <a:satMod val="103000"/>
-                <a:lumMod val="102000"/>
-                <a:tint val="94000"/>
-              </a:schemeClr>
-            </a:gs>
-            <a:gs pos="50000">
-              <a:schemeClr val="phClr">
-                <a:satMod val="110000"/>
-                <a:lumMod val="100000"/>
-                <a:shade val="100000"/>
-              </a:schemeClr>
-            </a:gs>
-            <a:gs pos="100000">
-              <a:schemeClr val="phClr">
-                <a:lumMod val="99000"/>
-                <a:satMod val="120000"/>
-                <a:shade val="78000"/>
-              </a:schemeClr>
-            </a:gs>
-          </a:gsLst>
-          <a:lin ang="5400000" scaled="0"/>
-        </a:gradFill>
-      </a:fillStyleLst>
-      <a:lnStyleLst>
-        <a:ln w="6350" cap="flat" cmpd="sng" algn="ctr">
-          <a:solidFill>
-            <a:schemeClr val="phClr"/>
-          </a:solidFill>
-          <a:prstDash val="solid"/>
-          <a:miter lim="800000"/>
-        </a:ln>
-        <a:ln w="12700" cap="flat" cmpd="sng" algn="ctr">
-          <a:solidFill>
-            <a:schemeClr val="phClr"/>
-          </a:solidFill>
-          <a:prstDash val="solid"/>
-          <a:miter lim="800000"/>
-        </a:ln>
-        <a:ln w="19050" cap="flat" cmpd="sng" algn="ctr">
-          <a:solidFill>
-            <a:schemeClr val="phClr"/>
-          </a:solidFill>
-          <a:prstDash val="solid"/>
-          <a:miter lim="800000"/>
-        </a:ln>
-      </a:lnStyleLst>
-      <a:effectStyleLst>
-        <a:effectStyle>
-          <a:effectLst/>
-        </a:effectStyle>
-        <a:effectStyle>
-          <a:effectLst/>
-        </a:effectStyle>
-        <a:effectStyle>
-          <a:effectLst>
-            <a:outerShdw blurRad="57150" dist="19050" dir="5400000" algn="ctr" rotWithShape="0">
-              <a:srgbClr val="000000">
-                <a:alpha val="63000"/>
-              </a:srgbClr>
-            </a:outerShdw>
-          </a:effectLst>
-        </a:effectStyle>
-      </a:effectStyleLst>
-      <a:bgFillStyleLst>
-        <a:solidFill>
-          <a:schemeClr val="phClr"/>
-        </a:solidFill>
-        <a:solidFill>
-          <a:schemeClr val="phClr">
-            <a:tint val="95000"/>
-            <a:satMod val="170000"/>
-          </a:schemeClr>
-        </a:solidFill>
-        <a:gradFill rotWithShape="1">
-          <a:gsLst>
-            <a:gs pos="0">
-              <a:schemeClr val="phClr">
-                <a:tint val="93000"/>
-                <a:satMod val="150000"/>
-                <a:shade val="98000"/>
-                <a:lumMod val="102000"/>
-              </a:schemeClr>
-            </a:gs>
-            <a:gs pos="50000">
-              <a:schemeClr val="phClr">
-                <a:tint val="98000"/>
-                <a:satMod val="130000"/>
-                <a:shade val="90000"/>
-                <a:lumMod val="103000"/>
-              </a:schemeClr>
-            </a:gs>
-            <a:gs pos="100000">
-              <a:schemeClr val="phClr">
-                <a:shade val="63000"/>
-                <a:satMod val="120000"/>
-              </a:schemeClr>
-            </a:gs>
-          </a:gsLst>
-          <a:lin ang="5400000" scaled="0"/>
-        </a:gradFill>
-      </a:bgFillStyleLst>
-    </a:fmtScheme>
-  </a:themeElements>
-  <a:objectDefaults/>
-  <a:extraClrSchemeLst/>
-  <a:extLst>
-    <a:ext uri="{05A4C25C-085E-4340-85A3-A5531E510DB2}">
-      <thm15:themeFamily xmlns:thm15="http://schemas.microsoft.com/office/thememl/2012/main" name="Office Theme" id="{62F939B6-93AF-4DB8-9C6B-D6C7DFDC589F}" vid="{4A3C46E8-61CC-4603-A589-7422A47A8E4A}"/>
-    </a:ext>
-  </a:extLst>
 </a:theme>
 </file>
 
 <file path=customXml/item1.xml><?xml version="1.0" encoding="utf-8"?>
+<p:properties xmlns:p="http://schemas.microsoft.com/office/2006/metadata/properties" xmlns:xsi="http://www.w3.org/2001/XMLSchema-instance" xmlns:pc="http://schemas.microsoft.com/office/infopath/2007/PartnerControls">
+  <documentManagement/>
+</p:properties>
+</file>
+
+<file path=customXml/item2.xml><?xml version="1.0" encoding="utf-8"?>
+<?mso-contentType ?>
+<FormTemplates xmlns="http://schemas.microsoft.com/sharepoint/v3/contenttype/forms">
+  <Display>DocumentLibraryForm</Display>
+  <Edit>DocumentLibraryForm</Edit>
+  <New>DocumentLibraryForm</New>
+</FormTemplates>
+</file>
+
+<file path=customXml/item3.xml><?xml version="1.0" encoding="utf-8"?>
 <ct:contentTypeSchema xmlns:ct="http://schemas.microsoft.com/office/2006/metadata/contentType" xmlns:ma="http://schemas.microsoft.com/office/2006/metadata/properties/metaAttributes" ct:_="" ma:_="" ma:contentTypeName="Document" ma:contentTypeID="0x010100096F1BF43DDE004485E7A868D137D60A" ma:contentTypeVersion="0" ma:contentTypeDescription="Create a new document." ma:contentTypeScope="" ma:versionID="47fff7f98a9c49c088ba096c14cf4458">
   <xsd:schema xmlns:xsd="http://www.w3.org/2001/XMLSchema" xmlns:xs="http://www.w3.org/2001/XMLSchema" xmlns:p="http://schemas.microsoft.com/office/2006/metadata/properties" targetNamespace="http://schemas.microsoft.com/office/2006/metadata/properties" ma:root="true" ma:fieldsID="c05e9f2c4932a6a674126b9dde7716ea">
     <xsd:element name="properties">
@@ -9376,22 +8384,30 @@
 </ct:contentTypeSchema>
 </file>
 
-<file path=customXml/item2.xml><?xml version="1.0" encoding="utf-8"?>
-<?mso-contentType ?>
-<FormTemplates xmlns="http://schemas.microsoft.com/sharepoint/v3/contenttype/forms">
-  <Display>DocumentLibraryForm</Display>
-  <Edit>DocumentLibraryForm</Edit>
-  <New>DocumentLibraryForm</New>
-</FormTemplates>
+<file path=customXml/itemProps1.xml><?xml version="1.0" encoding="utf-8"?>
+<ds:datastoreItem xmlns:ds="http://schemas.openxmlformats.org/officeDocument/2006/customXml" ds:itemID="{4A62A602-78C1-468C-BB25-57CD481DB741}">
+  <ds:schemaRefs>
+    <ds:schemaRef ds:uri="http://purl.org/dc/terms/"/>
+    <ds:schemaRef ds:uri="http://www.w3.org/XML/1998/namespace"/>
+    <ds:schemaRef ds:uri="http://purl.org/dc/dcmitype/"/>
+    <ds:schemaRef ds:uri="http://schemas.microsoft.com/office/2006/documentManagement/types"/>
+    <ds:schemaRef ds:uri="http://schemas.microsoft.com/office/2006/metadata/properties"/>
+    <ds:schemaRef ds:uri="http://purl.org/dc/elements/1.1/"/>
+    <ds:schemaRef ds:uri="http://schemas.microsoft.com/office/infopath/2007/PartnerControls"/>
+    <ds:schemaRef ds:uri="http://schemas.openxmlformats.org/package/2006/metadata/core-properties"/>
+  </ds:schemaRefs>
+</ds:datastoreItem>
 </file>
 
-<file path=customXml/item3.xml><?xml version="1.0" encoding="utf-8"?>
-<p:properties xmlns:p="http://schemas.microsoft.com/office/2006/metadata/properties" xmlns:xsi="http://www.w3.org/2001/XMLSchema-instance" xmlns:pc="http://schemas.microsoft.com/office/infopath/2007/PartnerControls">
-  <documentManagement/>
-</p:properties>
+<file path=customXml/itemProps2.xml><?xml version="1.0" encoding="utf-8"?>
+<ds:datastoreItem xmlns:ds="http://schemas.openxmlformats.org/officeDocument/2006/customXml" ds:itemID="{737ED6F0-5E4C-4CD0-9B68-9C53F925A6F7}">
+  <ds:schemaRefs>
+    <ds:schemaRef ds:uri="http://schemas.microsoft.com/sharepoint/v3/contenttype/forms"/>
+  </ds:schemaRefs>
+</ds:datastoreItem>
 </file>
 
-<file path=customXml/itemProps1.xml><?xml version="1.0" encoding="utf-8"?>
+<file path=customXml/itemProps3.xml><?xml version="1.0" encoding="utf-8"?>
 <ds:datastoreItem xmlns:ds="http://schemas.openxmlformats.org/officeDocument/2006/customXml" ds:itemID="{491DF113-39A2-46D5-BFDA-E63300A9ECAB}">
   <ds:schemaRefs>
     <ds:schemaRef ds:uri="http://schemas.microsoft.com/office/2006/metadata/contentType"/>
@@ -9405,27 +8421,4 @@
     <ds:schemaRef ds:uri="http://schemas.microsoft.com/office/infopath/2007/PartnerControls"/>
   </ds:schemaRefs>
 </ds:datastoreItem>
-</file>
-
-<file path=customXml/itemProps2.xml><?xml version="1.0" encoding="utf-8"?>
-<ds:datastoreItem xmlns:ds="http://schemas.openxmlformats.org/officeDocument/2006/customXml" ds:itemID="{737ED6F0-5E4C-4CD0-9B68-9C53F925A6F7}">
-  <ds:schemaRefs>
-    <ds:schemaRef ds:uri="http://schemas.microsoft.com/sharepoint/v3/contenttype/forms"/>
-  </ds:schemaRefs>
-</ds:datastoreItem>
-</file>
-
-<file path=customXml/itemProps3.xml><?xml version="1.0" encoding="utf-8"?>
-<ds:datastoreItem xmlns:ds="http://schemas.openxmlformats.org/officeDocument/2006/customXml" ds:itemID="{4A62A602-78C1-468C-BB25-57CD481DB741}">
-  <ds:schemaRefs>
-    <ds:schemaRef ds:uri="http://purl.org/dc/terms/"/>
-    <ds:schemaRef ds:uri="http://www.w3.org/XML/1998/namespace"/>
-    <ds:schemaRef ds:uri="http://purl.org/dc/dcmitype/"/>
-    <ds:schemaRef ds:uri="http://schemas.microsoft.com/office/2006/documentManagement/types"/>
-    <ds:schemaRef ds:uri="http://schemas.microsoft.com/office/2006/metadata/properties"/>
-    <ds:schemaRef ds:uri="http://purl.org/dc/elements/1.1/"/>
-    <ds:schemaRef ds:uri="http://schemas.microsoft.com/office/infopath/2007/PartnerControls"/>
-    <ds:schemaRef ds:uri="http://schemas.openxmlformats.org/package/2006/metadata/core-properties"/>
-  </ds:schemaRefs>
-</ds:datastoreItem>
 </file>